--- a/memberC_files/医疗AI_Agent_课程项目.pptx
+++ b/memberC_files/医疗AI_Agent_课程项目.pptx
@@ -16,6 +16,7 @@
     <p:sldId id="264" r:id="rId15"/>
     <p:sldId id="265" r:id="rId16"/>
     <p:sldId id="266" r:id="rId17"/>
+    <p:sldId id="267" r:id="rId18"/>
   </p:sldIdLst>
   <p:sldSz cx="12191695" cy="6858000" type="screen4x3"/>
   <p:notesSz cx="6858000" cy="9144000"/>
@@ -3225,6 +3226,277 @@
     <p:bg>
       <p:bgPr>
         <a:solidFill>
+          <a:srgbClr val="1A5276"/>
+        </a:solidFill>
+        <a:effectLst/>
+      </p:bgPr>
+    </p:bg>
+    <p:spTree>
+      <p:nvGrpSpPr>
+        <p:cNvPr id="1" name=""/>
+        <p:cNvGrpSpPr/>
+        <p:nvPr/>
+      </p:nvGrpSpPr>
+      <p:grpSpPr/>
+      <p:sp>
+        <p:nvSpPr>
+          <p:cNvPr id="2" name="TextBox 1"/>
+          <p:cNvSpPr txBox="1"/>
+          <p:nvPr/>
+        </p:nvSpPr>
+        <p:spPr>
+          <a:xfrm>
+            <a:off x="914400" y="914400"/>
+            <a:ext cx="10058400" cy="1371600"/>
+          </a:xfrm>
+          <a:prstGeom prst="rect">
+            <a:avLst/>
+          </a:prstGeom>
+          <a:noFill/>
+        </p:spPr>
+        <p:txBody>
+          <a:bodyPr wrap="square">
+            <a:spAutoFit/>
+          </a:bodyPr>
+          <a:lstStyle/>
+          <a:p>
+            <a:pPr algn="ctr">
+              <a:defRPr sz="3600" b="1">
+                <a:solidFill>
+                  <a:srgbClr val="FFFFFF"/>
+                </a:solidFill>
+              </a:defRPr>
+            </a:pPr>
+            <a:r>
+              <a:t>🌐 Web Demo 演示</a:t>
+            </a:r>
+          </a:p>
+        </p:txBody>
+      </p:sp>
+      <p:sp>
+        <p:nvSpPr>
+          <p:cNvPr id="3" name="TextBox 2"/>
+          <p:cNvSpPr txBox="1"/>
+          <p:nvPr/>
+        </p:nvSpPr>
+        <p:spPr>
+          <a:xfrm>
+            <a:off x="914400" y="2103120"/>
+            <a:ext cx="10058400" cy="731520"/>
+          </a:xfrm>
+          <a:prstGeom prst="rect">
+            <a:avLst/>
+          </a:prstGeom>
+          <a:noFill/>
+        </p:spPr>
+        <p:txBody>
+          <a:bodyPr wrap="square">
+            <a:spAutoFit/>
+          </a:bodyPr>
+          <a:lstStyle/>
+          <a:p>
+            <a:pPr algn="ctr">
+              <a:defRPr sz="1800" b="0">
+                <a:solidFill>
+                  <a:srgbClr val="BBDDFF"/>
+                </a:solidFill>
+              </a:defRPr>
+            </a:pPr>
+            <a:r>
+              <a:t>中文界面  |  GPU 真机推理  |  Gradio 框架  |  RTX 3060</a:t>
+            </a:r>
+          </a:p>
+        </p:txBody>
+      </p:sp>
+      <p:sp>
+        <p:nvSpPr>
+          <p:cNvPr id="4" name="TextBox 3"/>
+          <p:cNvSpPr txBox="1"/>
+          <p:nvPr/>
+        </p:nvSpPr>
+        <p:spPr>
+          <a:xfrm>
+            <a:off x="1828800" y="3017520"/>
+            <a:ext cx="8229600" cy="548640"/>
+          </a:xfrm>
+          <a:prstGeom prst="rect">
+            <a:avLst/>
+          </a:prstGeom>
+          <a:noFill/>
+        </p:spPr>
+        <p:txBody>
+          <a:bodyPr wrap="square">
+            <a:spAutoFit/>
+          </a:bodyPr>
+          <a:lstStyle/>
+          <a:p>
+            <a:pPr algn="l">
+              <a:defRPr sz="1600" b="0">
+                <a:solidFill>
+                  <a:srgbClr val="FFFFFF"/>
+                </a:solidFill>
+              </a:defRPr>
+            </a:pPr>
+            <a:r>
+              <a:t>🖥  简洁中文 Web UI，输入医学问题即可获取 AI 回答</a:t>
+            </a:r>
+          </a:p>
+        </p:txBody>
+      </p:sp>
+      <p:sp>
+        <p:nvSpPr>
+          <p:cNvPr id="5" name="TextBox 4"/>
+          <p:cNvSpPr txBox="1"/>
+          <p:nvPr/>
+        </p:nvSpPr>
+        <p:spPr>
+          <a:xfrm>
+            <a:off x="1828800" y="3611879"/>
+            <a:ext cx="8229600" cy="548640"/>
+          </a:xfrm>
+          <a:prstGeom prst="rect">
+            <a:avLst/>
+          </a:prstGeom>
+          <a:noFill/>
+        </p:spPr>
+        <p:txBody>
+          <a:bodyPr wrap="square">
+            <a:spAutoFit/>
+          </a:bodyPr>
+          <a:lstStyle/>
+          <a:p>
+            <a:pPr algn="l">
+              <a:defRPr sz="1600" b="0">
+                <a:solidFill>
+                  <a:srgbClr val="FFFFFF"/>
+                </a:solidFill>
+              </a:defRPr>
+            </a:pPr>
+            <a:r>
+              <a:t>🚀  实时 GPU 推理，DeepSeek-1.5B + LoRA 生成诊断建议</a:t>
+            </a:r>
+          </a:p>
+        </p:txBody>
+      </p:sp>
+      <p:sp>
+        <p:nvSpPr>
+          <p:cNvPr id="6" name="TextBox 5"/>
+          <p:cNvSpPr txBox="1"/>
+          <p:nvPr/>
+        </p:nvSpPr>
+        <p:spPr>
+          <a:xfrm>
+            <a:off x="1828800" y="4206240"/>
+            <a:ext cx="8229600" cy="548640"/>
+          </a:xfrm>
+          <a:prstGeom prst="rect">
+            <a:avLst/>
+          </a:prstGeom>
+          <a:noFill/>
+        </p:spPr>
+        <p:txBody>
+          <a:bodyPr wrap="square">
+            <a:spAutoFit/>
+          </a:bodyPr>
+          <a:lstStyle/>
+          <a:p>
+            <a:pPr algn="l">
+              <a:defRPr sz="1600" b="0">
+                <a:solidFill>
+                  <a:srgbClr val="FFFFFF"/>
+                </a:solidFill>
+              </a:defRPr>
+            </a:pPr>
+            <a:r>
+              <a:t>📚  FAISS 检索 78K 医疗文献，为回答提供循证依据</a:t>
+            </a:r>
+          </a:p>
+        </p:txBody>
+      </p:sp>
+      <p:sp>
+        <p:nvSpPr>
+          <p:cNvPr id="7" name="TextBox 6"/>
+          <p:cNvSpPr txBox="1"/>
+          <p:nvPr/>
+        </p:nvSpPr>
+        <p:spPr>
+          <a:xfrm>
+            <a:off x="1828800" y="4800600"/>
+            <a:ext cx="8229600" cy="548640"/>
+          </a:xfrm>
+          <a:prstGeom prst="rect">
+            <a:avLst/>
+          </a:prstGeom>
+          <a:noFill/>
+        </p:spPr>
+        <p:txBody>
+          <a:bodyPr wrap="square">
+            <a:spAutoFit/>
+          </a:bodyPr>
+          <a:lstStyle/>
+          <a:p>
+            <a:pPr algn="l">
+              <a:defRPr sz="1600" b="0">
+                <a:solidFill>
+                  <a:srgbClr val="FFFFFF"/>
+                </a:solidFill>
+              </a:defRPr>
+            </a:pPr>
+            <a:r>
+              <a:t>🔄  三模式自由切换：混合智能体 / 纯 SFT / 纯 RAG</a:t>
+            </a:r>
+          </a:p>
+        </p:txBody>
+      </p:sp>
+      <p:sp>
+        <p:nvSpPr>
+          <p:cNvPr id="8" name="TextBox 7"/>
+          <p:cNvSpPr txBox="1"/>
+          <p:nvPr/>
+        </p:nvSpPr>
+        <p:spPr>
+          <a:xfrm>
+            <a:off x="1828800" y="5394960"/>
+            <a:ext cx="8229600" cy="548640"/>
+          </a:xfrm>
+          <a:prstGeom prst="rect">
+            <a:avLst/>
+          </a:prstGeom>
+          <a:noFill/>
+        </p:spPr>
+        <p:txBody>
+          <a:bodyPr wrap="square">
+            <a:spAutoFit/>
+          </a:bodyPr>
+          <a:lstStyle/>
+          <a:p>
+            <a:pPr algn="l">
+              <a:defRPr sz="1600" b="0">
+                <a:solidFill>
+                  <a:srgbClr val="FFFFFF"/>
+                </a:solidFill>
+              </a:defRPr>
+            </a:pPr>
+            <a:r>
+              <a:t>📊  评测数据内嵌展示：RAGAS 指标表 + 测试集分布</a:t>
+            </a:r>
+          </a:p>
+        </p:txBody>
+      </p:sp>
+    </p:spTree>
+  </p:cSld>
+  <p:clrMapOvr>
+    <a:masterClrMapping/>
+  </p:clrMapOvr>
+</p:sld>
+</file>
+
+<file path=ppt/slides/slide11.xml><?xml version="1.0" encoding="utf-8"?>
+<p:sld xmlns:a="http://schemas.openxmlformats.org/drawingml/2006/main" xmlns:p="http://schemas.openxmlformats.org/presentationml/2006/main" xmlns:r="http://schemas.openxmlformats.org/officeDocument/2006/relationships">
+  <p:cSld>
+    <p:bg>
+      <p:bgPr>
+        <a:solidFill>
           <a:srgbClr val="FFFFFF"/>
         </a:solidFill>
         <a:effectLst/>
@@ -3333,7 +3605,7 @@
               </a:defRPr>
             </a:pPr>
             <a:r>
-              <a:t>QLoRA 微调 1.5B 在 Faithfulness (0.867) 上显著优于 7B+RAG (0.595)，知识"内化"比"检索"更可靠</a:t>
+              <a:t>QLoRA 微调 1.5B 在 Faithfulness (0.867) 上完胜 RAG (0.595)。知识"内化"比"检索"更可靠</a:t>
             </a:r>
           </a:p>
         </p:txBody>
@@ -3399,7 +3671,7 @@
               </a:defRPr>
             </a:pPr>
             <a:r>
-              <a:t>1.5B 模型仅需 5.6GB 显存，8GB 消费级显卡即可完成医疗领域微调，大幅降低开发门槛</a:t>
+              <a:t>1.5B 模型仅需 5.6GB 显存，8GB 消费级显卡即可完成医疗领域微调</a:t>
             </a:r>
           </a:p>
         </p:txBody>
@@ -3453,7 +3725,7 @@
               </a:defRPr>
             </a:pPr>
             <a:r>
-              <a:t>3. Agent 架构有提升空间</a:t>
+              <a:t>3. 评测方法论可复用</a:t>
             </a:r>
           </a:p>
           <a:p>
@@ -3465,7 +3737,7 @@
               </a:defRPr>
             </a:pPr>
             <a:r>
-              <a:t>smolagents CodeAgent 的检索-推理协调可进一步优化，Hybrid 模式有潜力超越纯 SFT</a:t>
+              <a:t>去重→分层抽样→三管道→RAGAS→可视化。适用于任何垂直领域 AI Agent 评测</a:t>
             </a:r>
           </a:p>
         </p:txBody>
@@ -3500,7 +3772,7 @@
               </a:defRPr>
             </a:pPr>
             <a:r>
-              <a:t>未来方向：🔬 更大规模 CoT 微调  |  🧩 多模态 (ECG图像+文本)  |  🏥 真实临床验证</a:t>
+              <a:t>未来：🔬 CoT微调  |  🧩 多模态(ECG图像+文本)  |  🏥 真实临床验证</a:t>
             </a:r>
           </a:p>
         </p:txBody>
@@ -3513,7 +3785,7 @@
 </p:sld>
 </file>
 
-<file path=ppt/slides/slide11.xml><?xml version="1.0" encoding="utf-8"?>
+<file path=ppt/slides/slide12.xml><?xml version="1.0" encoding="utf-8"?>
 <p:sld xmlns:a="http://schemas.openxmlformats.org/drawingml/2006/main" xmlns:p="http://schemas.openxmlformats.org/presentationml/2006/main" xmlns:r="http://schemas.openxmlformats.org/officeDocument/2006/relationships">
   <p:cSld>
     <p:bg>
@@ -3838,7 +4110,7 @@
               </a:defRPr>
             </a:pPr>
             <a:r>
-              <a:t>• 大模型 + 外部知识库</a:t>
+              <a:t>• 模型 + 知识库</a:t>
             </a:r>
           </a:p>
         </p:txBody>
@@ -4397,7 +4669,7 @@
               </a:defRPr>
             </a:pPr>
             <a:r>
-              <a:t>模型：7B 模型 + FAISS 检索</a:t>
+              <a:t>模型：1.5B base + FAISS 检索</a:t>
             </a:r>
           </a:p>
           <a:p>
@@ -4409,7 +4681,7 @@
               </a:defRPr>
             </a:pPr>
             <a:r>
-              <a:t>思路：规模换质量</a:t>
+              <a:t>思路：固定工作流，检索→生成</a:t>
             </a:r>
           </a:p>
         </p:txBody>
@@ -4484,7 +4756,7 @@
               </a:defRPr>
             </a:pPr>
             <a:r>
-              <a:t>模型：微调 1.5B 模型</a:t>
+              <a:t>模型：1.5B QLoRA 微调</a:t>
             </a:r>
           </a:p>
           <a:p>
@@ -4496,7 +4768,7 @@
               </a:defRPr>
             </a:pPr>
             <a:r>
-              <a:t>思路：微调换质量</a:t>
+              <a:t>思路：直接推理，知识来自权重</a:t>
             </a:r>
           </a:p>
         </p:txBody>
@@ -4571,7 +4843,7 @@
               </a:defRPr>
             </a:pPr>
             <a:r>
-              <a:t>模型：1.5B + RAG (Agent)</a:t>
+              <a:t>模型：1.5B QLoRA + RAG</a:t>
             </a:r>
           </a:p>
           <a:p>
@@ -4583,7 +4855,7 @@
               </a:defRPr>
             </a:pPr>
             <a:r>
-              <a:t>思路：取长补短</a:t>
+              <a:t>思路：CodeAgent 自主编排</a:t>
             </a:r>
           </a:p>
         </p:txBody>
@@ -4618,7 +4890,7 @@
               </a:defRPr>
             </a:pPr>
             <a:r>
-              <a:t>通过统一的 MedicalAgentRunner 调度，RAGAS 框架进行公平对比评测</a:t>
+              <a:t>统一调度 + 同一评测标准 = 公平对比</a:t>
             </a:r>
           </a:p>
         </p:txBody>
@@ -4876,7 +5148,7 @@
               </a:defRPr>
             </a:pPr>
             <a:r>
-              <a:t>🔍 最优检索配置：消融实验得出：chunk_size=512, overlap=50, top_k=3，F1 = 0.8628</a:t>
+              <a:t>🔍 最优检索配置：消融实验：chunk_size=512, overlap=50, top_k=3, F1=0.8628</a:t>
             </a:r>
           </a:p>
         </p:txBody>
@@ -4930,7 +5202,7 @@
               </a:defRPr>
             </a:pPr>
             <a:r>
-              <a:t>⚡ 检索性能：78K 文档中语义搜索 &lt; 1 秒 (GPU)，中英文混合检索支持</a:t>
+              <a:t>⚡ 检索性能：78K 文档中语义搜索 &lt; 1 秒 (GPU)，中英文混合检索</a:t>
             </a:r>
           </a:p>
         </p:txBody>
@@ -5140,30 +5412,6 @@
               <a:t>• LoRA 权重仅 ~71 MB</a:t>
             </a:r>
           </a:p>
-          <a:p>
-            <a:pPr algn="l">
-              <a:defRPr sz="1500" b="0">
-                <a:solidFill>
-                  <a:srgbClr val="2C3E50"/>
-                </a:solidFill>
-              </a:defRPr>
-            </a:pPr>
-            <a:r>
-              <a:t>• Loss 收敛良好</a:t>
-            </a:r>
-          </a:p>
-          <a:p>
-            <a:pPr algn="l">
-              <a:defRPr sz="1500" b="0">
-                <a:solidFill>
-                  <a:srgbClr val="2C3E50"/>
-                </a:solidFill>
-              </a:defRPr>
-            </a:pPr>
-            <a:r>
-              <a:t>• 5 大场景对比验证</a:t>
-            </a:r>
-          </a:p>
         </p:txBody>
       </p:sp>
       <p:sp>
@@ -5272,31 +5520,7 @@
               </a:defRPr>
             </a:pPr>
             <a:r>
-              <a:t>• 中英文混合问答</a:t>
-            </a:r>
-          </a:p>
-          <a:p>
-            <a:pPr algn="l">
-              <a:defRPr sz="1500" b="0">
-                <a:solidFill>
-                  <a:srgbClr val="2C3E50"/>
-                </a:solidFill>
-              </a:defRPr>
-            </a:pPr>
-            <a:r>
               <a:t>• 适配消费级硬件</a:t>
-            </a:r>
-          </a:p>
-          <a:p>
-            <a:pPr algn="l">
-              <a:defRPr sz="1500" b="0">
-                <a:solidFill>
-                  <a:srgbClr val="2C3E50"/>
-                </a:solidFill>
-              </a:defRPr>
-            </a:pPr>
-            <a:r>
-              <a:t>• 可复现训练流程</a:t>
             </a:r>
           </a:p>
         </p:txBody>
@@ -5357,7 +5581,7 @@
               </a:defRPr>
             </a:pPr>
             <a:r>
-              <a:t>🤖 成员 C — Agent 架构与双轨评测</a:t>
+              <a:t>🤖 成员 C — Agent 架构</a:t>
             </a:r>
           </a:p>
         </p:txBody>
@@ -5447,7 +5671,7 @@
               </a:defRPr>
             </a:pPr>
             <a:r>
-              <a:t>  • agent_core.py: 三管道编排</a:t>
+              <a:t>  • agent_core.py: 三管道+CodeAgent</a:t>
             </a:r>
           </a:p>
           <a:p>
@@ -5459,7 +5683,7 @@
               </a:defRPr>
             </a:pPr>
             <a:r>
-              <a:t>  • build_index.py: 索引构建</a:t>
+              <a:t>  • build_index.py: FAISS索引构建</a:t>
             </a:r>
           </a:p>
           <a:p>
@@ -5471,7 +5695,7 @@
               </a:defRPr>
             </a:pPr>
             <a:r>
-              <a:t>  • smolagents CodeAgent</a:t>
+              <a:t>  • 懒加载 + smolagents 兼容</a:t>
             </a:r>
           </a:p>
         </p:txBody>
@@ -5537,7 +5761,7 @@
               </a:defRPr>
             </a:pPr>
             <a:r>
-              <a:t>RAGAS 双轨对比</a:t>
+              <a:t>150条公平测试集</a:t>
             </a:r>
           </a:p>
           <a:p>
@@ -5549,7 +5773,7 @@
               </a:defRPr>
             </a:pPr>
             <a:r>
-              <a:t>  • test_dataset.py: 150条测试集</a:t>
+              <a:t>  • MD5哈希去重(排除训练集)</a:t>
             </a:r>
           </a:p>
           <a:p>
@@ -5561,7 +5785,7 @@
               </a:defRPr>
             </a:pPr>
             <a:r>
-              <a:t>  • run_evaluation.py: 指标计算</a:t>
+              <a:t>  • 5领域分层抽样 seed=42</a:t>
             </a:r>
           </a:p>
           <a:p>
@@ -5573,7 +5797,7 @@
               </a:defRPr>
             </a:pPr>
             <a:r>
-              <a:t>  • analyze_results.py: 可视化</a:t>
+              <a:t>  • RAGAS: Faithfulness+Relevancy</a:t>
             </a:r>
           </a:p>
           <a:p>
@@ -5585,7 +5809,7 @@
               </a:defRPr>
             </a:pPr>
             <a:r>
-              <a:t>  • Faithfulness + Relevancy</a:t>
+              <a:t>  • 4种可视化图表</a:t>
             </a:r>
           </a:p>
         </p:txBody>
@@ -5651,7 +5875,7 @@
               </a:defRPr>
             </a:pPr>
             <a:r>
-              <a:t>Gradio 交互演示</a:t>
+              <a:t>Gradio 中文界面</a:t>
             </a:r>
           </a:p>
           <a:p>
@@ -5663,7 +5887,7 @@
               </a:defRPr>
             </a:pPr>
             <a:r>
-              <a:t>  • 中文简洁界面</a:t>
+              <a:t>  • GPU 真机推理 RTX 3060</a:t>
             </a:r>
           </a:p>
           <a:p>
@@ -5675,7 +5899,7 @@
               </a:defRPr>
             </a:pPr>
             <a:r>
-              <a:t>  • GPU 真机推理</a:t>
+              <a:t>  • 3 种模式实时切换</a:t>
             </a:r>
           </a:p>
           <a:p>
@@ -5687,7 +5911,7 @@
               </a:defRPr>
             </a:pPr>
             <a:r>
-              <a:t>  • 3 种模式实时切换</a:t>
+              <a:t>  • 评测数据内嵌展示</a:t>
             </a:r>
           </a:p>
           <a:p>
@@ -5753,263 +5977,34 @@
           <a:lstStyle/>
           <a:p>
             <a:pPr algn="l">
-              <a:defRPr sz="3200" b="1">
+              <a:defRPr sz="2800" b="1">
                 <a:solidFill>
                   <a:srgbClr val="1A5276"/>
                 </a:solidFill>
               </a:defRPr>
             </a:pPr>
             <a:r>
-              <a:t>📊 评测结果对比</a:t>
-            </a:r>
-          </a:p>
-        </p:txBody>
-      </p:sp>
-      <p:sp>
-        <p:nvSpPr>
-          <p:cNvPr id="3" name="TextBox 2"/>
-          <p:cNvSpPr txBox="1"/>
-          <p:nvPr/>
-        </p:nvSpPr>
-        <p:spPr>
-          <a:xfrm>
-            <a:off x="457200" y="1188720"/>
-            <a:ext cx="10972800" cy="457200"/>
-          </a:xfrm>
-          <a:prstGeom prst="rect">
-            <a:avLst/>
-          </a:prstGeom>
-          <a:noFill/>
-        </p:spPr>
-        <p:txBody>
-          <a:bodyPr wrap="square">
-            <a:spAutoFit/>
-          </a:bodyPr>
-          <a:lstStyle/>
-          <a:p>
-            <a:pPr algn="l">
-              <a:defRPr sz="1600" b="0">
-                <a:solidFill>
-                  <a:srgbClr val="7F8C8D"/>
-                </a:solidFill>
-              </a:defRPr>
-            </a:pPr>
-            <a:r>
-              <a:t>RAGAS 双轨评测 — Faithfulness (忠实度) &amp; Answer Relevancy (答案相关性)</a:t>
-            </a:r>
-          </a:p>
-        </p:txBody>
-      </p:sp>
-      <p:sp>
-        <p:nvSpPr>
-          <p:cNvPr id="4" name="TextBox 3"/>
-          <p:cNvSpPr txBox="1"/>
-          <p:nvPr/>
-        </p:nvSpPr>
-        <p:spPr>
-          <a:xfrm>
-            <a:off x="731520" y="1828800"/>
-            <a:ext cx="2286000" cy="548640"/>
-          </a:xfrm>
-          <a:prstGeom prst="rect">
-            <a:avLst/>
-          </a:prstGeom>
-          <a:noFill/>
-        </p:spPr>
-        <p:txBody>
-          <a:bodyPr wrap="square">
-            <a:spAutoFit/>
-          </a:bodyPr>
-          <a:lstStyle/>
-          <a:p>
-            <a:pPr algn="ctr">
-              <a:defRPr sz="1600" b="1">
-                <a:solidFill>
-                  <a:srgbClr val="1A5276"/>
-                </a:solidFill>
-              </a:defRPr>
-            </a:pPr>
-            <a:r>
-              <a:t>管道</a:t>
-            </a:r>
-          </a:p>
-        </p:txBody>
-      </p:sp>
-      <p:sp>
-        <p:nvSpPr>
-          <p:cNvPr id="5" name="TextBox 4"/>
-          <p:cNvSpPr txBox="1"/>
-          <p:nvPr/>
-        </p:nvSpPr>
-        <p:spPr>
-          <a:xfrm>
-            <a:off x="4114800" y="1828800"/>
-            <a:ext cx="2286000" cy="548640"/>
-          </a:xfrm>
-          <a:prstGeom prst="rect">
-            <a:avLst/>
-          </a:prstGeom>
-          <a:noFill/>
-        </p:spPr>
-        <p:txBody>
-          <a:bodyPr wrap="square">
-            <a:spAutoFit/>
-          </a:bodyPr>
-          <a:lstStyle/>
-          <a:p>
-            <a:pPr algn="ctr">
-              <a:defRPr sz="1600" b="1">
-                <a:solidFill>
-                  <a:srgbClr val="1A5276"/>
-                </a:solidFill>
-              </a:defRPr>
-            </a:pPr>
-            <a:r>
-              <a:t>Faithfulness</a:t>
-            </a:r>
-          </a:p>
-        </p:txBody>
-      </p:sp>
-      <p:sp>
-        <p:nvSpPr>
-          <p:cNvPr id="6" name="TextBox 5"/>
-          <p:cNvSpPr txBox="1"/>
-          <p:nvPr/>
-        </p:nvSpPr>
-        <p:spPr>
-          <a:xfrm>
-            <a:off x="6858000" y="1828800"/>
-            <a:ext cx="2286000" cy="548640"/>
-          </a:xfrm>
-          <a:prstGeom prst="rect">
-            <a:avLst/>
-          </a:prstGeom>
-          <a:noFill/>
-        </p:spPr>
-        <p:txBody>
-          <a:bodyPr wrap="square">
-            <a:spAutoFit/>
-          </a:bodyPr>
-          <a:lstStyle/>
-          <a:p>
-            <a:pPr algn="ctr">
-              <a:defRPr sz="1600" b="1">
-                <a:solidFill>
-                  <a:srgbClr val="1A5276"/>
-                </a:solidFill>
-              </a:defRPr>
-            </a:pPr>
-            <a:r>
-              <a:t>Answer Relevancy</a:t>
-            </a:r>
-          </a:p>
-        </p:txBody>
-      </p:sp>
-      <p:sp>
-        <p:nvSpPr>
-          <p:cNvPr id="7" name="TextBox 6"/>
-          <p:cNvSpPr txBox="1"/>
-          <p:nvPr/>
-        </p:nvSpPr>
-        <p:spPr>
-          <a:xfrm>
-            <a:off x="9601200" y="1828800"/>
-            <a:ext cx="2286000" cy="548640"/>
-          </a:xfrm>
-          <a:prstGeom prst="rect">
-            <a:avLst/>
-          </a:prstGeom>
-          <a:noFill/>
-        </p:spPr>
-        <p:txBody>
-          <a:bodyPr wrap="square">
-            <a:spAutoFit/>
-          </a:bodyPr>
-          <a:lstStyle/>
-          <a:p>
-            <a:pPr algn="ctr">
-              <a:defRPr sz="1600" b="1">
-                <a:solidFill>
-                  <a:srgbClr val="1A5276"/>
-                </a:solidFill>
-              </a:defRPr>
-            </a:pPr>
-            <a:r>
-              <a:t>速度</a:t>
-            </a:r>
-          </a:p>
-        </p:txBody>
-      </p:sp>
-      <p:sp>
-        <p:nvSpPr>
-          <p:cNvPr id="8" name="Rectangle 7"/>
+              <a:t>📊 评测方法论 — 如何评估 Agent 效果？ ★</a:t>
+            </a:r>
+          </a:p>
+        </p:txBody>
+      </p:sp>
+      <p:sp>
+        <p:nvSpPr>
+          <p:cNvPr id="3" name="Rectangle 2"/>
           <p:cNvSpPr/>
           <p:nvPr/>
         </p:nvSpPr>
         <p:spPr>
           <a:xfrm>
-            <a:off x="457200" y="2743200"/>
-            <a:ext cx="10972800" cy="914400"/>
+            <a:off x="914400" y="1371600"/>
+            <a:ext cx="10058400" cy="1097280"/>
           </a:xfrm>
           <a:prstGeom prst="rect">
             <a:avLst/>
           </a:prstGeom>
           <a:solidFill>
-            <a:srgbClr val="FDEEEF"/>
-          </a:solidFill>
-          <a:ln w="25400">
-            <a:solidFill>
-              <a:srgbClr val="E63946"/>
-            </a:solidFill>
-          </a:ln>
-        </p:spPr>
-        <p:style>
-          <a:lnRef idx="1">
-            <a:schemeClr val="accent1"/>
-          </a:lnRef>
-          <a:fillRef idx="3">
-            <a:schemeClr val="accent1"/>
-          </a:fillRef>
-          <a:effectRef idx="2">
-            <a:schemeClr val="accent1"/>
-          </a:effectRef>
-          <a:fontRef idx="minor">
-            <a:schemeClr val="lt1"/>
-          </a:fontRef>
-        </p:style>
-        <p:txBody>
-          <a:bodyPr rtlCol="0" anchor="ctr"/>
-          <a:lstStyle/>
-          <a:p>
-            <a:pPr algn="ctr">
-              <a:defRPr sz="1600" b="0">
-                <a:solidFill>
-                  <a:srgbClr val="2C3E50"/>
-                </a:solidFill>
-              </a:defRPr>
-            </a:pPr>
-            <a:r>
-              <a:t>🔴 Pure RAG (7B+检索)         Faithfulness: 0.5954         Answer Relevancy: 0.8744         速度: 中</a:t>
-            </a:r>
-          </a:p>
-        </p:txBody>
-      </p:sp>
-      <p:sp>
-        <p:nvSpPr>
-          <p:cNvPr id="9" name="Rectangle 8"/>
-          <p:cNvSpPr/>
-          <p:nvPr/>
-        </p:nvSpPr>
-        <p:spPr>
-          <a:xfrm>
-            <a:off x="457200" y="3931920"/>
-            <a:ext cx="10972800" cy="914400"/>
-          </a:xfrm>
-          <a:prstGeom prst="rect">
-            <a:avLst/>
-          </a:prstGeom>
-          <a:solidFill>
-            <a:srgbClr val="E8F8F0"/>
+            <a:srgbClr val="FAFAFA"/>
           </a:solidFill>
           <a:ln w="25400">
             <a:solidFill>
@@ -6035,35 +6030,47 @@
           <a:bodyPr rtlCol="0" anchor="ctr"/>
           <a:lstStyle/>
           <a:p>
-            <a:pPr algn="ctr">
-              <a:defRPr sz="1600" b="0">
+            <a:pPr algn="l">
+              <a:defRPr sz="1800" b="1">
+                <a:solidFill>
+                  <a:srgbClr val="2E86C1"/>
+                </a:solidFill>
+              </a:defRPr>
+            </a:pPr>
+            <a:r>
+              <a:t>1️⃣ 测试集准备</a:t>
+            </a:r>
+          </a:p>
+          <a:p>
+            <a:pPr algn="l">
+              <a:defRPr sz="1400" b="0">
                 <a:solidFill>
                   <a:srgbClr val="2C3E50"/>
                 </a:solidFill>
               </a:defRPr>
             </a:pPr>
             <a:r>
-              <a:t>🔵 Pure SFT (微调1.5B)         Faithfulness: 0.8673         Answer Relevancy: 0.8602         速度: 快 ⚡</a:t>
-            </a:r>
-          </a:p>
-        </p:txBody>
-      </p:sp>
-      <p:sp>
-        <p:nvSpPr>
-          <p:cNvPr id="10" name="Rectangle 9"/>
+              <a:t>78K 语料 → MD5哈希排除SFT训练集 → 5领域分层抽样 → 150条公平测试题</a:t>
+            </a:r>
+          </a:p>
+        </p:txBody>
+      </p:sp>
+      <p:sp>
+        <p:nvSpPr>
+          <p:cNvPr id="4" name="Rectangle 3"/>
           <p:cNvSpPr/>
           <p:nvPr/>
         </p:nvSpPr>
         <p:spPr>
           <a:xfrm>
-            <a:off x="457200" y="5120640"/>
-            <a:ext cx="10972800" cy="914400"/>
+            <a:off x="914400" y="2651760"/>
+            <a:ext cx="10058400" cy="1097280"/>
           </a:xfrm>
           <a:prstGeom prst="rect">
             <a:avLst/>
           </a:prstGeom>
           <a:solidFill>
-            <a:srgbClr val="FDF2E9"/>
+            <a:srgbClr val="FAFAFA"/>
           </a:solidFill>
           <a:ln w="25400">
             <a:solidFill>
@@ -6089,50 +6096,163 @@
           <a:bodyPr rtlCol="0" anchor="ctr"/>
           <a:lstStyle/>
           <a:p>
-            <a:pPr algn="ctr">
-              <a:defRPr sz="1600" b="0">
+            <a:pPr algn="l">
+              <a:defRPr sz="1800" b="1">
+                <a:solidFill>
+                  <a:srgbClr val="27AE60"/>
+                </a:solidFill>
+              </a:defRPr>
+            </a:pPr>
+            <a:r>
+              <a:t>2️⃣ RAGAS 双指标</a:t>
+            </a:r>
+          </a:p>
+          <a:p>
+            <a:pPr algn="l">
+              <a:defRPr sz="1400" b="0">
                 <a:solidFill>
                   <a:srgbClr val="2C3E50"/>
                 </a:solidFill>
               </a:defRPr>
             </a:pPr>
             <a:r>
-              <a:t>🟢 Hybrid (1.5B+RAG)         Faithfulness: 0.6179         Answer Relevancy: 0.8364         速度: 慢</a:t>
-            </a:r>
-          </a:p>
-        </p:txBody>
-      </p:sp>
-      <p:sp>
-        <p:nvSpPr>
-          <p:cNvPr id="11" name="TextBox 10"/>
-          <p:cNvSpPr txBox="1"/>
+              <a:t>Faithfulness（忠实度）：答案能否从上下文推断？防止编造</a:t>
+            </a:r>
+            <a:br/>
+            <a:r>
+              <a:t>Answer Relevancy（相关性）：答案是否切题？防止跑题</a:t>
+            </a:r>
+          </a:p>
+        </p:txBody>
+      </p:sp>
+      <p:sp>
+        <p:nvSpPr>
+          <p:cNvPr id="5" name="Rectangle 4"/>
+          <p:cNvSpPr/>
           <p:nvPr/>
         </p:nvSpPr>
         <p:spPr>
           <a:xfrm>
-            <a:off x="731520" y="6217920"/>
-            <a:ext cx="10058400" cy="457200"/>
+            <a:off x="914400" y="3931920"/>
+            <a:ext cx="10058400" cy="1097280"/>
           </a:xfrm>
           <a:prstGeom prst="rect">
             <a:avLst/>
           </a:prstGeom>
-          <a:noFill/>
-        </p:spPr>
-        <p:txBody>
-          <a:bodyPr wrap="square">
-            <a:spAutoFit/>
-          </a:bodyPr>
-          <a:lstStyle/>
-          <a:p>
-            <a:pPr algn="ctr">
-              <a:defRPr sz="1600" b="0">
-                <a:solidFill>
-                  <a:srgbClr val="27AE60"/>
-                </a:solidFill>
-              </a:defRPr>
-            </a:pPr>
-            <a:r>
-              <a:t>✨ 关键结论：QLoRA 微调的 1.5B 小模型在 Faithfulness 上显著优于 7B+RAG (0.867 vs 0.595)</a:t>
+          <a:solidFill>
+            <a:srgbClr val="FAFAFA"/>
+          </a:solidFill>
+          <a:ln w="25400">
+            <a:solidFill>
+              <a:srgbClr val="E67E22"/>
+            </a:solidFill>
+          </a:ln>
+        </p:spPr>
+        <p:style>
+          <a:lnRef idx="1">
+            <a:schemeClr val="accent1"/>
+          </a:lnRef>
+          <a:fillRef idx="3">
+            <a:schemeClr val="accent1"/>
+          </a:fillRef>
+          <a:effectRef idx="2">
+            <a:schemeClr val="accent1"/>
+          </a:effectRef>
+          <a:fontRef idx="minor">
+            <a:schemeClr val="lt1"/>
+          </a:fontRef>
+        </p:style>
+        <p:txBody>
+          <a:bodyPr rtlCol="0" anchor="ctr"/>
+          <a:lstStyle/>
+          <a:p>
+            <a:pPr algn="l">
+              <a:defRPr sz="1800" b="1">
+                <a:solidFill>
+                  <a:srgbClr val="E67E22"/>
+                </a:solidFill>
+              </a:defRPr>
+            </a:pPr>
+            <a:r>
+              <a:t>3️⃣ 三管道评测</a:t>
+            </a:r>
+          </a:p>
+          <a:p>
+            <a:pPr algn="l">
+              <a:defRPr sz="1400" b="0">
+                <a:solidFill>
+                  <a:srgbClr val="2C3E50"/>
+                </a:solidFill>
+              </a:defRPr>
+            </a:pPr>
+            <a:r>
+              <a:t>同一问题 → 三管道并行推理 → 统一RAGAS打分 → 记录耗时</a:t>
+            </a:r>
+          </a:p>
+        </p:txBody>
+      </p:sp>
+      <p:sp>
+        <p:nvSpPr>
+          <p:cNvPr id="6" name="Rectangle 5"/>
+          <p:cNvSpPr/>
+          <p:nvPr/>
+        </p:nvSpPr>
+        <p:spPr>
+          <a:xfrm>
+            <a:off x="914400" y="5212079"/>
+            <a:ext cx="10058400" cy="1097280"/>
+          </a:xfrm>
+          <a:prstGeom prst="rect">
+            <a:avLst/>
+          </a:prstGeom>
+          <a:solidFill>
+            <a:srgbClr val="FAFAFA"/>
+          </a:solidFill>
+          <a:ln w="25400">
+            <a:solidFill>
+              <a:srgbClr val="8E44AD"/>
+            </a:solidFill>
+          </a:ln>
+        </p:spPr>
+        <p:style>
+          <a:lnRef idx="1">
+            <a:schemeClr val="accent1"/>
+          </a:lnRef>
+          <a:fillRef idx="3">
+            <a:schemeClr val="accent1"/>
+          </a:fillRef>
+          <a:effectRef idx="2">
+            <a:schemeClr val="accent1"/>
+          </a:effectRef>
+          <a:fontRef idx="minor">
+            <a:schemeClr val="lt1"/>
+          </a:fontRef>
+        </p:style>
+        <p:txBody>
+          <a:bodyPr rtlCol="0" anchor="ctr"/>
+          <a:lstStyle/>
+          <a:p>
+            <a:pPr algn="l">
+              <a:defRPr sz="1800" b="1">
+                <a:solidFill>
+                  <a:srgbClr val="8E44AD"/>
+                </a:solidFill>
+              </a:defRPr>
+            </a:pPr>
+            <a:r>
+              <a:t>4️⃣ 可视化分析</a:t>
+            </a:r>
+          </a:p>
+          <a:p>
+            <a:pPr algn="l">
+              <a:defRPr sz="1400" b="0">
+                <a:solidFill>
+                  <a:srgbClr val="2C3E50"/>
+                </a:solidFill>
+              </a:defRPr>
+            </a:pPr>
+            <a:r>
+              <a:t>柱状图对比 · 雷达图 · 各领域细分 · 时间质量散点图</a:t>
             </a:r>
           </a:p>
         </p:txBody>
@@ -6151,7 +6271,7 @@
     <p:bg>
       <p:bgPr>
         <a:solidFill>
-          <a:srgbClr val="1A5276"/>
+          <a:srgbClr val="FFFFFF"/>
         </a:solidFill>
         <a:effectLst/>
       </p:bgPr>
@@ -6171,8 +6291,8 @@
         </p:nvSpPr>
         <p:spPr>
           <a:xfrm>
-            <a:off x="914400" y="914400"/>
-            <a:ext cx="10058400" cy="1371600"/>
+            <a:off x="457200" y="274320"/>
+            <a:ext cx="10972800" cy="914400"/>
           </a:xfrm>
           <a:prstGeom prst="rect">
             <a:avLst/>
@@ -6185,15 +6305,15 @@
           </a:bodyPr>
           <a:lstStyle/>
           <a:p>
-            <a:pPr algn="ctr">
-              <a:defRPr sz="3600" b="1">
-                <a:solidFill>
-                  <a:srgbClr val="FFFFFF"/>
-                </a:solidFill>
-              </a:defRPr>
-            </a:pPr>
-            <a:r>
-              <a:t>🌐 Web Demo 演示</a:t>
+            <a:pPr algn="l">
+              <a:defRPr sz="3200" b="1">
+                <a:solidFill>
+                  <a:srgbClr val="1A5276"/>
+                </a:solidFill>
+              </a:defRPr>
+            </a:pPr>
+            <a:r>
+              <a:t>📊 评测结果对比</a:t>
             </a:r>
           </a:p>
         </p:txBody>
@@ -6206,8 +6326,8 @@
         </p:nvSpPr>
         <p:spPr>
           <a:xfrm>
-            <a:off x="914400" y="2103120"/>
-            <a:ext cx="10058400" cy="731520"/>
+            <a:off x="457200" y="1188720"/>
+            <a:ext cx="10972800" cy="457200"/>
           </a:xfrm>
           <a:prstGeom prst="rect">
             <a:avLst/>
@@ -6220,15 +6340,15 @@
           </a:bodyPr>
           <a:lstStyle/>
           <a:p>
-            <a:pPr algn="ctr">
-              <a:defRPr sz="1800" b="0">
-                <a:solidFill>
-                  <a:srgbClr val="BBDDFF"/>
-                </a:solidFill>
-              </a:defRPr>
-            </a:pPr>
-            <a:r>
-              <a:t>中文交互界面  |  GPU 真机推理  |  Gradio 框架</a:t>
+            <a:pPr algn="l">
+              <a:defRPr sz="1600" b="0">
+                <a:solidFill>
+                  <a:srgbClr val="7F8C8D"/>
+                </a:solidFill>
+              </a:defRPr>
+            </a:pPr>
+            <a:r>
+              <a:t>RAGAS 双轨评测 — Faithfulness (忠实度) &amp; Answer Relevancy (答案相关性)</a:t>
             </a:r>
           </a:p>
         </p:txBody>
@@ -6241,8 +6361,8 @@
         </p:nvSpPr>
         <p:spPr>
           <a:xfrm>
-            <a:off x="1828800" y="3017520"/>
-            <a:ext cx="8229600" cy="640080"/>
+            <a:off x="731520" y="1828800"/>
+            <a:ext cx="2286000" cy="548640"/>
           </a:xfrm>
           <a:prstGeom prst="rect">
             <a:avLst/>
@@ -6255,15 +6375,15 @@
           </a:bodyPr>
           <a:lstStyle/>
           <a:p>
-            <a:pPr algn="l">
-              <a:defRPr sz="1800" b="0">
-                <a:solidFill>
-                  <a:srgbClr val="FFFFFF"/>
-                </a:solidFill>
-              </a:defRPr>
-            </a:pPr>
-            <a:r>
-              <a:t>🖥  简洁中文 Web UI，输入医学问题即可获取 AI 回答</a:t>
+            <a:pPr algn="ctr">
+              <a:defRPr sz="1600" b="1">
+                <a:solidFill>
+                  <a:srgbClr val="1A5276"/>
+                </a:solidFill>
+              </a:defRPr>
+            </a:pPr>
+            <a:r>
+              <a:t>管道</a:t>
             </a:r>
           </a:p>
         </p:txBody>
@@ -6276,8 +6396,8 @@
         </p:nvSpPr>
         <p:spPr>
           <a:xfrm>
-            <a:off x="1828800" y="3840480"/>
-            <a:ext cx="8229600" cy="640080"/>
+            <a:off x="4114800" y="1828800"/>
+            <a:ext cx="2286000" cy="548640"/>
           </a:xfrm>
           <a:prstGeom prst="rect">
             <a:avLst/>
@@ -6290,15 +6410,15 @@
           </a:bodyPr>
           <a:lstStyle/>
           <a:p>
-            <a:pPr algn="l">
-              <a:defRPr sz="1800" b="0">
-                <a:solidFill>
-                  <a:srgbClr val="FFFFFF"/>
-                </a:solidFill>
-              </a:defRPr>
-            </a:pPr>
-            <a:r>
-              <a:t>🚀  实时 GPU 推理，DeepSeek-1.5B + LoRA 生成诊断建议</a:t>
+            <a:pPr algn="ctr">
+              <a:defRPr sz="1600" b="1">
+                <a:solidFill>
+                  <a:srgbClr val="1A5276"/>
+                </a:solidFill>
+              </a:defRPr>
+            </a:pPr>
+            <a:r>
+              <a:t>Faithfulness</a:t>
             </a:r>
           </a:p>
         </p:txBody>
@@ -6311,8 +6431,8 @@
         </p:nvSpPr>
         <p:spPr>
           <a:xfrm>
-            <a:off x="1828800" y="4663440"/>
-            <a:ext cx="8229600" cy="640080"/>
+            <a:off x="6858000" y="1828800"/>
+            <a:ext cx="2286000" cy="548640"/>
           </a:xfrm>
           <a:prstGeom prst="rect">
             <a:avLst/>
@@ -6325,15 +6445,15 @@
           </a:bodyPr>
           <a:lstStyle/>
           <a:p>
-            <a:pPr algn="l">
-              <a:defRPr sz="1800" b="0">
-                <a:solidFill>
-                  <a:srgbClr val="FFFFFF"/>
-                </a:solidFill>
-              </a:defRPr>
-            </a:pPr>
-            <a:r>
-              <a:t>📚  FAISS 检索 78K 医疗文献，为回答提供循证依据</a:t>
+            <a:pPr algn="ctr">
+              <a:defRPr sz="1600" b="1">
+                <a:solidFill>
+                  <a:srgbClr val="1A5276"/>
+                </a:solidFill>
+              </a:defRPr>
+            </a:pPr>
+            <a:r>
+              <a:t>Answer Relevancy</a:t>
             </a:r>
           </a:p>
         </p:txBody>
@@ -6346,8 +6466,8 @@
         </p:nvSpPr>
         <p:spPr>
           <a:xfrm>
-            <a:off x="1828800" y="5486400"/>
-            <a:ext cx="8229600" cy="640080"/>
+            <a:off x="9601200" y="1828800"/>
+            <a:ext cx="2286000" cy="548640"/>
           </a:xfrm>
           <a:prstGeom prst="rect">
             <a:avLst/>
@@ -6360,15 +6480,212 @@
           </a:bodyPr>
           <a:lstStyle/>
           <a:p>
-            <a:pPr algn="l">
-              <a:defRPr sz="1800" b="0">
-                <a:solidFill>
-                  <a:srgbClr val="FFFFFF"/>
-                </a:solidFill>
-              </a:defRPr>
-            </a:pPr>
-            <a:r>
-              <a:t>🔄  三模式自由切换：混合智能体 / 纯 SFT / 纯 RAG</a:t>
+            <a:pPr algn="ctr">
+              <a:defRPr sz="1600" b="1">
+                <a:solidFill>
+                  <a:srgbClr val="1A5276"/>
+                </a:solidFill>
+              </a:defRPr>
+            </a:pPr>
+            <a:r>
+              <a:t>速度</a:t>
+            </a:r>
+          </a:p>
+        </p:txBody>
+      </p:sp>
+      <p:sp>
+        <p:nvSpPr>
+          <p:cNvPr id="8" name="Rectangle 7"/>
+          <p:cNvSpPr/>
+          <p:nvPr/>
+        </p:nvSpPr>
+        <p:spPr>
+          <a:xfrm>
+            <a:off x="457200" y="2743200"/>
+            <a:ext cx="10972800" cy="914400"/>
+          </a:xfrm>
+          <a:prstGeom prst="rect">
+            <a:avLst/>
+          </a:prstGeom>
+          <a:solidFill>
+            <a:srgbClr val="FDEEEF"/>
+          </a:solidFill>
+          <a:ln w="25400">
+            <a:solidFill>
+              <a:srgbClr val="E63946"/>
+            </a:solidFill>
+          </a:ln>
+        </p:spPr>
+        <p:style>
+          <a:lnRef idx="1">
+            <a:schemeClr val="accent1"/>
+          </a:lnRef>
+          <a:fillRef idx="3">
+            <a:schemeClr val="accent1"/>
+          </a:fillRef>
+          <a:effectRef idx="2">
+            <a:schemeClr val="accent1"/>
+          </a:effectRef>
+          <a:fontRef idx="minor">
+            <a:schemeClr val="lt1"/>
+          </a:fontRef>
+        </p:style>
+        <p:txBody>
+          <a:bodyPr rtlCol="0" anchor="ctr"/>
+          <a:lstStyle/>
+          <a:p>
+            <a:pPr algn="ctr">
+              <a:defRPr sz="1600" b="0">
+                <a:solidFill>
+                  <a:srgbClr val="2C3E50"/>
+                </a:solidFill>
+              </a:defRPr>
+            </a:pPr>
+            <a:r>
+              <a:t>🔴 Pure RAG (1.5B+检索)         Faithfulness: 0.5954         Answer Relevancy: 0.8744         速度: 中</a:t>
+            </a:r>
+          </a:p>
+        </p:txBody>
+      </p:sp>
+      <p:sp>
+        <p:nvSpPr>
+          <p:cNvPr id="9" name="Rectangle 8"/>
+          <p:cNvSpPr/>
+          <p:nvPr/>
+        </p:nvSpPr>
+        <p:spPr>
+          <a:xfrm>
+            <a:off x="457200" y="3931920"/>
+            <a:ext cx="10972800" cy="914400"/>
+          </a:xfrm>
+          <a:prstGeom prst="rect">
+            <a:avLst/>
+          </a:prstGeom>
+          <a:solidFill>
+            <a:srgbClr val="E8F8F0"/>
+          </a:solidFill>
+          <a:ln w="25400">
+            <a:solidFill>
+              <a:srgbClr val="2E86C1"/>
+            </a:solidFill>
+          </a:ln>
+        </p:spPr>
+        <p:style>
+          <a:lnRef idx="1">
+            <a:schemeClr val="accent1"/>
+          </a:lnRef>
+          <a:fillRef idx="3">
+            <a:schemeClr val="accent1"/>
+          </a:fillRef>
+          <a:effectRef idx="2">
+            <a:schemeClr val="accent1"/>
+          </a:effectRef>
+          <a:fontRef idx="minor">
+            <a:schemeClr val="lt1"/>
+          </a:fontRef>
+        </p:style>
+        <p:txBody>
+          <a:bodyPr rtlCol="0" anchor="ctr"/>
+          <a:lstStyle/>
+          <a:p>
+            <a:pPr algn="ctr">
+              <a:defRPr sz="1600" b="0">
+                <a:solidFill>
+                  <a:srgbClr val="2C3E50"/>
+                </a:solidFill>
+              </a:defRPr>
+            </a:pPr>
+            <a:r>
+              <a:t>🔵 Pure SFT (微调1.5B)         Faithfulness: 0.8673         Answer Relevancy: 0.8602         速度: 快 ⚡</a:t>
+            </a:r>
+          </a:p>
+        </p:txBody>
+      </p:sp>
+      <p:sp>
+        <p:nvSpPr>
+          <p:cNvPr id="10" name="Rectangle 9"/>
+          <p:cNvSpPr/>
+          <p:nvPr/>
+        </p:nvSpPr>
+        <p:spPr>
+          <a:xfrm>
+            <a:off x="457200" y="5120640"/>
+            <a:ext cx="10972800" cy="914400"/>
+          </a:xfrm>
+          <a:prstGeom prst="rect">
+            <a:avLst/>
+          </a:prstGeom>
+          <a:solidFill>
+            <a:srgbClr val="FDF2E9"/>
+          </a:solidFill>
+          <a:ln w="25400">
+            <a:solidFill>
+              <a:srgbClr val="27AE60"/>
+            </a:solidFill>
+          </a:ln>
+        </p:spPr>
+        <p:style>
+          <a:lnRef idx="1">
+            <a:schemeClr val="accent1"/>
+          </a:lnRef>
+          <a:fillRef idx="3">
+            <a:schemeClr val="accent1"/>
+          </a:fillRef>
+          <a:effectRef idx="2">
+            <a:schemeClr val="accent1"/>
+          </a:effectRef>
+          <a:fontRef idx="minor">
+            <a:schemeClr val="lt1"/>
+          </a:fontRef>
+        </p:style>
+        <p:txBody>
+          <a:bodyPr rtlCol="0" anchor="ctr"/>
+          <a:lstStyle/>
+          <a:p>
+            <a:pPr algn="ctr">
+              <a:defRPr sz="1600" b="0">
+                <a:solidFill>
+                  <a:srgbClr val="2C3E50"/>
+                </a:solidFill>
+              </a:defRPr>
+            </a:pPr>
+            <a:r>
+              <a:t>🟢 Hybrid (1.5B+RAG)         Faithfulness: 0.6179         Answer Relevancy: 0.8364         速度: 慢</a:t>
+            </a:r>
+          </a:p>
+        </p:txBody>
+      </p:sp>
+      <p:sp>
+        <p:nvSpPr>
+          <p:cNvPr id="11" name="TextBox 10"/>
+          <p:cNvSpPr txBox="1"/>
+          <p:nvPr/>
+        </p:nvSpPr>
+        <p:spPr>
+          <a:xfrm>
+            <a:off x="731520" y="6217920"/>
+            <a:ext cx="10058400" cy="457200"/>
+          </a:xfrm>
+          <a:prstGeom prst="rect">
+            <a:avLst/>
+          </a:prstGeom>
+          <a:noFill/>
+        </p:spPr>
+        <p:txBody>
+          <a:bodyPr wrap="square">
+            <a:spAutoFit/>
+          </a:bodyPr>
+          <a:lstStyle/>
+          <a:p>
+            <a:pPr algn="ctr">
+              <a:defRPr sz="1600" b="0">
+                <a:solidFill>
+                  <a:srgbClr val="27AE60"/>
+                </a:solidFill>
+              </a:defRPr>
+            </a:pPr>
+            <a:r>
+              <a:t>✨ 关键结论：QLoRA 微调 Faithfulness 最优 (0.87)，+45.6% vs Pure RAG。知识内化 &gt; 检索。</a:t>
             </a:r>
           </a:p>
         </p:txBody>

--- a/memberC_files/医疗AI_Agent_课程项目.pptx
+++ b/memberC_files/医疗AI_Agent_课程项目.pptx
@@ -17,6 +17,8 @@
     <p:sldId id="265" r:id="rId16"/>
     <p:sldId id="266" r:id="rId17"/>
     <p:sldId id="267" r:id="rId18"/>
+    <p:sldId id="268" r:id="rId19"/>
+    <p:sldId id="269" r:id="rId20"/>
   </p:sldIdLst>
   <p:sldSz cx="12191695" cy="6858000" type="screen4x3"/>
   <p:notesSz cx="6858000" cy="9144000"/>
@@ -3115,8 +3117,8 @@
         </p:nvSpPr>
         <p:spPr>
           <a:xfrm>
-            <a:off x="914400" y="1371600"/>
-            <a:ext cx="10058400" cy="1371600"/>
+            <a:off x="1371600" y="1371600"/>
+            <a:ext cx="9144000" cy="1371600"/>
           </a:xfrm>
           <a:prstGeom prst="rect">
             <a:avLst/>
@@ -3129,11 +3131,12 @@
           </a:bodyPr>
           <a:lstStyle/>
           <a:p>
-            <a:pPr algn="ctr">
-              <a:defRPr sz="4400" b="1">
+            <a:pPr algn="l">
+              <a:defRPr sz="4800" b="1">
                 <a:solidFill>
                   <a:srgbClr val="FFFFFF"/>
                 </a:solidFill>
+                <a:latin typeface="Arial"/>
               </a:defRPr>
             </a:pPr>
             <a:r>
@@ -3150,8 +3153,8 @@
         </p:nvSpPr>
         <p:spPr>
           <a:xfrm>
-            <a:off x="914400" y="2926080"/>
-            <a:ext cx="10058400" cy="914400"/>
+            <a:off x="1371600" y="2743200"/>
+            <a:ext cx="9144000" cy="731520"/>
           </a:xfrm>
           <a:prstGeom prst="rect">
             <a:avLst/>
@@ -3164,11 +3167,12 @@
           </a:bodyPr>
           <a:lstStyle/>
           <a:p>
-            <a:pPr algn="ctr">
-              <a:defRPr sz="2400" b="0">
-                <a:solidFill>
-                  <a:srgbClr val="BBDDFF"/>
-                </a:solidFill>
+            <a:pPr algn="l">
+              <a:defRPr sz="2800" b="0">
+                <a:solidFill>
+                  <a:srgbClr val="ECF0F1"/>
+                </a:solidFill>
+                <a:latin typeface="Arial"/>
               </a:defRPr>
             </a:pPr>
             <a:r>
@@ -3185,8 +3189,8 @@
         </p:nvSpPr>
         <p:spPr>
           <a:xfrm>
-            <a:off x="914400" y="4114800"/>
-            <a:ext cx="10058400" cy="914400"/>
+            <a:off x="1371600" y="3840480"/>
+            <a:ext cx="9144000" cy="548640"/>
           </a:xfrm>
           <a:prstGeom prst="rect">
             <a:avLst/>
@@ -3199,15 +3203,131 @@
           </a:bodyPr>
           <a:lstStyle/>
           <a:p>
-            <a:pPr algn="ctr">
+            <a:pPr algn="l">
+              <a:defRPr sz="2000" b="0">
+                <a:solidFill>
+                  <a:srgbClr val="2A9D8F"/>
+                </a:solidFill>
+                <a:latin typeface="Arial"/>
+              </a:defRPr>
+            </a:pPr>
+            <a:r>
+              <a:t>AI Agent 课程大作业</a:t>
+            </a:r>
+          </a:p>
+        </p:txBody>
+      </p:sp>
+      <p:sp>
+        <p:nvSpPr>
+          <p:cNvPr id="5" name="Rectangle 4"/>
+          <p:cNvSpPr/>
+          <p:nvPr/>
+        </p:nvSpPr>
+        <p:spPr>
+          <a:xfrm>
+            <a:off x="1371600" y="3474720"/>
+            <a:ext cx="2743200" cy="27432"/>
+          </a:xfrm>
+          <a:prstGeom prst="rect">
+            <a:avLst/>
+          </a:prstGeom>
+          <a:solidFill>
+            <a:srgbClr val="2A9D8F"/>
+          </a:solidFill>
+          <a:ln>
+            <a:noFill/>
+          </a:ln>
+        </p:spPr>
+        <p:style>
+          <a:lnRef idx="1">
+            <a:schemeClr val="accent1"/>
+          </a:lnRef>
+          <a:fillRef idx="3">
+            <a:schemeClr val="accent1"/>
+          </a:fillRef>
+          <a:effectRef idx="2">
+            <a:schemeClr val="accent1"/>
+          </a:effectRef>
+          <a:fontRef idx="minor">
+            <a:schemeClr val="lt1"/>
+          </a:fontRef>
+        </p:style>
+        <p:txBody>
+          <a:bodyPr rtlCol="0" anchor="ctr"/>
+          <a:lstStyle/>
+          <a:p>
+            <a:pPr algn="ctr"/>
+          </a:p>
+        </p:txBody>
+      </p:sp>
+      <p:sp>
+        <p:nvSpPr>
+          <p:cNvPr id="6" name="TextBox 5"/>
+          <p:cNvSpPr txBox="1"/>
+          <p:nvPr/>
+        </p:nvSpPr>
+        <p:spPr>
+          <a:xfrm>
+            <a:off x="1371600" y="4754880"/>
+            <a:ext cx="9144000" cy="548640"/>
+          </a:xfrm>
+          <a:prstGeom prst="rect">
+            <a:avLst/>
+          </a:prstGeom>
+          <a:noFill/>
+        </p:spPr>
+        <p:txBody>
+          <a:bodyPr wrap="square">
+            <a:spAutoFit/>
+          </a:bodyPr>
+          <a:lstStyle/>
+          <a:p>
+            <a:pPr algn="l">
+              <a:defRPr sz="1800" b="0">
+                <a:solidFill>
+                  <a:srgbClr val="ECF0F1"/>
+                </a:solidFill>
+                <a:latin typeface="Arial"/>
+              </a:defRPr>
+            </a:pPr>
+            <a:r>
+              <a:t>Member A · Member B · Member C</a:t>
+            </a:r>
+          </a:p>
+        </p:txBody>
+      </p:sp>
+      <p:sp>
+        <p:nvSpPr>
+          <p:cNvPr id="7" name="TextBox 6"/>
+          <p:cNvSpPr txBox="1"/>
+          <p:nvPr/>
+        </p:nvSpPr>
+        <p:spPr>
+          <a:xfrm>
+            <a:off x="1371600" y="5303520"/>
+            <a:ext cx="9144000" cy="548640"/>
+          </a:xfrm>
+          <a:prstGeom prst="rect">
+            <a:avLst/>
+          </a:prstGeom>
+          <a:noFill/>
+        </p:spPr>
+        <p:txBody>
+          <a:bodyPr wrap="square">
+            <a:spAutoFit/>
+          </a:bodyPr>
+          <a:lstStyle/>
+          <a:p>
+            <a:pPr algn="l">
               <a:defRPr sz="1600" b="0">
                 <a:solidFill>
-                  <a:srgbClr val="7F8C8D"/>
-                </a:solidFill>
+                  <a:srgbClr val="ECF0F1"/>
+                </a:solidFill>
+                <a:latin typeface="Arial"/>
               </a:defRPr>
             </a:pPr>
             <a:r>
-              <a:t>AI Agent 课程大作业  |  Member A · Member B · Member C</a:t>
+              <a:t>2026年7月</a:t>
             </a:r>
           </a:p>
         </p:txBody>
@@ -3246,8 +3366,8 @@
         </p:nvSpPr>
         <p:spPr>
           <a:xfrm>
-            <a:off x="914400" y="914400"/>
-            <a:ext cx="10058400" cy="1371600"/>
+            <a:off x="731520" y="457200"/>
+            <a:ext cx="10698480" cy="914400"/>
           </a:xfrm>
           <a:prstGeom prst="rect">
             <a:avLst/>
@@ -3260,229 +3380,483 @@
           </a:bodyPr>
           <a:lstStyle/>
           <a:p>
-            <a:pPr algn="ctr">
+            <a:pPr algn="l">
               <a:defRPr sz="3600" b="1">
                 <a:solidFill>
                   <a:srgbClr val="FFFFFF"/>
                 </a:solidFill>
+                <a:latin typeface="Arial"/>
               </a:defRPr>
             </a:pPr>
             <a:r>
-              <a:t>🌐 Web Demo 演示</a:t>
-            </a:r>
-          </a:p>
-        </p:txBody>
-      </p:sp>
-      <p:sp>
-        <p:nvSpPr>
-          <p:cNvPr id="3" name="TextBox 2"/>
-          <p:cNvSpPr txBox="1"/>
-          <p:nvPr/>
-        </p:nvSpPr>
-        <p:spPr>
-          <a:xfrm>
-            <a:off x="914400" y="2103120"/>
-            <a:ext cx="10058400" cy="731520"/>
-          </a:xfrm>
-          <a:prstGeom prst="rect">
-            <a:avLst/>
-          </a:prstGeom>
-          <a:noFill/>
-        </p:spPr>
-        <p:txBody>
-          <a:bodyPr wrap="square">
-            <a:spAutoFit/>
-          </a:bodyPr>
-          <a:lstStyle/>
-          <a:p>
-            <a:pPr algn="ctr">
-              <a:defRPr sz="1800" b="0">
-                <a:solidFill>
-                  <a:srgbClr val="BBDDFF"/>
-                </a:solidFill>
-              </a:defRPr>
-            </a:pPr>
-            <a:r>
-              <a:t>中文界面  |  GPU 真机推理  |  Gradio 框架  |  RTX 3060</a:t>
-            </a:r>
-          </a:p>
-        </p:txBody>
-      </p:sp>
-      <p:sp>
-        <p:nvSpPr>
-          <p:cNvPr id="4" name="TextBox 3"/>
-          <p:cNvSpPr txBox="1"/>
-          <p:nvPr/>
-        </p:nvSpPr>
-        <p:spPr>
-          <a:xfrm>
-            <a:off x="1828800" y="3017520"/>
-            <a:ext cx="8229600" cy="548640"/>
-          </a:xfrm>
-          <a:prstGeom prst="rect">
-            <a:avLst/>
-          </a:prstGeom>
-          <a:noFill/>
-        </p:spPr>
-        <p:txBody>
-          <a:bodyPr wrap="square">
-            <a:spAutoFit/>
-          </a:bodyPr>
-          <a:lstStyle/>
-          <a:p>
-            <a:pPr algn="l">
-              <a:defRPr sz="1600" b="0">
-                <a:solidFill>
-                  <a:srgbClr val="FFFFFF"/>
-                </a:solidFill>
-              </a:defRPr>
-            </a:pPr>
-            <a:r>
-              <a:t>🖥  简洁中文 Web UI，输入医学问题即可获取 AI 回答</a:t>
-            </a:r>
-          </a:p>
-        </p:txBody>
-      </p:sp>
-      <p:sp>
-        <p:nvSpPr>
-          <p:cNvPr id="5" name="TextBox 4"/>
-          <p:cNvSpPr txBox="1"/>
-          <p:nvPr/>
-        </p:nvSpPr>
-        <p:spPr>
-          <a:xfrm>
-            <a:off x="1828800" y="3611879"/>
-            <a:ext cx="8229600" cy="548640"/>
-          </a:xfrm>
-          <a:prstGeom prst="rect">
-            <a:avLst/>
-          </a:prstGeom>
-          <a:noFill/>
-        </p:spPr>
-        <p:txBody>
-          <a:bodyPr wrap="square">
-            <a:spAutoFit/>
-          </a:bodyPr>
-          <a:lstStyle/>
-          <a:p>
-            <a:pPr algn="l">
-              <a:defRPr sz="1600" b="0">
-                <a:solidFill>
-                  <a:srgbClr val="FFFFFF"/>
-                </a:solidFill>
-              </a:defRPr>
-            </a:pPr>
-            <a:r>
-              <a:t>🚀  实时 GPU 推理，DeepSeek-1.5B + LoRA 生成诊断建议</a:t>
-            </a:r>
-          </a:p>
-        </p:txBody>
-      </p:sp>
-      <p:sp>
-        <p:nvSpPr>
-          <p:cNvPr id="6" name="TextBox 5"/>
-          <p:cNvSpPr txBox="1"/>
-          <p:nvPr/>
-        </p:nvSpPr>
-        <p:spPr>
-          <a:xfrm>
-            <a:off x="1828800" y="4206240"/>
-            <a:ext cx="8229600" cy="548640"/>
-          </a:xfrm>
-          <a:prstGeom prst="rect">
-            <a:avLst/>
-          </a:prstGeom>
-          <a:noFill/>
-        </p:spPr>
-        <p:txBody>
-          <a:bodyPr wrap="square">
-            <a:spAutoFit/>
-          </a:bodyPr>
-          <a:lstStyle/>
-          <a:p>
-            <a:pPr algn="l">
-              <a:defRPr sz="1600" b="0">
-                <a:solidFill>
-                  <a:srgbClr val="FFFFFF"/>
-                </a:solidFill>
-              </a:defRPr>
-            </a:pPr>
-            <a:r>
-              <a:t>📚  FAISS 检索 78K 医疗文献，为回答提供循证依据</a:t>
-            </a:r>
-          </a:p>
-        </p:txBody>
-      </p:sp>
-      <p:sp>
-        <p:nvSpPr>
-          <p:cNvPr id="7" name="TextBox 6"/>
-          <p:cNvSpPr txBox="1"/>
-          <p:nvPr/>
-        </p:nvSpPr>
-        <p:spPr>
-          <a:xfrm>
-            <a:off x="1828800" y="4800600"/>
-            <a:ext cx="8229600" cy="548640"/>
-          </a:xfrm>
-          <a:prstGeom prst="rect">
-            <a:avLst/>
-          </a:prstGeom>
-          <a:noFill/>
-        </p:spPr>
-        <p:txBody>
-          <a:bodyPr wrap="square">
-            <a:spAutoFit/>
-          </a:bodyPr>
-          <a:lstStyle/>
-          <a:p>
-            <a:pPr algn="l">
-              <a:defRPr sz="1600" b="0">
-                <a:solidFill>
-                  <a:srgbClr val="FFFFFF"/>
-                </a:solidFill>
-              </a:defRPr>
-            </a:pPr>
-            <a:r>
-              <a:t>🔄  三模式自由切换：混合智能体 / 纯 SFT / 纯 RAG</a:t>
-            </a:r>
-          </a:p>
-        </p:txBody>
-      </p:sp>
-      <p:sp>
-        <p:nvSpPr>
-          <p:cNvPr id="8" name="TextBox 7"/>
-          <p:cNvSpPr txBox="1"/>
-          <p:nvPr/>
-        </p:nvSpPr>
-        <p:spPr>
-          <a:xfrm>
-            <a:off x="1828800" y="5394960"/>
-            <a:ext cx="8229600" cy="548640"/>
-          </a:xfrm>
-          <a:prstGeom prst="rect">
-            <a:avLst/>
-          </a:prstGeom>
-          <a:noFill/>
-        </p:spPr>
-        <p:txBody>
-          <a:bodyPr wrap="square">
-            <a:spAutoFit/>
-          </a:bodyPr>
-          <a:lstStyle/>
-          <a:p>
-            <a:pPr algn="l">
-              <a:defRPr sz="1600" b="0">
-                <a:solidFill>
-                  <a:srgbClr val="FFFFFF"/>
-                </a:solidFill>
-              </a:defRPr>
-            </a:pPr>
-            <a:r>
-              <a:t>📊  评测数据内嵌展示：RAGAS 指标表 + 测试集分布</a:t>
-            </a:r>
-          </a:p>
-        </p:txBody>
-      </p:sp>
+              <a:t>📊 评测结果对比（150 条测试集）</a:t>
+            </a:r>
+          </a:p>
+        </p:txBody>
+      </p:sp>
+      <p:sp>
+        <p:nvSpPr>
+          <p:cNvPr id="3" name="Rectangle 2"/>
+          <p:cNvSpPr/>
+          <p:nvPr/>
+        </p:nvSpPr>
+        <p:spPr>
+          <a:xfrm>
+            <a:off x="731520" y="1097280"/>
+            <a:ext cx="3657600" cy="27432"/>
+          </a:xfrm>
+          <a:prstGeom prst="rect">
+            <a:avLst/>
+          </a:prstGeom>
+          <a:solidFill>
+            <a:srgbClr val="2A9D8F"/>
+          </a:solidFill>
+          <a:ln>
+            <a:noFill/>
+          </a:ln>
+        </p:spPr>
+        <p:style>
+          <a:lnRef idx="1">
+            <a:schemeClr val="accent1"/>
+          </a:lnRef>
+          <a:fillRef idx="3">
+            <a:schemeClr val="accent1"/>
+          </a:fillRef>
+          <a:effectRef idx="2">
+            <a:schemeClr val="accent1"/>
+          </a:effectRef>
+          <a:fontRef idx="minor">
+            <a:schemeClr val="lt1"/>
+          </a:fontRef>
+        </p:style>
+        <p:txBody>
+          <a:bodyPr rtlCol="0" anchor="ctr"/>
+          <a:lstStyle/>
+          <a:p>
+            <a:pPr algn="ctr"/>
+          </a:p>
+        </p:txBody>
+      </p:sp>
+      <p:graphicFrame>
+        <p:nvGraphicFramePr>
+          <p:cNvPr id="4" name="Table 3"/>
+          <p:cNvGraphicFramePr>
+            <a:graphicFrameLocks noGrp="1"/>
+          </p:cNvGraphicFramePr>
+          <p:nvPr/>
+        </p:nvGraphicFramePr>
+        <p:xfrm>
+          <a:off x="731520" y="1371600"/>
+          <a:ext cx="10698480" cy="1828800"/>
+        </p:xfrm>
+        <a:graphic>
+          <a:graphicData uri="http://schemas.openxmlformats.org/drawingml/2006/table">
+            <a:tbl>
+              <a:tblPr firstRow="1" bandRow="1">
+                <a:tableStyleId>{5C22544A-7EE6-4342-B048-85BDC9FD1C3A}</a:tableStyleId>
+              </a:tblPr>
+              <a:tblGrid>
+                <a:gridCol w="2674620"/>
+                <a:gridCol w="2674620"/>
+                <a:gridCol w="2674620"/>
+                <a:gridCol w="2674620"/>
+              </a:tblGrid>
+              <a:tr h="457200">
+                <a:tc>
+                  <a:txBody>
+                    <a:bodyPr/>
+                    <a:lstStyle/>
+                    <a:p>
+                      <a:pPr>
+                        <a:defRPr sz="1600" b="1">
+                          <a:solidFill>
+                            <a:srgbClr val="FFFFFF"/>
+                          </a:solidFill>
+                          <a:latin typeface="Arial"/>
+                        </a:defRPr>
+                      </a:pPr>
+                      <a:r>
+                        <a:t>管道</a:t>
+                      </a:r>
+                    </a:p>
+                  </a:txBody>
+                  <a:tcPr>
+                    <a:solidFill>
+                      <a:srgbClr val="2E86C1"/>
+                    </a:solidFill>
+                  </a:tcPr>
+                </a:tc>
+                <a:tc>
+                  <a:txBody>
+                    <a:bodyPr/>
+                    <a:lstStyle/>
+                    <a:p>
+                      <a:pPr>
+                        <a:defRPr sz="1600" b="1">
+                          <a:solidFill>
+                            <a:srgbClr val="FFFFFF"/>
+                          </a:solidFill>
+                          <a:latin typeface="Arial"/>
+                        </a:defRPr>
+                      </a:pPr>
+                      <a:r>
+                        <a:t>Faithfulness ↓</a:t>
+                      </a:r>
+                    </a:p>
+                  </a:txBody>
+                  <a:tcPr>
+                    <a:solidFill>
+                      <a:srgbClr val="2E86C1"/>
+                    </a:solidFill>
+                  </a:tcPr>
+                </a:tc>
+                <a:tc>
+                  <a:txBody>
+                    <a:bodyPr/>
+                    <a:lstStyle/>
+                    <a:p>
+                      <a:pPr>
+                        <a:defRPr sz="1600" b="1">
+                          <a:solidFill>
+                            <a:srgbClr val="FFFFFF"/>
+                          </a:solidFill>
+                          <a:latin typeface="Arial"/>
+                        </a:defRPr>
+                      </a:pPr>
+                      <a:r>
+                        <a:t>Answer Relevancy</a:t>
+                      </a:r>
+                    </a:p>
+                  </a:txBody>
+                  <a:tcPr>
+                    <a:solidFill>
+                      <a:srgbClr val="2E86C1"/>
+                    </a:solidFill>
+                  </a:tcPr>
+                </a:tc>
+                <a:tc>
+                  <a:txBody>
+                    <a:bodyPr/>
+                    <a:lstStyle/>
+                    <a:p>
+                      <a:pPr>
+                        <a:defRPr sz="1600" b="1">
+                          <a:solidFill>
+                            <a:srgbClr val="FFFFFF"/>
+                          </a:solidFill>
+                          <a:latin typeface="Arial"/>
+                        </a:defRPr>
+                      </a:pPr>
+                      <a:r>
+                        <a:t>速度</a:t>
+                      </a:r>
+                    </a:p>
+                  </a:txBody>
+                  <a:tcPr>
+                    <a:solidFill>
+                      <a:srgbClr val="2E86C1"/>
+                    </a:solidFill>
+                  </a:tcPr>
+                </a:tc>
+              </a:tr>
+              <a:tr h="457200">
+                <a:tc>
+                  <a:txBody>
+                    <a:bodyPr/>
+                    <a:lstStyle/>
+                    <a:p>
+                      <a:pPr>
+                        <a:defRPr sz="1500">
+                          <a:solidFill>
+                            <a:srgbClr val="2C3E50"/>
+                          </a:solidFill>
+                          <a:latin typeface="Arial"/>
+                        </a:defRPr>
+                      </a:pPr>
+                      <a:r>
+                        <a:t>🔴 Pure RAG (1.5B + 检索)</a:t>
+                      </a:r>
+                    </a:p>
+                  </a:txBody>
+                  <a:tcPr>
+                    <a:solidFill>
+                      <a:srgbClr val="F2F7FA"/>
+                    </a:solidFill>
+                  </a:tcPr>
+                </a:tc>
+                <a:tc>
+                  <a:txBody>
+                    <a:bodyPr/>
+                    <a:lstStyle/>
+                    <a:p>
+                      <a:pPr>
+                        <a:defRPr sz="1500">
+                          <a:solidFill>
+                            <a:srgbClr val="2C3E50"/>
+                          </a:solidFill>
+                          <a:latin typeface="Arial"/>
+                        </a:defRPr>
+                      </a:pPr>
+                      <a:r>
+                        <a:t>0.5888</a:t>
+                      </a:r>
+                    </a:p>
+                  </a:txBody>
+                  <a:tcPr>
+                    <a:solidFill>
+                      <a:srgbClr val="F2F7FA"/>
+                    </a:solidFill>
+                  </a:tcPr>
+                </a:tc>
+                <a:tc>
+                  <a:txBody>
+                    <a:bodyPr/>
+                    <a:lstStyle/>
+                    <a:p>
+                      <a:pPr>
+                        <a:defRPr sz="1500">
+                          <a:solidFill>
+                            <a:srgbClr val="2C3E50"/>
+                          </a:solidFill>
+                          <a:latin typeface="Arial"/>
+                        </a:defRPr>
+                      </a:pPr>
+                      <a:r>
+                        <a:t>0.8914 🥇</a:t>
+                      </a:r>
+                    </a:p>
+                  </a:txBody>
+                  <a:tcPr>
+                    <a:solidFill>
+                      <a:srgbClr val="F2F7FA"/>
+                    </a:solidFill>
+                  </a:tcPr>
+                </a:tc>
+                <a:tc>
+                  <a:txBody>
+                    <a:bodyPr/>
+                    <a:lstStyle/>
+                    <a:p>
+                      <a:pPr>
+                        <a:defRPr sz="1500">
+                          <a:solidFill>
+                            <a:srgbClr val="2C3E50"/>
+                          </a:solidFill>
+                          <a:latin typeface="Arial"/>
+                        </a:defRPr>
+                      </a:pPr>
+                      <a:r>
+                        <a:t>0.50s</a:t>
+                      </a:r>
+                    </a:p>
+                  </a:txBody>
+                  <a:tcPr>
+                    <a:solidFill>
+                      <a:srgbClr val="F2F7FA"/>
+                    </a:solidFill>
+                  </a:tcPr>
+                </a:tc>
+              </a:tr>
+              <a:tr h="457200">
+                <a:tc>
+                  <a:txBody>
+                    <a:bodyPr/>
+                    <a:lstStyle/>
+                    <a:p>
+                      <a:pPr>
+                        <a:defRPr sz="1500">
+                          <a:solidFill>
+                            <a:srgbClr val="2C3E50"/>
+                          </a:solidFill>
+                          <a:latin typeface="Arial"/>
+                        </a:defRPr>
+                      </a:pPr>
+                      <a:r>
+                        <a:t>🔵 Pure SFT (微调 1.5B)</a:t>
+                      </a:r>
+                    </a:p>
+                  </a:txBody>
+                  <a:tcPr>
+                    <a:solidFill>
+                      <a:srgbClr val="FFFFFF"/>
+                    </a:solidFill>
+                  </a:tcPr>
+                </a:tc>
+                <a:tc>
+                  <a:txBody>
+                    <a:bodyPr/>
+                    <a:lstStyle/>
+                    <a:p>
+                      <a:pPr>
+                        <a:defRPr sz="1500">
+                          <a:solidFill>
+                            <a:srgbClr val="2C3E50"/>
+                          </a:solidFill>
+                          <a:latin typeface="Arial"/>
+                        </a:defRPr>
+                      </a:pPr>
+                      <a:r>
+                        <a:t>0.8644 🥇</a:t>
+                      </a:r>
+                    </a:p>
+                  </a:txBody>
+                  <a:tcPr>
+                    <a:solidFill>
+                      <a:srgbClr val="FFFFFF"/>
+                    </a:solidFill>
+                  </a:tcPr>
+                </a:tc>
+                <a:tc>
+                  <a:txBody>
+                    <a:bodyPr/>
+                    <a:lstStyle/>
+                    <a:p>
+                      <a:pPr>
+                        <a:defRPr sz="1500">
+                          <a:solidFill>
+                            <a:srgbClr val="2C3E50"/>
+                          </a:solidFill>
+                          <a:latin typeface="Arial"/>
+                        </a:defRPr>
+                      </a:pPr>
+                      <a:r>
+                        <a:t>0.8812</a:t>
+                      </a:r>
+                    </a:p>
+                  </a:txBody>
+                  <a:tcPr>
+                    <a:solidFill>
+                      <a:srgbClr val="FFFFFF"/>
+                    </a:solidFill>
+                  </a:tcPr>
+                </a:tc>
+                <a:tc>
+                  <a:txBody>
+                    <a:bodyPr/>
+                    <a:lstStyle/>
+                    <a:p>
+                      <a:pPr>
+                        <a:defRPr sz="1500">
+                          <a:solidFill>
+                            <a:srgbClr val="2C3E50"/>
+                          </a:solidFill>
+                          <a:latin typeface="Arial"/>
+                        </a:defRPr>
+                      </a:pPr>
+                      <a:r>
+                        <a:t>0.15s 🥇</a:t>
+                      </a:r>
+                    </a:p>
+                  </a:txBody>
+                  <a:tcPr>
+                    <a:solidFill>
+                      <a:srgbClr val="FFFFFF"/>
+                    </a:solidFill>
+                  </a:tcPr>
+                </a:tc>
+              </a:tr>
+              <a:tr h="457200">
+                <a:tc>
+                  <a:txBody>
+                    <a:bodyPr/>
+                    <a:lstStyle/>
+                    <a:p>
+                      <a:pPr>
+                        <a:defRPr sz="1500">
+                          <a:solidFill>
+                            <a:srgbClr val="2C3E50"/>
+                          </a:solidFill>
+                          <a:latin typeface="Arial"/>
+                        </a:defRPr>
+                      </a:pPr>
+                      <a:r>
+                        <a:t>🟢 Hybrid Agent (1.5B + RAG)</a:t>
+                      </a:r>
+                    </a:p>
+                  </a:txBody>
+                  <a:tcPr>
+                    <a:solidFill>
+                      <a:srgbClr val="F2F7FA"/>
+                    </a:solidFill>
+                  </a:tcPr>
+                </a:tc>
+                <a:tc>
+                  <a:txBody>
+                    <a:bodyPr/>
+                    <a:lstStyle/>
+                    <a:p>
+                      <a:pPr>
+                        <a:defRPr sz="1500">
+                          <a:solidFill>
+                            <a:srgbClr val="2C3E50"/>
+                          </a:solidFill>
+                          <a:latin typeface="Arial"/>
+                        </a:defRPr>
+                      </a:pPr>
+                      <a:r>
+                        <a:t>0.6120</a:t>
+                      </a:r>
+                    </a:p>
+                  </a:txBody>
+                  <a:tcPr>
+                    <a:solidFill>
+                      <a:srgbClr val="F2F7FA"/>
+                    </a:solidFill>
+                  </a:tcPr>
+                </a:tc>
+                <a:tc>
+                  <a:txBody>
+                    <a:bodyPr/>
+                    <a:lstStyle/>
+                    <a:p>
+                      <a:pPr>
+                        <a:defRPr sz="1500">
+                          <a:solidFill>
+                            <a:srgbClr val="2C3E50"/>
+                          </a:solidFill>
+                          <a:latin typeface="Arial"/>
+                        </a:defRPr>
+                      </a:pPr>
+                      <a:r>
+                        <a:t>0.8422</a:t>
+                      </a:r>
+                    </a:p>
+                  </a:txBody>
+                  <a:tcPr>
+                    <a:solidFill>
+                      <a:srgbClr val="F2F7FA"/>
+                    </a:solidFill>
+                  </a:tcPr>
+                </a:tc>
+                <a:tc>
+                  <a:txBody>
+                    <a:bodyPr/>
+                    <a:lstStyle/>
+                    <a:p>
+                      <a:pPr>
+                        <a:defRPr sz="1500">
+                          <a:solidFill>
+                            <a:srgbClr val="2C3E50"/>
+                          </a:solidFill>
+                          <a:latin typeface="Arial"/>
+                        </a:defRPr>
+                      </a:pPr>
+                      <a:r>
+                        <a:t>0.80s</a:t>
+                      </a:r>
+                    </a:p>
+                  </a:txBody>
+                  <a:tcPr>
+                    <a:solidFill>
+                      <a:srgbClr val="F2F7FA"/>
+                    </a:solidFill>
+                  </a:tcPr>
+                </a:tc>
+              </a:tr>
+            </a:tbl>
+          </a:graphicData>
+        </a:graphic>
+      </p:graphicFrame>
     </p:spTree>
   </p:cSld>
   <p:clrMapOvr>
@@ -3497,7 +3871,7 @@
     <p:bg>
       <p:bgPr>
         <a:solidFill>
-          <a:srgbClr val="FFFFFF"/>
+          <a:srgbClr val="1A5276"/>
         </a:solidFill>
         <a:effectLst/>
       </p:bgPr>
@@ -3517,8 +3891,8 @@
         </p:nvSpPr>
         <p:spPr>
           <a:xfrm>
-            <a:off x="457200" y="274320"/>
-            <a:ext cx="10972800" cy="914400"/>
+            <a:off x="731520" y="457200"/>
+            <a:ext cx="10698480" cy="914400"/>
           </a:xfrm>
           <a:prstGeom prst="rect">
             <a:avLst/>
@@ -3532,14 +3906,15 @@
           <a:lstStyle/>
           <a:p>
             <a:pPr algn="l">
-              <a:defRPr sz="3200" b="1">
-                <a:solidFill>
-                  <a:srgbClr val="1A5276"/>
-                </a:solidFill>
+              <a:defRPr sz="3600" b="1">
+                <a:solidFill>
+                  <a:srgbClr val="FFFFFF"/>
+                </a:solidFill>
+                <a:latin typeface="Arial"/>
               </a:defRPr>
             </a:pPr>
             <a:r>
-              <a:t>💡 总结与展望</a:t>
+              <a:t>🔍 关键发现</a:t>
             </a:r>
           </a:p>
         </p:txBody>
@@ -3552,19 +3927,17 @@
         </p:nvSpPr>
         <p:spPr>
           <a:xfrm>
-            <a:off x="914400" y="1645920"/>
-            <a:ext cx="10058400" cy="1097280"/>
+            <a:off x="731520" y="1097280"/>
+            <a:ext cx="3657600" cy="27432"/>
           </a:xfrm>
           <a:prstGeom prst="rect">
             <a:avLst/>
           </a:prstGeom>
           <a:solidFill>
-            <a:srgbClr val="FAFAFA"/>
+            <a:srgbClr val="2A9D8F"/>
           </a:solidFill>
-          <a:ln w="25400">
-            <a:solidFill>
-              <a:srgbClr val="1A5276"/>
-            </a:solidFill>
+          <a:ln>
+            <a:noFill/>
           </a:ln>
         </p:spPr>
         <p:style>
@@ -3585,172 +3958,19 @@
           <a:bodyPr rtlCol="0" anchor="ctr"/>
           <a:lstStyle/>
           <a:p>
-            <a:pPr algn="l">
-              <a:defRPr sz="2000" b="1">
-                <a:solidFill>
-                  <a:srgbClr val="1A5276"/>
-                </a:solidFill>
-              </a:defRPr>
-            </a:pPr>
-            <a:r>
-              <a:t>1. 小模型微调 &gt; 大模型检索</a:t>
-            </a:r>
-          </a:p>
-          <a:p>
-            <a:pPr algn="l">
-              <a:defRPr sz="1500" b="0">
-                <a:solidFill>
-                  <a:srgbClr val="2C3E50"/>
-                </a:solidFill>
-              </a:defRPr>
-            </a:pPr>
-            <a:r>
-              <a:t>QLoRA 微调 1.5B 在 Faithfulness (0.867) 上完胜 RAG (0.595)。知识"内化"比"检索"更可靠</a:t>
-            </a:r>
-          </a:p>
-        </p:txBody>
-      </p:sp>
-      <p:sp>
-        <p:nvSpPr>
-          <p:cNvPr id="4" name="Rectangle 3"/>
-          <p:cNvSpPr/>
-          <p:nvPr/>
-        </p:nvSpPr>
-        <p:spPr>
-          <a:xfrm>
-            <a:off x="914400" y="3017520"/>
-            <a:ext cx="10058400" cy="1097280"/>
-          </a:xfrm>
-          <a:prstGeom prst="rect">
-            <a:avLst/>
-          </a:prstGeom>
-          <a:solidFill>
-            <a:srgbClr val="FAFAFA"/>
-          </a:solidFill>
-          <a:ln w="25400">
-            <a:solidFill>
-              <a:srgbClr val="1A5276"/>
-            </a:solidFill>
-          </a:ln>
-        </p:spPr>
-        <p:style>
-          <a:lnRef idx="1">
-            <a:schemeClr val="accent1"/>
-          </a:lnRef>
-          <a:fillRef idx="3">
-            <a:schemeClr val="accent1"/>
-          </a:fillRef>
-          <a:effectRef idx="2">
-            <a:schemeClr val="accent1"/>
-          </a:effectRef>
-          <a:fontRef idx="minor">
-            <a:schemeClr val="lt1"/>
-          </a:fontRef>
-        </p:style>
-        <p:txBody>
-          <a:bodyPr rtlCol="0" anchor="ctr"/>
-          <a:lstStyle/>
-          <a:p>
-            <a:pPr algn="l">
-              <a:defRPr sz="2000" b="1">
-                <a:solidFill>
-                  <a:srgbClr val="1A5276"/>
-                </a:solidFill>
-              </a:defRPr>
-            </a:pPr>
-            <a:r>
-              <a:t>2. QLoRA 极低显存训练</a:t>
-            </a:r>
-          </a:p>
-          <a:p>
-            <a:pPr algn="l">
-              <a:defRPr sz="1500" b="0">
-                <a:solidFill>
-                  <a:srgbClr val="2C3E50"/>
-                </a:solidFill>
-              </a:defRPr>
-            </a:pPr>
-            <a:r>
-              <a:t>1.5B 模型仅需 5.6GB 显存，8GB 消费级显卡即可完成医疗领域微调</a:t>
-            </a:r>
-          </a:p>
-        </p:txBody>
-      </p:sp>
-      <p:sp>
-        <p:nvSpPr>
-          <p:cNvPr id="5" name="Rectangle 4"/>
-          <p:cNvSpPr/>
-          <p:nvPr/>
-        </p:nvSpPr>
-        <p:spPr>
-          <a:xfrm>
-            <a:off x="914400" y="4389120"/>
-            <a:ext cx="10058400" cy="1097280"/>
-          </a:xfrm>
-          <a:prstGeom prst="rect">
-            <a:avLst/>
-          </a:prstGeom>
-          <a:solidFill>
-            <a:srgbClr val="FAFAFA"/>
-          </a:solidFill>
-          <a:ln w="25400">
-            <a:solidFill>
-              <a:srgbClr val="1A5276"/>
-            </a:solidFill>
-          </a:ln>
-        </p:spPr>
-        <p:style>
-          <a:lnRef idx="1">
-            <a:schemeClr val="accent1"/>
-          </a:lnRef>
-          <a:fillRef idx="3">
-            <a:schemeClr val="accent1"/>
-          </a:fillRef>
-          <a:effectRef idx="2">
-            <a:schemeClr val="accent1"/>
-          </a:effectRef>
-          <a:fontRef idx="minor">
-            <a:schemeClr val="lt1"/>
-          </a:fontRef>
-        </p:style>
-        <p:txBody>
-          <a:bodyPr rtlCol="0" anchor="ctr"/>
-          <a:lstStyle/>
-          <a:p>
-            <a:pPr algn="l">
-              <a:defRPr sz="2000" b="1">
-                <a:solidFill>
-                  <a:srgbClr val="1A5276"/>
-                </a:solidFill>
-              </a:defRPr>
-            </a:pPr>
-            <a:r>
-              <a:t>3. 评测方法论可复用</a:t>
-            </a:r>
-          </a:p>
-          <a:p>
-            <a:pPr algn="l">
-              <a:defRPr sz="1500" b="0">
-                <a:solidFill>
-                  <a:srgbClr val="2C3E50"/>
-                </a:solidFill>
-              </a:defRPr>
-            </a:pPr>
-            <a:r>
-              <a:t>去重→分层抽样→三管道→RAGAS→可视化。适用于任何垂直领域 AI Agent 评测</a:t>
-            </a:r>
-          </a:p>
-        </p:txBody>
-      </p:sp>
-      <p:sp>
-        <p:nvSpPr>
-          <p:cNvPr id="6" name="TextBox 5"/>
+            <a:pPr algn="ctr"/>
+          </a:p>
+        </p:txBody>
+      </p:sp>
+      <p:sp>
+        <p:nvSpPr>
+          <p:cNvPr id="4" name="TextBox 3"/>
           <p:cNvSpPr txBox="1"/>
           <p:nvPr/>
         </p:nvSpPr>
         <p:spPr>
           <a:xfrm>
-            <a:off x="731520" y="5943600"/>
+            <a:off x="914400" y="1645920"/>
             <a:ext cx="10058400" cy="457200"/>
           </a:xfrm>
           <a:prstGeom prst="rect">
@@ -3764,15 +3984,208 @@
           </a:bodyPr>
           <a:lstStyle/>
           <a:p>
-            <a:pPr algn="ctr">
-              <a:defRPr sz="1400" b="0">
-                <a:solidFill>
-                  <a:srgbClr val="7F8C8D"/>
-                </a:solidFill>
+            <a:pPr algn="l">
+              <a:defRPr sz="2200" b="1">
+                <a:solidFill>
+                  <a:srgbClr val="2A9D8F"/>
+                </a:solidFill>
+                <a:latin typeface="Arial"/>
               </a:defRPr>
             </a:pPr>
             <a:r>
-              <a:t>未来：🔬 CoT微调  |  🧩 多模态(ECG图像+文本)  |  🏥 真实临床验证</a:t>
+              <a:t>🥇 发现 1: 微调完胜 RAG</a:t>
+            </a:r>
+          </a:p>
+        </p:txBody>
+      </p:sp>
+      <p:sp>
+        <p:nvSpPr>
+          <p:cNvPr id="5" name="TextBox 4"/>
+          <p:cNvSpPr txBox="1"/>
+          <p:nvPr/>
+        </p:nvSpPr>
+        <p:spPr>
+          <a:xfrm>
+            <a:off x="1371600" y="2103120"/>
+            <a:ext cx="9144000" cy="731520"/>
+          </a:xfrm>
+          <a:prstGeom prst="rect">
+            <a:avLst/>
+          </a:prstGeom>
+          <a:noFill/>
+        </p:spPr>
+        <p:txBody>
+          <a:bodyPr wrap="square">
+            <a:spAutoFit/>
+          </a:bodyPr>
+          <a:lstStyle/>
+          <a:p>
+            <a:pPr algn="l">
+              <a:defRPr sz="1600" b="0">
+                <a:solidFill>
+                  <a:srgbClr val="FFFFFF"/>
+                </a:solidFill>
+                <a:latin typeface="Arial"/>
+              </a:defRPr>
+            </a:pPr>
+            <a:r>
+              <a:t>Pure SFT Faithfulness 0.8644 vs RAG 0.5888</a:t>
+            </a:r>
+            <a:br/>
+            <a:r>
+              <a:t>忠实度领先 46.8%，知识"内化"比"检索"更可靠</a:t>
+            </a:r>
+          </a:p>
+        </p:txBody>
+      </p:sp>
+      <p:sp>
+        <p:nvSpPr>
+          <p:cNvPr id="6" name="TextBox 5"/>
+          <p:cNvSpPr txBox="1"/>
+          <p:nvPr/>
+        </p:nvSpPr>
+        <p:spPr>
+          <a:xfrm>
+            <a:off x="914400" y="3200400"/>
+            <a:ext cx="10058400" cy="457200"/>
+          </a:xfrm>
+          <a:prstGeom prst="rect">
+            <a:avLst/>
+          </a:prstGeom>
+          <a:noFill/>
+        </p:spPr>
+        <p:txBody>
+          <a:bodyPr wrap="square">
+            <a:spAutoFit/>
+          </a:bodyPr>
+          <a:lstStyle/>
+          <a:p>
+            <a:pPr algn="l">
+              <a:defRPr sz="2200" b="1">
+                <a:solidFill>
+                  <a:srgbClr val="2A9D8F"/>
+                </a:solidFill>
+                <a:latin typeface="Arial"/>
+              </a:defRPr>
+            </a:pPr>
+            <a:r>
+              <a:t>🥈 发现 2: 相关性旗鼓相当</a:t>
+            </a:r>
+          </a:p>
+        </p:txBody>
+      </p:sp>
+      <p:sp>
+        <p:nvSpPr>
+          <p:cNvPr id="7" name="TextBox 6"/>
+          <p:cNvSpPr txBox="1"/>
+          <p:nvPr/>
+        </p:nvSpPr>
+        <p:spPr>
+          <a:xfrm>
+            <a:off x="1371600" y="3657600"/>
+            <a:ext cx="9144000" cy="731520"/>
+          </a:xfrm>
+          <a:prstGeom prst="rect">
+            <a:avLst/>
+          </a:prstGeom>
+          <a:noFill/>
+        </p:spPr>
+        <p:txBody>
+          <a:bodyPr wrap="square">
+            <a:spAutoFit/>
+          </a:bodyPr>
+          <a:lstStyle/>
+          <a:p>
+            <a:pPr algn="l">
+              <a:defRPr sz="1600" b="0">
+                <a:solidFill>
+                  <a:srgbClr val="FFFFFF"/>
+                </a:solidFill>
+                <a:latin typeface="Arial"/>
+              </a:defRPr>
+            </a:pPr>
+            <a:r>
+              <a:t>RAG Relevancy 0.8914 vs SFT 0.8812</a:t>
+            </a:r>
+            <a:br/>
+            <a:r>
+              <a:t>差距仅 1.1%，微调小模型理解能力接近大模型</a:t>
+            </a:r>
+          </a:p>
+        </p:txBody>
+      </p:sp>
+      <p:sp>
+        <p:nvSpPr>
+          <p:cNvPr id="8" name="TextBox 7"/>
+          <p:cNvSpPr txBox="1"/>
+          <p:nvPr/>
+        </p:nvSpPr>
+        <p:spPr>
+          <a:xfrm>
+            <a:off x="914400" y="4754880"/>
+            <a:ext cx="10058400" cy="457200"/>
+          </a:xfrm>
+          <a:prstGeom prst="rect">
+            <a:avLst/>
+          </a:prstGeom>
+          <a:noFill/>
+        </p:spPr>
+        <p:txBody>
+          <a:bodyPr wrap="square">
+            <a:spAutoFit/>
+          </a:bodyPr>
+          <a:lstStyle/>
+          <a:p>
+            <a:pPr algn="l">
+              <a:defRPr sz="2200" b="1">
+                <a:solidFill>
+                  <a:srgbClr val="2A9D8F"/>
+                </a:solidFill>
+                <a:latin typeface="Arial"/>
+              </a:defRPr>
+            </a:pPr>
+            <a:r>
+              <a:t>🥉 发现 3: Hybrid 未达预期</a:t>
+            </a:r>
+          </a:p>
+        </p:txBody>
+      </p:sp>
+      <p:sp>
+        <p:nvSpPr>
+          <p:cNvPr id="9" name="TextBox 8"/>
+          <p:cNvSpPr txBox="1"/>
+          <p:nvPr/>
+        </p:nvSpPr>
+        <p:spPr>
+          <a:xfrm>
+            <a:off x="1371600" y="5212080"/>
+            <a:ext cx="9144000" cy="731520"/>
+          </a:xfrm>
+          <a:prstGeom prst="rect">
+            <a:avLst/>
+          </a:prstGeom>
+          <a:noFill/>
+        </p:spPr>
+        <p:txBody>
+          <a:bodyPr wrap="square">
+            <a:spAutoFit/>
+          </a:bodyPr>
+          <a:lstStyle/>
+          <a:p>
+            <a:pPr algn="l">
+              <a:defRPr sz="1600" b="0">
+                <a:solidFill>
+                  <a:srgbClr val="FFFFFF"/>
+                </a:solidFill>
+                <a:latin typeface="Arial"/>
+              </a:defRPr>
+            </a:pPr>
+            <a:r>
+              <a:t>理应最强，实际 Faithfulness 仅 0.612</a:t>
+            </a:r>
+            <a:br/>
+            <a:r>
+              <a:t>Agent 编排引入不确定性，检索-推理协调待优化</a:t>
             </a:r>
           </a:p>
         </p:txBody>
@@ -3811,8 +4224,8 @@
         </p:nvSpPr>
         <p:spPr>
           <a:xfrm>
-            <a:off x="914400" y="1828800"/>
-            <a:ext cx="10058400" cy="1371600"/>
+            <a:off x="731520" y="457200"/>
+            <a:ext cx="10698480" cy="914400"/>
           </a:xfrm>
           <a:prstGeom prst="rect">
             <a:avLst/>
@@ -3825,29 +4238,73 @@
           </a:bodyPr>
           <a:lstStyle/>
           <a:p>
-            <a:pPr algn="ctr">
-              <a:defRPr sz="4800" b="1">
+            <a:pPr algn="l">
+              <a:defRPr sz="3600" b="1">
                 <a:solidFill>
                   <a:srgbClr val="FFFFFF"/>
                 </a:solidFill>
+                <a:latin typeface="Arial"/>
               </a:defRPr>
             </a:pPr>
             <a:r>
-              <a:t>🙏 谢谢！</a:t>
-            </a:r>
-          </a:p>
-        </p:txBody>
-      </p:sp>
-      <p:sp>
-        <p:nvSpPr>
-          <p:cNvPr id="3" name="TextBox 2"/>
+              <a:t>🌐 Web Demo</a:t>
+            </a:r>
+          </a:p>
+        </p:txBody>
+      </p:sp>
+      <p:sp>
+        <p:nvSpPr>
+          <p:cNvPr id="3" name="Rectangle 2"/>
+          <p:cNvSpPr/>
+          <p:nvPr/>
+        </p:nvSpPr>
+        <p:spPr>
+          <a:xfrm>
+            <a:off x="731520" y="1097280"/>
+            <a:ext cx="3657600" cy="27432"/>
+          </a:xfrm>
+          <a:prstGeom prst="rect">
+            <a:avLst/>
+          </a:prstGeom>
+          <a:solidFill>
+            <a:srgbClr val="2A9D8F"/>
+          </a:solidFill>
+          <a:ln>
+            <a:noFill/>
+          </a:ln>
+        </p:spPr>
+        <p:style>
+          <a:lnRef idx="1">
+            <a:schemeClr val="accent1"/>
+          </a:lnRef>
+          <a:fillRef idx="3">
+            <a:schemeClr val="accent1"/>
+          </a:fillRef>
+          <a:effectRef idx="2">
+            <a:schemeClr val="accent1"/>
+          </a:effectRef>
+          <a:fontRef idx="minor">
+            <a:schemeClr val="lt1"/>
+          </a:fontRef>
+        </p:style>
+        <p:txBody>
+          <a:bodyPr rtlCol="0" anchor="ctr"/>
+          <a:lstStyle/>
+          <a:p>
+            <a:pPr algn="ctr"/>
+          </a:p>
+        </p:txBody>
+      </p:sp>
+      <p:sp>
+        <p:nvSpPr>
+          <p:cNvPr id="4" name="TextBox 3"/>
           <p:cNvSpPr txBox="1"/>
           <p:nvPr/>
         </p:nvSpPr>
         <p:spPr>
           <a:xfrm>
-            <a:off x="914400" y="3657600"/>
-            <a:ext cx="10058400" cy="914400"/>
+            <a:off x="1097280" y="1463040"/>
+            <a:ext cx="10058400" cy="548640"/>
           </a:xfrm>
           <a:prstGeom prst="rect">
             <a:avLst/>
@@ -3860,29 +4317,30 @@
           </a:bodyPr>
           <a:lstStyle/>
           <a:p>
-            <a:pPr algn="ctr">
+            <a:pPr algn="l">
               <a:defRPr sz="2000" b="0">
                 <a:solidFill>
-                  <a:srgbClr val="BBDDFF"/>
-                </a:solidFill>
+                  <a:srgbClr val="FFFFFF"/>
+                </a:solidFill>
+                <a:latin typeface="Arial"/>
               </a:defRPr>
             </a:pPr>
             <a:r>
-              <a:t>ECG-Agent-DualTrack  |  AI Agent 课程大作业</a:t>
-            </a:r>
-          </a:p>
-        </p:txBody>
-      </p:sp>
-      <p:sp>
-        <p:nvSpPr>
-          <p:cNvPr id="4" name="TextBox 3"/>
+              <a:t>▸ 🖥 简洁中文界面 — Gradio 交互式 Web UI</a:t>
+            </a:r>
+          </a:p>
+        </p:txBody>
+      </p:sp>
+      <p:sp>
+        <p:nvSpPr>
+          <p:cNvPr id="5" name="TextBox 4"/>
           <p:cNvSpPr txBox="1"/>
           <p:nvPr/>
         </p:nvSpPr>
         <p:spPr>
           <a:xfrm>
-            <a:off x="914400" y="5029200"/>
-            <a:ext cx="10058400" cy="731520"/>
+            <a:off x="1097280" y="2103120"/>
+            <a:ext cx="10058400" cy="548640"/>
           </a:xfrm>
           <a:prstGeom prst="rect">
             <a:avLst/>
@@ -3895,15 +4353,710 @@
           </a:bodyPr>
           <a:lstStyle/>
           <a:p>
+            <a:pPr algn="l">
+              <a:defRPr sz="2000" b="0">
+                <a:solidFill>
+                  <a:srgbClr val="FFFFFF"/>
+                </a:solidFill>
+                <a:latin typeface="Arial"/>
+              </a:defRPr>
+            </a:pPr>
+            <a:r>
+              <a:t>▸ 🚀 GPU 真机推理 — DeepSeek-1.5B + LoRA + RTX 3060</a:t>
+            </a:r>
+          </a:p>
+        </p:txBody>
+      </p:sp>
+      <p:sp>
+        <p:nvSpPr>
+          <p:cNvPr id="6" name="TextBox 5"/>
+          <p:cNvSpPr txBox="1"/>
+          <p:nvPr/>
+        </p:nvSpPr>
+        <p:spPr>
+          <a:xfrm>
+            <a:off x="1097280" y="2743200"/>
+            <a:ext cx="10058400" cy="548640"/>
+          </a:xfrm>
+          <a:prstGeom prst="rect">
+            <a:avLst/>
+          </a:prstGeom>
+          <a:noFill/>
+        </p:spPr>
+        <p:txBody>
+          <a:bodyPr wrap="square">
+            <a:spAutoFit/>
+          </a:bodyPr>
+          <a:lstStyle/>
+          <a:p>
+            <a:pPr algn="l">
+              <a:defRPr sz="2000" b="0">
+                <a:solidFill>
+                  <a:srgbClr val="FFFFFF"/>
+                </a:solidFill>
+                <a:latin typeface="Arial"/>
+              </a:defRPr>
+            </a:pPr>
+            <a:r>
+              <a:t>▸ 📚 RAG 增强 — FAISS 检索 78K 医疗文献</a:t>
+            </a:r>
+          </a:p>
+        </p:txBody>
+      </p:sp>
+      <p:sp>
+        <p:nvSpPr>
+          <p:cNvPr id="7" name="TextBox 6"/>
+          <p:cNvSpPr txBox="1"/>
+          <p:nvPr/>
+        </p:nvSpPr>
+        <p:spPr>
+          <a:xfrm>
+            <a:off x="1097280" y="3383279"/>
+            <a:ext cx="10058400" cy="548640"/>
+          </a:xfrm>
+          <a:prstGeom prst="rect">
+            <a:avLst/>
+          </a:prstGeom>
+          <a:noFill/>
+        </p:spPr>
+        <p:txBody>
+          <a:bodyPr wrap="square">
+            <a:spAutoFit/>
+          </a:bodyPr>
+          <a:lstStyle/>
+          <a:p>
+            <a:pPr algn="l">
+              <a:defRPr sz="2000" b="0">
+                <a:solidFill>
+                  <a:srgbClr val="FFFFFF"/>
+                </a:solidFill>
+                <a:latin typeface="Arial"/>
+              </a:defRPr>
+            </a:pPr>
+            <a:r>
+              <a:t>▸ 🔄 三模式切换 — 混合智能体 / 纯SFT / 纯RAG</a:t>
+            </a:r>
+          </a:p>
+        </p:txBody>
+      </p:sp>
+      <p:sp>
+        <p:nvSpPr>
+          <p:cNvPr id="8" name="TextBox 7"/>
+          <p:cNvSpPr txBox="1"/>
+          <p:nvPr/>
+        </p:nvSpPr>
+        <p:spPr>
+          <a:xfrm>
+            <a:off x="1097280" y="4023360"/>
+            <a:ext cx="10058400" cy="548640"/>
+          </a:xfrm>
+          <a:prstGeom prst="rect">
+            <a:avLst/>
+          </a:prstGeom>
+          <a:noFill/>
+        </p:spPr>
+        <p:txBody>
+          <a:bodyPr wrap="square">
+            <a:spAutoFit/>
+          </a:bodyPr>
+          <a:lstStyle/>
+          <a:p>
+            <a:pPr algn="l">
+              <a:defRPr sz="2000" b="0">
+                <a:solidFill>
+                  <a:srgbClr val="FFFFFF"/>
+                </a:solidFill>
+                <a:latin typeface="Arial"/>
+              </a:defRPr>
+            </a:pPr>
+            <a:r>
+              <a:t>▸ 📊 评测数据展示 — RAGAS 指标内嵌页面</a:t>
+            </a:r>
+          </a:p>
+        </p:txBody>
+      </p:sp>
+      <p:sp>
+        <p:nvSpPr>
+          <p:cNvPr id="9" name="TextBox 8"/>
+          <p:cNvSpPr txBox="1"/>
+          <p:nvPr/>
+        </p:nvSpPr>
+        <p:spPr>
+          <a:xfrm>
+            <a:off x="1097280" y="4663440"/>
+            <a:ext cx="10058400" cy="548640"/>
+          </a:xfrm>
+          <a:prstGeom prst="rect">
+            <a:avLst/>
+          </a:prstGeom>
+          <a:noFill/>
+        </p:spPr>
+        <p:txBody>
+          <a:bodyPr wrap="square">
+            <a:spAutoFit/>
+          </a:bodyPr>
+          <a:lstStyle/>
+          <a:p>
+            <a:pPr algn="l">
+              <a:defRPr sz="2000" b="0">
+                <a:solidFill>
+                  <a:srgbClr val="FFFFFF"/>
+                </a:solidFill>
+                <a:latin typeface="Arial"/>
+              </a:defRPr>
+            </a:pPr>
+            <a:r>
+              <a:t>▸ 🔗 访问地址: http://localhost:7860</a:t>
+            </a:r>
+          </a:p>
+        </p:txBody>
+      </p:sp>
+    </p:spTree>
+  </p:cSld>
+  <p:clrMapOvr>
+    <a:masterClrMapping/>
+  </p:clrMapOvr>
+</p:sld>
+</file>
+
+<file path=ppt/slides/slide13.xml><?xml version="1.0" encoding="utf-8"?>
+<p:sld xmlns:a="http://schemas.openxmlformats.org/drawingml/2006/main" xmlns:p="http://schemas.openxmlformats.org/presentationml/2006/main" xmlns:r="http://schemas.openxmlformats.org/officeDocument/2006/relationships">
+  <p:cSld>
+    <p:bg>
+      <p:bgPr>
+        <a:solidFill>
+          <a:srgbClr val="1A5276"/>
+        </a:solidFill>
+        <a:effectLst/>
+      </p:bgPr>
+    </p:bg>
+    <p:spTree>
+      <p:nvGrpSpPr>
+        <p:cNvPr id="1" name=""/>
+        <p:cNvGrpSpPr/>
+        <p:nvPr/>
+      </p:nvGrpSpPr>
+      <p:grpSpPr/>
+      <p:sp>
+        <p:nvSpPr>
+          <p:cNvPr id="2" name="TextBox 1"/>
+          <p:cNvSpPr txBox="1"/>
+          <p:nvPr/>
+        </p:nvSpPr>
+        <p:spPr>
+          <a:xfrm>
+            <a:off x="731520" y="457200"/>
+            <a:ext cx="10698480" cy="914400"/>
+          </a:xfrm>
+          <a:prstGeom prst="rect">
+            <a:avLst/>
+          </a:prstGeom>
+          <a:noFill/>
+        </p:spPr>
+        <p:txBody>
+          <a:bodyPr wrap="square">
+            <a:spAutoFit/>
+          </a:bodyPr>
+          <a:lstStyle/>
+          <a:p>
+            <a:pPr algn="l">
+              <a:defRPr sz="3600" b="1">
+                <a:solidFill>
+                  <a:srgbClr val="FFFFFF"/>
+                </a:solidFill>
+                <a:latin typeface="Arial"/>
+              </a:defRPr>
+            </a:pPr>
+            <a:r>
+              <a:t>💡 总结与展望</a:t>
+            </a:r>
+          </a:p>
+        </p:txBody>
+      </p:sp>
+      <p:sp>
+        <p:nvSpPr>
+          <p:cNvPr id="3" name="Rectangle 2"/>
+          <p:cNvSpPr/>
+          <p:nvPr/>
+        </p:nvSpPr>
+        <p:spPr>
+          <a:xfrm>
+            <a:off x="731520" y="1097280"/>
+            <a:ext cx="3657600" cy="27432"/>
+          </a:xfrm>
+          <a:prstGeom prst="rect">
+            <a:avLst/>
+          </a:prstGeom>
+          <a:solidFill>
+            <a:srgbClr val="2A9D8F"/>
+          </a:solidFill>
+          <a:ln>
+            <a:noFill/>
+          </a:ln>
+        </p:spPr>
+        <p:style>
+          <a:lnRef idx="1">
+            <a:schemeClr val="accent1"/>
+          </a:lnRef>
+          <a:fillRef idx="3">
+            <a:schemeClr val="accent1"/>
+          </a:fillRef>
+          <a:effectRef idx="2">
+            <a:schemeClr val="accent1"/>
+          </a:effectRef>
+          <a:fontRef idx="minor">
+            <a:schemeClr val="lt1"/>
+          </a:fontRef>
+        </p:style>
+        <p:txBody>
+          <a:bodyPr rtlCol="0" anchor="ctr"/>
+          <a:lstStyle/>
+          <a:p>
+            <a:pPr algn="ctr"/>
+          </a:p>
+        </p:txBody>
+      </p:sp>
+      <p:sp>
+        <p:nvSpPr>
+          <p:cNvPr id="4" name="TextBox 3"/>
+          <p:cNvSpPr txBox="1"/>
+          <p:nvPr/>
+        </p:nvSpPr>
+        <p:spPr>
+          <a:xfrm>
+            <a:off x="914400" y="1463040"/>
+            <a:ext cx="10058400" cy="548640"/>
+          </a:xfrm>
+          <a:prstGeom prst="rect">
+            <a:avLst/>
+          </a:prstGeom>
+          <a:noFill/>
+        </p:spPr>
+        <p:txBody>
+          <a:bodyPr wrap="square">
+            <a:spAutoFit/>
+          </a:bodyPr>
+          <a:lstStyle/>
+          <a:p>
+            <a:pPr algn="l">
+              <a:defRPr sz="2000" b="1">
+                <a:solidFill>
+                  <a:srgbClr val="FFFFFF"/>
+                </a:solidFill>
+                <a:latin typeface="Arial"/>
+              </a:defRPr>
+            </a:pPr>
+            <a:r>
+              <a:t>1. 小模型微调 &gt; 大模型检索 — Faithfulness 高 46.8%，速度快 3.3×</a:t>
+            </a:r>
+          </a:p>
+        </p:txBody>
+      </p:sp>
+      <p:sp>
+        <p:nvSpPr>
+          <p:cNvPr id="5" name="TextBox 4"/>
+          <p:cNvSpPr txBox="1"/>
+          <p:nvPr/>
+        </p:nvSpPr>
+        <p:spPr>
+          <a:xfrm>
+            <a:off x="914400" y="2103120"/>
+            <a:ext cx="10058400" cy="548640"/>
+          </a:xfrm>
+          <a:prstGeom prst="rect">
+            <a:avLst/>
+          </a:prstGeom>
+          <a:noFill/>
+        </p:spPr>
+        <p:txBody>
+          <a:bodyPr wrap="square">
+            <a:spAutoFit/>
+          </a:bodyPr>
+          <a:lstStyle/>
+          <a:p>
+            <a:pPr algn="l">
+              <a:defRPr sz="2000" b="1">
+                <a:solidFill>
+                  <a:srgbClr val="FFFFFF"/>
+                </a:solidFill>
+                <a:latin typeface="Arial"/>
+              </a:defRPr>
+            </a:pPr>
+            <a:r>
+              <a:t>2. QLoRA 极低显存 — 训练仅需 5.6GB，8GB 消费卡即可训练</a:t>
+            </a:r>
+          </a:p>
+        </p:txBody>
+      </p:sp>
+      <p:sp>
+        <p:nvSpPr>
+          <p:cNvPr id="6" name="TextBox 5"/>
+          <p:cNvSpPr txBox="1"/>
+          <p:nvPr/>
+        </p:nvSpPr>
+        <p:spPr>
+          <a:xfrm>
+            <a:off x="914400" y="2743200"/>
+            <a:ext cx="10058400" cy="548640"/>
+          </a:xfrm>
+          <a:prstGeom prst="rect">
+            <a:avLst/>
+          </a:prstGeom>
+          <a:noFill/>
+        </p:spPr>
+        <p:txBody>
+          <a:bodyPr wrap="square">
+            <a:spAutoFit/>
+          </a:bodyPr>
+          <a:lstStyle/>
+          <a:p>
+            <a:pPr algn="l">
+              <a:defRPr sz="2000" b="1">
+                <a:solidFill>
+                  <a:srgbClr val="FFFFFF"/>
+                </a:solidFill>
+                <a:latin typeface="Arial"/>
+              </a:defRPr>
+            </a:pPr>
+            <a:r>
+              <a:t>3. 评测方法论可复用 — 去重→分层抽样→三管道→RAGAS→可视化</a:t>
+            </a:r>
+          </a:p>
+        </p:txBody>
+      </p:sp>
+      <p:sp>
+        <p:nvSpPr>
+          <p:cNvPr id="7" name="TextBox 6"/>
+          <p:cNvSpPr txBox="1"/>
+          <p:nvPr/>
+        </p:nvSpPr>
+        <p:spPr>
+          <a:xfrm>
+            <a:off x="914400" y="3657600"/>
+            <a:ext cx="10058400" cy="457200"/>
+          </a:xfrm>
+          <a:prstGeom prst="rect">
+            <a:avLst/>
+          </a:prstGeom>
+          <a:noFill/>
+        </p:spPr>
+        <p:txBody>
+          <a:bodyPr wrap="square">
+            <a:spAutoFit/>
+          </a:bodyPr>
+          <a:lstStyle/>
+          <a:p>
+            <a:pPr algn="l">
+              <a:defRPr sz="2400" b="1">
+                <a:solidFill>
+                  <a:srgbClr val="2A9D8F"/>
+                </a:solidFill>
+                <a:latin typeface="Arial"/>
+              </a:defRPr>
+            </a:pPr>
+            <a:r>
+              <a:t>未来方向</a:t>
+            </a:r>
+          </a:p>
+        </p:txBody>
+      </p:sp>
+      <p:sp>
+        <p:nvSpPr>
+          <p:cNvPr id="8" name="TextBox 7"/>
+          <p:cNvSpPr txBox="1"/>
+          <p:nvPr/>
+        </p:nvSpPr>
+        <p:spPr>
+          <a:xfrm>
+            <a:off x="1371600" y="4206240"/>
+            <a:ext cx="9144000" cy="457200"/>
+          </a:xfrm>
+          <a:prstGeom prst="rect">
+            <a:avLst/>
+          </a:prstGeom>
+          <a:noFill/>
+        </p:spPr>
+        <p:txBody>
+          <a:bodyPr wrap="square">
+            <a:spAutoFit/>
+          </a:bodyPr>
+          <a:lstStyle/>
+          <a:p>
+            <a:pPr algn="l">
+              <a:defRPr sz="1700" b="0">
+                <a:solidFill>
+                  <a:srgbClr val="FFFFFF"/>
+                </a:solidFill>
+                <a:latin typeface="Arial"/>
+              </a:defRPr>
+            </a:pPr>
+            <a:r>
+              <a:t>▸ 🔬 更大规模 CoT 微调数据 + 更大模型 (7B QLoRA)</a:t>
+            </a:r>
+          </a:p>
+        </p:txBody>
+      </p:sp>
+      <p:sp>
+        <p:nvSpPr>
+          <p:cNvPr id="9" name="TextBox 8"/>
+          <p:cNvSpPr txBox="1"/>
+          <p:nvPr/>
+        </p:nvSpPr>
+        <p:spPr>
+          <a:xfrm>
+            <a:off x="1371600" y="4663440"/>
+            <a:ext cx="9144000" cy="457200"/>
+          </a:xfrm>
+          <a:prstGeom prst="rect">
+            <a:avLst/>
+          </a:prstGeom>
+          <a:noFill/>
+        </p:spPr>
+        <p:txBody>
+          <a:bodyPr wrap="square">
+            <a:spAutoFit/>
+          </a:bodyPr>
+          <a:lstStyle/>
+          <a:p>
+            <a:pPr algn="l">
+              <a:defRPr sz="1700" b="0">
+                <a:solidFill>
+                  <a:srgbClr val="FFFFFF"/>
+                </a:solidFill>
+                <a:latin typeface="Arial"/>
+              </a:defRPr>
+            </a:pPr>
+            <a:r>
+              <a:t>▸ 🧩 多模态 — ECG 图像 + 文本联合诊断</a:t>
+            </a:r>
+          </a:p>
+        </p:txBody>
+      </p:sp>
+      <p:sp>
+        <p:nvSpPr>
+          <p:cNvPr id="10" name="TextBox 9"/>
+          <p:cNvSpPr txBox="1"/>
+          <p:nvPr/>
+        </p:nvSpPr>
+        <p:spPr>
+          <a:xfrm>
+            <a:off x="1371600" y="5120640"/>
+            <a:ext cx="9144000" cy="457200"/>
+          </a:xfrm>
+          <a:prstGeom prst="rect">
+            <a:avLst/>
+          </a:prstGeom>
+          <a:noFill/>
+        </p:spPr>
+        <p:txBody>
+          <a:bodyPr wrap="square">
+            <a:spAutoFit/>
+          </a:bodyPr>
+          <a:lstStyle/>
+          <a:p>
+            <a:pPr algn="l">
+              <a:defRPr sz="1700" b="0">
+                <a:solidFill>
+                  <a:srgbClr val="FFFFFF"/>
+                </a:solidFill>
+                <a:latin typeface="Arial"/>
+              </a:defRPr>
+            </a:pPr>
+            <a:r>
+              <a:t>▸ 🏥 真实临床场景验证 + 监管审批路径探索</a:t>
+            </a:r>
+          </a:p>
+        </p:txBody>
+      </p:sp>
+    </p:spTree>
+  </p:cSld>
+  <p:clrMapOvr>
+    <a:masterClrMapping/>
+  </p:clrMapOvr>
+</p:sld>
+</file>
+
+<file path=ppt/slides/slide14.xml><?xml version="1.0" encoding="utf-8"?>
+<p:sld xmlns:a="http://schemas.openxmlformats.org/drawingml/2006/main" xmlns:p="http://schemas.openxmlformats.org/presentationml/2006/main" xmlns:r="http://schemas.openxmlformats.org/officeDocument/2006/relationships">
+  <p:cSld>
+    <p:bg>
+      <p:bgPr>
+        <a:solidFill>
+          <a:srgbClr val="1A5276"/>
+        </a:solidFill>
+        <a:effectLst/>
+      </p:bgPr>
+    </p:bg>
+    <p:spTree>
+      <p:nvGrpSpPr>
+        <p:cNvPr id="1" name=""/>
+        <p:cNvGrpSpPr/>
+        <p:nvPr/>
+      </p:nvGrpSpPr>
+      <p:grpSpPr/>
+      <p:sp>
+        <p:nvSpPr>
+          <p:cNvPr id="2" name="TextBox 1"/>
+          <p:cNvSpPr txBox="1"/>
+          <p:nvPr/>
+        </p:nvSpPr>
+        <p:spPr>
+          <a:xfrm>
+            <a:off x="2286000" y="1828800"/>
+            <a:ext cx="9144000" cy="1371600"/>
+          </a:xfrm>
+          <a:prstGeom prst="rect">
+            <a:avLst/>
+          </a:prstGeom>
+          <a:noFill/>
+        </p:spPr>
+        <p:txBody>
+          <a:bodyPr wrap="square">
+            <a:spAutoFit/>
+          </a:bodyPr>
+          <a:lstStyle/>
+          <a:p>
             <a:pPr algn="ctr">
-              <a:defRPr sz="1400" b="0">
-                <a:solidFill>
-                  <a:srgbClr val="7F8C8D"/>
-                </a:solidFill>
+              <a:defRPr sz="5200" b="1">
+                <a:solidFill>
+                  <a:srgbClr val="FFFFFF"/>
+                </a:solidFill>
+                <a:latin typeface="Arial"/>
               </a:defRPr>
             </a:pPr>
             <a:r>
-              <a:t>📂 GitHub  |  📄 ARCHITECTURE.md  |  📝 FINAL_REPORT.md  |  🌐 Demo: localhost:7860</a:t>
+              <a:t>🙏 谢谢！</a:t>
+            </a:r>
+          </a:p>
+        </p:txBody>
+      </p:sp>
+      <p:sp>
+        <p:nvSpPr>
+          <p:cNvPr id="3" name="TextBox 2"/>
+          <p:cNvSpPr txBox="1"/>
+          <p:nvPr/>
+        </p:nvSpPr>
+        <p:spPr>
+          <a:xfrm>
+            <a:off x="1371600" y="3200400"/>
+            <a:ext cx="9144000" cy="548640"/>
+          </a:xfrm>
+          <a:prstGeom prst="rect">
+            <a:avLst/>
+          </a:prstGeom>
+          <a:noFill/>
+        </p:spPr>
+        <p:txBody>
+          <a:bodyPr wrap="square">
+            <a:spAutoFit/>
+          </a:bodyPr>
+          <a:lstStyle/>
+          <a:p>
+            <a:pPr algn="ctr">
+              <a:defRPr sz="2800" b="0">
+                <a:solidFill>
+                  <a:srgbClr val="ECF0F1"/>
+                </a:solidFill>
+                <a:latin typeface="Arial"/>
+              </a:defRPr>
+            </a:pPr>
+            <a:r>
+              <a:t>欢迎提问</a:t>
+            </a:r>
+          </a:p>
+        </p:txBody>
+      </p:sp>
+      <p:sp>
+        <p:nvSpPr>
+          <p:cNvPr id="4" name="Rectangle 3"/>
+          <p:cNvSpPr/>
+          <p:nvPr/>
+        </p:nvSpPr>
+        <p:spPr>
+          <a:xfrm>
+            <a:off x="3657600" y="3840480"/>
+            <a:ext cx="4846320" cy="27432"/>
+          </a:xfrm>
+          <a:prstGeom prst="rect">
+            <a:avLst/>
+          </a:prstGeom>
+          <a:solidFill>
+            <a:srgbClr val="2A9D8F"/>
+          </a:solidFill>
+          <a:ln>
+            <a:noFill/>
+          </a:ln>
+        </p:spPr>
+        <p:style>
+          <a:lnRef idx="1">
+            <a:schemeClr val="accent1"/>
+          </a:lnRef>
+          <a:fillRef idx="3">
+            <a:schemeClr val="accent1"/>
+          </a:fillRef>
+          <a:effectRef idx="2">
+            <a:schemeClr val="accent1"/>
+          </a:effectRef>
+          <a:fontRef idx="minor">
+            <a:schemeClr val="lt1"/>
+          </a:fontRef>
+        </p:style>
+        <p:txBody>
+          <a:bodyPr rtlCol="0" anchor="ctr"/>
+          <a:lstStyle/>
+          <a:p>
+            <a:pPr algn="ctr"/>
+          </a:p>
+        </p:txBody>
+      </p:sp>
+      <p:sp>
+        <p:nvSpPr>
+          <p:cNvPr id="5" name="TextBox 4"/>
+          <p:cNvSpPr txBox="1"/>
+          <p:nvPr/>
+        </p:nvSpPr>
+        <p:spPr>
+          <a:xfrm>
+            <a:off x="1371600" y="4206240"/>
+            <a:ext cx="9144000" cy="2286000"/>
+          </a:xfrm>
+          <a:prstGeom prst="rect">
+            <a:avLst/>
+          </a:prstGeom>
+          <a:noFill/>
+        </p:spPr>
+        <p:txBody>
+          <a:bodyPr wrap="square">
+            <a:spAutoFit/>
+          </a:bodyPr>
+          <a:lstStyle/>
+          <a:p>
+            <a:pPr algn="ctr">
+              <a:defRPr sz="1600" b="0">
+                <a:solidFill>
+                  <a:srgbClr val="ECF0F1"/>
+                </a:solidFill>
+                <a:latin typeface="Arial"/>
+              </a:defRPr>
+            </a:pPr>
+            <a:r>
+              <a:t>📂 GitHub: ECG-Agent-DualTrack</a:t>
+            </a:r>
+            <a:br/>
+            <a:r>
+              <a:t>📄 架构文档: ARCHITECTURE.md</a:t>
+            </a:r>
+            <a:br/>
+            <a:r>
+              <a:t>📝 终期报告: memberC_files/FINAL_REPORT.md</a:t>
+            </a:r>
+            <a:br/>
+            <a:r>
+              <a:t>🎤 演讲稿: memberC_files/演讲稿.md</a:t>
+            </a:r>
+            <a:br/>
+            <a:r>
+              <a:t>🌐 Demo: http://localhost:7860</a:t>
             </a:r>
           </a:p>
         </p:txBody>
@@ -3922,7 +5075,7 @@
     <p:bg>
       <p:bgPr>
         <a:solidFill>
-          <a:srgbClr val="FFFFFF"/>
+          <a:srgbClr val="1A5276"/>
         </a:solidFill>
         <a:effectLst/>
       </p:bgPr>
@@ -3942,8 +5095,8 @@
         </p:nvSpPr>
         <p:spPr>
           <a:xfrm>
-            <a:off x="457200" y="274320"/>
-            <a:ext cx="10972800" cy="914400"/>
+            <a:off x="731520" y="457200"/>
+            <a:ext cx="10698480" cy="914400"/>
           </a:xfrm>
           <a:prstGeom prst="rect">
             <a:avLst/>
@@ -3957,74 +5110,38 @@
           <a:lstStyle/>
           <a:p>
             <a:pPr algn="l">
-              <a:defRPr sz="3200" b="1">
-                <a:solidFill>
-                  <a:srgbClr val="1A5276"/>
-                </a:solidFill>
+              <a:defRPr sz="3600" b="1">
+                <a:solidFill>
+                  <a:srgbClr val="FFFFFF"/>
+                </a:solidFill>
+                <a:latin typeface="Arial"/>
               </a:defRPr>
             </a:pPr>
             <a:r>
-              <a:t>📋 项目背景与目标</a:t>
-            </a:r>
-          </a:p>
-        </p:txBody>
-      </p:sp>
-      <p:sp>
-        <p:nvSpPr>
-          <p:cNvPr id="3" name="TextBox 2"/>
-          <p:cNvSpPr txBox="1"/>
-          <p:nvPr/>
-        </p:nvSpPr>
-        <p:spPr>
-          <a:xfrm>
-            <a:off x="457200" y="1188720"/>
-            <a:ext cx="10972800" cy="731520"/>
-          </a:xfrm>
-          <a:prstGeom prst="rect">
-            <a:avLst/>
-          </a:prstGeom>
-          <a:noFill/>
-        </p:spPr>
-        <p:txBody>
-          <a:bodyPr wrap="square">
-            <a:spAutoFit/>
-          </a:bodyPr>
-          <a:lstStyle/>
-          <a:p>
-            <a:pPr algn="l">
-              <a:defRPr sz="1800" b="0">
-                <a:solidFill>
-                  <a:srgbClr val="2C3E50"/>
-                </a:solidFill>
-              </a:defRPr>
-            </a:pPr>
-            <a:r>
-              <a:t>构建面向心电图解读与心血管临床决策支持的医疗 AI Agent，对比两条技术路线：</a:t>
-            </a:r>
-          </a:p>
-        </p:txBody>
-      </p:sp>
-      <p:sp>
-        <p:nvSpPr>
-          <p:cNvPr id="4" name="Rectangle 3"/>
+              <a:t>📋 目录</a:t>
+            </a:r>
+          </a:p>
+        </p:txBody>
+      </p:sp>
+      <p:sp>
+        <p:nvSpPr>
+          <p:cNvPr id="3" name="Rectangle 2"/>
           <p:cNvSpPr/>
           <p:nvPr/>
         </p:nvSpPr>
         <p:spPr>
           <a:xfrm>
-            <a:off x="731520" y="2286000"/>
-            <a:ext cx="5029200" cy="3200400"/>
+            <a:off x="731520" y="1097280"/>
+            <a:ext cx="3657600" cy="27432"/>
           </a:xfrm>
           <a:prstGeom prst="rect">
             <a:avLst/>
           </a:prstGeom>
           <a:solidFill>
-            <a:srgbClr val="E8F4FD"/>
+            <a:srgbClr val="2A9D8F"/>
           </a:solidFill>
-          <a:ln w="25400">
-            <a:solidFill>
-              <a:srgbClr val="2E86C1"/>
-            </a:solidFill>
+          <a:ln>
+            <a:noFill/>
           </a:ln>
         </p:spPr>
         <p:style>
@@ -4045,97 +5162,451 @@
           <a:bodyPr rtlCol="0" anchor="ctr"/>
           <a:lstStyle/>
           <a:p>
+            <a:pPr algn="ctr"/>
+          </a:p>
+        </p:txBody>
+      </p:sp>
+      <p:sp>
+        <p:nvSpPr>
+          <p:cNvPr id="4" name="TextBox 3"/>
+          <p:cNvSpPr txBox="1"/>
+          <p:nvPr/>
+        </p:nvSpPr>
+        <p:spPr>
+          <a:xfrm>
+            <a:off x="1097280" y="1554480"/>
+            <a:ext cx="4572000" cy="457200"/>
+          </a:xfrm>
+          <a:prstGeom prst="rect">
+            <a:avLst/>
+          </a:prstGeom>
+          <a:noFill/>
+        </p:spPr>
+        <p:txBody>
+          <a:bodyPr wrap="square">
+            <a:spAutoFit/>
+          </a:bodyPr>
+          <a:lstStyle/>
+          <a:p>
             <a:pPr algn="l">
-              <a:defRPr sz="2200" b="1">
-                <a:solidFill>
-                  <a:srgbClr val="2E86C1"/>
-                </a:solidFill>
+              <a:defRPr sz="2000" b="0">
+                <a:solidFill>
+                  <a:srgbClr val="FFFFFF"/>
+                </a:solidFill>
+                <a:latin typeface="Arial"/>
               </a:defRPr>
             </a:pPr>
             <a:r>
-              <a:t>🔍 RAG 路线 — 检索增强生成</a:t>
-            </a:r>
-          </a:p>
+              <a:t>1. 项目背景与目标</a:t>
+            </a:r>
+          </a:p>
+        </p:txBody>
+      </p:sp>
+      <p:sp>
+        <p:nvSpPr>
+          <p:cNvPr id="5" name="TextBox 4"/>
+          <p:cNvSpPr txBox="1"/>
+          <p:nvPr/>
+        </p:nvSpPr>
+        <p:spPr>
+          <a:xfrm>
+            <a:off x="6400800" y="1554480"/>
+            <a:ext cx="4572000" cy="457200"/>
+          </a:xfrm>
+          <a:prstGeom prst="rect">
+            <a:avLst/>
+          </a:prstGeom>
+          <a:noFill/>
+        </p:spPr>
+        <p:txBody>
+          <a:bodyPr wrap="square">
+            <a:spAutoFit/>
+          </a:bodyPr>
+          <a:lstStyle/>
           <a:p>
             <a:pPr algn="l">
-              <a:defRPr sz="1600" b="0">
-                <a:solidFill>
-                  <a:srgbClr val="2C3E50"/>
-                </a:solidFill>
+              <a:defRPr sz="2000" b="0">
+                <a:solidFill>
+                  <a:srgbClr val="FFFFFF"/>
+                </a:solidFill>
+                <a:latin typeface="Arial"/>
               </a:defRPr>
             </a:pPr>
-          </a:p>
+            <a:r>
+              <a:t>2. 系统架构总览</a:t>
+            </a:r>
+          </a:p>
+        </p:txBody>
+      </p:sp>
+      <p:sp>
+        <p:nvSpPr>
+          <p:cNvPr id="6" name="TextBox 5"/>
+          <p:cNvSpPr txBox="1"/>
+          <p:nvPr/>
+        </p:nvSpPr>
+        <p:spPr>
+          <a:xfrm>
+            <a:off x="1097280" y="2468880"/>
+            <a:ext cx="4572000" cy="457200"/>
+          </a:xfrm>
+          <a:prstGeom prst="rect">
+            <a:avLst/>
+          </a:prstGeom>
+          <a:noFill/>
+        </p:spPr>
+        <p:txBody>
+          <a:bodyPr wrap="square">
+            <a:spAutoFit/>
+          </a:bodyPr>
+          <a:lstStyle/>
           <a:p>
             <a:pPr algn="l">
-              <a:defRPr sz="1600" b="0">
-                <a:solidFill>
-                  <a:srgbClr val="2C3E50"/>
-                </a:solidFill>
+              <a:defRPr sz="2000" b="0">
+                <a:solidFill>
+                  <a:srgbClr val="FFFFFF"/>
+                </a:solidFill>
+                <a:latin typeface="Arial"/>
               </a:defRPr>
             </a:pPr>
             <a:r>
-              <a:t>• FAISS 向量语义检索</a:t>
-            </a:r>
-          </a:p>
+              <a:t>3. 三管道评测设计</a:t>
+            </a:r>
+          </a:p>
+        </p:txBody>
+      </p:sp>
+      <p:sp>
+        <p:nvSpPr>
+          <p:cNvPr id="7" name="TextBox 6"/>
+          <p:cNvSpPr txBox="1"/>
+          <p:nvPr/>
+        </p:nvSpPr>
+        <p:spPr>
+          <a:xfrm>
+            <a:off x="6400800" y="2468880"/>
+            <a:ext cx="4572000" cy="457200"/>
+          </a:xfrm>
+          <a:prstGeom prst="rect">
+            <a:avLst/>
+          </a:prstGeom>
+          <a:noFill/>
+        </p:spPr>
+        <p:txBody>
+          <a:bodyPr wrap="square">
+            <a:spAutoFit/>
+          </a:bodyPr>
+          <a:lstStyle/>
           <a:p>
             <a:pPr algn="l">
-              <a:defRPr sz="1600" b="0">
-                <a:solidFill>
-                  <a:srgbClr val="2C3E50"/>
-                </a:solidFill>
+              <a:defRPr sz="2000" b="0">
+                <a:solidFill>
+                  <a:srgbClr val="FFFFFF"/>
+                </a:solidFill>
+                <a:latin typeface="Arial"/>
               </a:defRPr>
             </a:pPr>
             <a:r>
-              <a:t>• 78,136 条医疗 QA 语料</a:t>
-            </a:r>
-          </a:p>
+              <a:t>4. 成员 A — RAG 知识检索库</a:t>
+            </a:r>
+          </a:p>
+        </p:txBody>
+      </p:sp>
+      <p:sp>
+        <p:nvSpPr>
+          <p:cNvPr id="8" name="TextBox 7"/>
+          <p:cNvSpPr txBox="1"/>
+          <p:nvPr/>
+        </p:nvSpPr>
+        <p:spPr>
+          <a:xfrm>
+            <a:off x="1097280" y="3383280"/>
+            <a:ext cx="4572000" cy="457200"/>
+          </a:xfrm>
+          <a:prstGeom prst="rect">
+            <a:avLst/>
+          </a:prstGeom>
+          <a:noFill/>
+        </p:spPr>
+        <p:txBody>
+          <a:bodyPr wrap="square">
+            <a:spAutoFit/>
+          </a:bodyPr>
+          <a:lstStyle/>
           <a:p>
             <a:pPr algn="l">
-              <a:defRPr sz="1600" b="0">
-                <a:solidFill>
-                  <a:srgbClr val="2C3E50"/>
-                </a:solidFill>
+              <a:defRPr sz="2000" b="0">
+                <a:solidFill>
+                  <a:srgbClr val="FFFFFF"/>
+                </a:solidFill>
+                <a:latin typeface="Arial"/>
               </a:defRPr>
             </a:pPr>
             <a:r>
-              <a:t>• 运行时获取外部知识</a:t>
-            </a:r>
-          </a:p>
+              <a:t>5. 成员 B — 医学模型微调</a:t>
+            </a:r>
+          </a:p>
+        </p:txBody>
+      </p:sp>
+      <p:sp>
+        <p:nvSpPr>
+          <p:cNvPr id="9" name="TextBox 8"/>
+          <p:cNvSpPr txBox="1"/>
+          <p:nvPr/>
+        </p:nvSpPr>
+        <p:spPr>
+          <a:xfrm>
+            <a:off x="6400800" y="3383280"/>
+            <a:ext cx="4572000" cy="457200"/>
+          </a:xfrm>
+          <a:prstGeom prst="rect">
+            <a:avLst/>
+          </a:prstGeom>
+          <a:noFill/>
+        </p:spPr>
+        <p:txBody>
+          <a:bodyPr wrap="square">
+            <a:spAutoFit/>
+          </a:bodyPr>
+          <a:lstStyle/>
           <a:p>
             <a:pPr algn="l">
-              <a:defRPr sz="1600" b="0">
-                <a:solidFill>
-                  <a:srgbClr val="2C3E50"/>
-                </a:solidFill>
+              <a:defRPr sz="2000" b="0">
+                <a:solidFill>
+                  <a:srgbClr val="FFFFFF"/>
+                </a:solidFill>
+                <a:latin typeface="Arial"/>
               </a:defRPr>
             </a:pPr>
             <a:r>
-              <a:t>• 模型 + 知识库</a:t>
-            </a:r>
-          </a:p>
-        </p:txBody>
-      </p:sp>
-      <p:sp>
-        <p:nvSpPr>
-          <p:cNvPr id="5" name="Rectangle 4"/>
+              <a:t>6. 成员 C — Agent 架构</a:t>
+            </a:r>
+          </a:p>
+        </p:txBody>
+      </p:sp>
+      <p:sp>
+        <p:nvSpPr>
+          <p:cNvPr id="10" name="TextBox 9"/>
+          <p:cNvSpPr txBox="1"/>
+          <p:nvPr/>
+        </p:nvSpPr>
+        <p:spPr>
+          <a:xfrm>
+            <a:off x="1097280" y="4297680"/>
+            <a:ext cx="4572000" cy="457200"/>
+          </a:xfrm>
+          <a:prstGeom prst="rect">
+            <a:avLst/>
+          </a:prstGeom>
+          <a:noFill/>
+        </p:spPr>
+        <p:txBody>
+          <a:bodyPr wrap="square">
+            <a:spAutoFit/>
+          </a:bodyPr>
+          <a:lstStyle/>
+          <a:p>
+            <a:pPr algn="l">
+              <a:defRPr sz="2000" b="1">
+                <a:solidFill>
+                  <a:srgbClr val="FFFFFF"/>
+                </a:solidFill>
+                <a:latin typeface="Arial"/>
+              </a:defRPr>
+            </a:pPr>
+            <a:r>
+              <a:t>7. 评测方法论 ★</a:t>
+            </a:r>
+          </a:p>
+        </p:txBody>
+      </p:sp>
+      <p:sp>
+        <p:nvSpPr>
+          <p:cNvPr id="11" name="TextBox 10"/>
+          <p:cNvSpPr txBox="1"/>
+          <p:nvPr/>
+        </p:nvSpPr>
+        <p:spPr>
+          <a:xfrm>
+            <a:off x="6400800" y="4297680"/>
+            <a:ext cx="4572000" cy="457200"/>
+          </a:xfrm>
+          <a:prstGeom prst="rect">
+            <a:avLst/>
+          </a:prstGeom>
+          <a:noFill/>
+        </p:spPr>
+        <p:txBody>
+          <a:bodyPr wrap="square">
+            <a:spAutoFit/>
+          </a:bodyPr>
+          <a:lstStyle/>
+          <a:p>
+            <a:pPr algn="l">
+              <a:defRPr sz="2000" b="0">
+                <a:solidFill>
+                  <a:srgbClr val="FFFFFF"/>
+                </a:solidFill>
+                <a:latin typeface="Arial"/>
+              </a:defRPr>
+            </a:pPr>
+            <a:r>
+              <a:t>8. 评测结果与分析</a:t>
+            </a:r>
+          </a:p>
+        </p:txBody>
+      </p:sp>
+      <p:sp>
+        <p:nvSpPr>
+          <p:cNvPr id="12" name="TextBox 11"/>
+          <p:cNvSpPr txBox="1"/>
+          <p:nvPr/>
+        </p:nvSpPr>
+        <p:spPr>
+          <a:xfrm>
+            <a:off x="1097280" y="5212080"/>
+            <a:ext cx="4572000" cy="457200"/>
+          </a:xfrm>
+          <a:prstGeom prst="rect">
+            <a:avLst/>
+          </a:prstGeom>
+          <a:noFill/>
+        </p:spPr>
+        <p:txBody>
+          <a:bodyPr wrap="square">
+            <a:spAutoFit/>
+          </a:bodyPr>
+          <a:lstStyle/>
+          <a:p>
+            <a:pPr algn="l">
+              <a:defRPr sz="2000" b="0">
+                <a:solidFill>
+                  <a:srgbClr val="FFFFFF"/>
+                </a:solidFill>
+                <a:latin typeface="Arial"/>
+              </a:defRPr>
+            </a:pPr>
+            <a:r>
+              <a:t>9. Web Demo 演示</a:t>
+            </a:r>
+          </a:p>
+        </p:txBody>
+      </p:sp>
+      <p:sp>
+        <p:nvSpPr>
+          <p:cNvPr id="13" name="TextBox 12"/>
+          <p:cNvSpPr txBox="1"/>
+          <p:nvPr/>
+        </p:nvSpPr>
+        <p:spPr>
+          <a:xfrm>
+            <a:off x="6400800" y="5212080"/>
+            <a:ext cx="4572000" cy="457200"/>
+          </a:xfrm>
+          <a:prstGeom prst="rect">
+            <a:avLst/>
+          </a:prstGeom>
+          <a:noFill/>
+        </p:spPr>
+        <p:txBody>
+          <a:bodyPr wrap="square">
+            <a:spAutoFit/>
+          </a:bodyPr>
+          <a:lstStyle/>
+          <a:p>
+            <a:pPr algn="l">
+              <a:defRPr sz="2000" b="0">
+                <a:solidFill>
+                  <a:srgbClr val="FFFFFF"/>
+                </a:solidFill>
+                <a:latin typeface="Arial"/>
+              </a:defRPr>
+            </a:pPr>
+            <a:r>
+              <a:t>10. 总结与展望</a:t>
+            </a:r>
+          </a:p>
+        </p:txBody>
+      </p:sp>
+    </p:spTree>
+  </p:cSld>
+  <p:clrMapOvr>
+    <a:masterClrMapping/>
+  </p:clrMapOvr>
+</p:sld>
+</file>
+
+<file path=ppt/slides/slide3.xml><?xml version="1.0" encoding="utf-8"?>
+<p:sld xmlns:a="http://schemas.openxmlformats.org/drawingml/2006/main" xmlns:p="http://schemas.openxmlformats.org/presentationml/2006/main" xmlns:r="http://schemas.openxmlformats.org/officeDocument/2006/relationships">
+  <p:cSld>
+    <p:bg>
+      <p:bgPr>
+        <a:solidFill>
+          <a:srgbClr val="1A5276"/>
+        </a:solidFill>
+        <a:effectLst/>
+      </p:bgPr>
+    </p:bg>
+    <p:spTree>
+      <p:nvGrpSpPr>
+        <p:cNvPr id="1" name=""/>
+        <p:cNvGrpSpPr/>
+        <p:nvPr/>
+      </p:nvGrpSpPr>
+      <p:grpSpPr/>
+      <p:sp>
+        <p:nvSpPr>
+          <p:cNvPr id="2" name="TextBox 1"/>
+          <p:cNvSpPr txBox="1"/>
+          <p:nvPr/>
+        </p:nvSpPr>
+        <p:spPr>
+          <a:xfrm>
+            <a:off x="731520" y="457200"/>
+            <a:ext cx="10698480" cy="914400"/>
+          </a:xfrm>
+          <a:prstGeom prst="rect">
+            <a:avLst/>
+          </a:prstGeom>
+          <a:noFill/>
+        </p:spPr>
+        <p:txBody>
+          <a:bodyPr wrap="square">
+            <a:spAutoFit/>
+          </a:bodyPr>
+          <a:lstStyle/>
+          <a:p>
+            <a:pPr algn="l">
+              <a:defRPr sz="3600" b="1">
+                <a:solidFill>
+                  <a:srgbClr val="FFFFFF"/>
+                </a:solidFill>
+                <a:latin typeface="Arial"/>
+              </a:defRPr>
+            </a:pPr>
+            <a:r>
+              <a:t>🎯 项目背景</a:t>
+            </a:r>
+          </a:p>
+        </p:txBody>
+      </p:sp>
+      <p:sp>
+        <p:nvSpPr>
+          <p:cNvPr id="3" name="Rectangle 2"/>
           <p:cNvSpPr/>
           <p:nvPr/>
         </p:nvSpPr>
         <p:spPr>
           <a:xfrm>
-            <a:off x="6217920" y="2286000"/>
-            <a:ext cx="5029200" cy="3200400"/>
+            <a:off x="731520" y="1097280"/>
+            <a:ext cx="3657600" cy="27432"/>
           </a:xfrm>
           <a:prstGeom prst="rect">
             <a:avLst/>
           </a:prstGeom>
           <a:solidFill>
-            <a:srgbClr val="E8F8F0"/>
+            <a:srgbClr val="2A9D8F"/>
           </a:solidFill>
-          <a:ln w="25400">
-            <a:solidFill>
-              <a:srgbClr val="27AE60"/>
-            </a:solidFill>
+          <a:ln>
+            <a:noFill/>
           </a:ln>
         </p:spPr>
         <p:style>
@@ -4156,72 +5627,158 @@
           <a:bodyPr rtlCol="0" anchor="ctr"/>
           <a:lstStyle/>
           <a:p>
+            <a:pPr algn="ctr"/>
+          </a:p>
+        </p:txBody>
+      </p:sp>
+      <p:sp>
+        <p:nvSpPr>
+          <p:cNvPr id="4" name="TextBox 3"/>
+          <p:cNvSpPr txBox="1"/>
+          <p:nvPr/>
+        </p:nvSpPr>
+        <p:spPr>
+          <a:xfrm>
+            <a:off x="914400" y="1828800"/>
+            <a:ext cx="4754880" cy="3200400"/>
+          </a:xfrm>
+          <a:prstGeom prst="rect">
+            <a:avLst/>
+          </a:prstGeom>
+          <a:noFill/>
+        </p:spPr>
+        <p:txBody>
+          <a:bodyPr wrap="square">
+            <a:spAutoFit/>
+          </a:bodyPr>
+          <a:lstStyle/>
+          <a:p>
             <a:pPr algn="l">
+              <a:defRPr sz="1800" b="0">
+                <a:solidFill>
+                  <a:srgbClr val="FFFFFF"/>
+                </a:solidFill>
+                <a:latin typeface="Arial"/>
+              </a:defRPr>
+            </a:pPr>
+            <a:r>
+              <a:t>🔍 RAG 路线 — 检索增强生成</a:t>
+            </a:r>
+            <a:br/>
+            <a:br/>
+            <a:r>
+              <a:t>• FAISS 语义检索 + 78K 语料</a:t>
+            </a:r>
+            <a:br/>
+            <a:r>
+              <a:t>• 运行时获取外部知识</a:t>
+            </a:r>
+            <a:br/>
+            <a:r>
+              <a:t>• 知识可随时更新</a:t>
+            </a:r>
+            <a:br/>
+            <a:r>
+              <a:t>• 依赖检索质量</a:t>
+            </a:r>
+            <a:br/>
+            <a:br/>
+            <a:r>
+              <a:t>📌 "模型 + 知识库"</a:t>
+            </a:r>
+          </a:p>
+        </p:txBody>
+      </p:sp>
+      <p:sp>
+        <p:nvSpPr>
+          <p:cNvPr id="5" name="TextBox 4"/>
+          <p:cNvSpPr txBox="1"/>
+          <p:nvPr/>
+        </p:nvSpPr>
+        <p:spPr>
+          <a:xfrm>
+            <a:off x="6400800" y="1828800"/>
+            <a:ext cx="4754880" cy="3200400"/>
+          </a:xfrm>
+          <a:prstGeom prst="rect">
+            <a:avLst/>
+          </a:prstGeom>
+          <a:noFill/>
+        </p:spPr>
+        <p:txBody>
+          <a:bodyPr wrap="square">
+            <a:spAutoFit/>
+          </a:bodyPr>
+          <a:lstStyle/>
+          <a:p>
+            <a:pPr algn="l">
+              <a:defRPr sz="1800" b="0">
+                <a:solidFill>
+                  <a:srgbClr val="FFFFFF"/>
+                </a:solidFill>
+                <a:latin typeface="Arial"/>
+              </a:defRPr>
+            </a:pPr>
+            <a:r>
+              <a:t>🧠 SFT 路线 — 监督微调</a:t>
+            </a:r>
+            <a:br/>
+            <a:br/>
+            <a:r>
+              <a:t>• DeepSeek-1.5B + QLoRA</a:t>
+            </a:r>
+            <a:br/>
+            <a:r>
+              <a:t>• 10K 医疗 QA 训练</a:t>
+            </a:r>
+            <a:br/>
+            <a:r>
+              <a:t>• 知识内化到模型参数</a:t>
+            </a:r>
+            <a:br/>
+            <a:r>
+              <a:t>• 推理快、省资源</a:t>
+            </a:r>
+            <a:br/>
+            <a:br/>
+            <a:r>
+              <a:t>📌 "小模型 + 领域知识"</a:t>
+            </a:r>
+          </a:p>
+        </p:txBody>
+      </p:sp>
+      <p:sp>
+        <p:nvSpPr>
+          <p:cNvPr id="6" name="TextBox 5"/>
+          <p:cNvSpPr txBox="1"/>
+          <p:nvPr/>
+        </p:nvSpPr>
+        <p:spPr>
+          <a:xfrm>
+            <a:off x="2286000" y="5303520"/>
+            <a:ext cx="7315200" cy="548640"/>
+          </a:xfrm>
+          <a:prstGeom prst="rect">
+            <a:avLst/>
+          </a:prstGeom>
+          <a:noFill/>
+        </p:spPr>
+        <p:txBody>
+          <a:bodyPr wrap="square">
+            <a:spAutoFit/>
+          </a:bodyPr>
+          <a:lstStyle/>
+          <a:p>
+            <a:pPr algn="ctr">
               <a:defRPr sz="2200" b="1">
                 <a:solidFill>
-                  <a:srgbClr val="27AE60"/>
-                </a:solidFill>
+                  <a:srgbClr val="2A9D8F"/>
+                </a:solidFill>
+                <a:latin typeface="Arial"/>
               </a:defRPr>
             </a:pPr>
             <a:r>
-              <a:t>🧠 SFT 路线 — 监督微调</a:t>
-            </a:r>
-          </a:p>
-          <a:p>
-            <a:pPr algn="l">
-              <a:defRPr sz="1600" b="0">
-                <a:solidFill>
-                  <a:srgbClr val="2C3E50"/>
-                </a:solidFill>
-              </a:defRPr>
-            </a:pPr>
-          </a:p>
-          <a:p>
-            <a:pPr algn="l">
-              <a:defRPr sz="1600" b="0">
-                <a:solidFill>
-                  <a:srgbClr val="2C3E50"/>
-                </a:solidFill>
-              </a:defRPr>
-            </a:pPr>
-            <a:r>
-              <a:t>• DeepSeek-R1-Distill-Qwen-1.5B</a:t>
-            </a:r>
-          </a:p>
-          <a:p>
-            <a:pPr algn="l">
-              <a:defRPr sz="1600" b="0">
-                <a:solidFill>
-                  <a:srgbClr val="2C3E50"/>
-                </a:solidFill>
-              </a:defRPr>
-            </a:pPr>
-            <a:r>
-              <a:t>• 10,000 条医疗 QA 训练</a:t>
-            </a:r>
-          </a:p>
-          <a:p>
-            <a:pPr algn="l">
-              <a:defRPr sz="1600" b="0">
-                <a:solidFill>
-                  <a:srgbClr val="2C3E50"/>
-                </a:solidFill>
-              </a:defRPr>
-            </a:pPr>
-            <a:r>
-              <a:t>• 4-bit QLoRA 高效微调</a:t>
-            </a:r>
-          </a:p>
-          <a:p>
-            <a:pPr algn="l">
-              <a:defRPr sz="1600" b="0">
-                <a:solidFill>
-                  <a:srgbClr val="2C3E50"/>
-                </a:solidFill>
-              </a:defRPr>
-            </a:pPr>
-            <a:r>
-              <a:t>• 知识内化到模型参数</a:t>
+              <a:t>核心问题：在垂直医疗领域，RAG 和 SFT 哪个更优？</a:t>
             </a:r>
           </a:p>
         </p:txBody>
@@ -4234,13 +5791,13 @@
 </p:sld>
 </file>
 
-<file path=ppt/slides/slide3.xml><?xml version="1.0" encoding="utf-8"?>
+<file path=ppt/slides/slide4.xml><?xml version="1.0" encoding="utf-8"?>
 <p:sld xmlns:a="http://schemas.openxmlformats.org/drawingml/2006/main" xmlns:p="http://schemas.openxmlformats.org/presentationml/2006/main" xmlns:r="http://schemas.openxmlformats.org/officeDocument/2006/relationships">
   <p:cSld>
     <p:bg>
       <p:bgPr>
         <a:solidFill>
-          <a:srgbClr val="FFFFFF"/>
+          <a:srgbClr val="1A5276"/>
         </a:solidFill>
         <a:effectLst/>
       </p:bgPr>
@@ -4260,8 +5817,8 @@
         </p:nvSpPr>
         <p:spPr>
           <a:xfrm>
-            <a:off x="457200" y="274320"/>
-            <a:ext cx="10972800" cy="914400"/>
+            <a:off x="731520" y="457200"/>
+            <a:ext cx="10698480" cy="914400"/>
           </a:xfrm>
           <a:prstGeom prst="rect">
             <a:avLst/>
@@ -4275,74 +5832,38 @@
           <a:lstStyle/>
           <a:p>
             <a:pPr algn="l">
-              <a:defRPr sz="3200" b="1">
-                <a:solidFill>
-                  <a:srgbClr val="1A5276"/>
-                </a:solidFill>
+              <a:defRPr sz="3600" b="1">
+                <a:solidFill>
+                  <a:srgbClr val="FFFFFF"/>
+                </a:solidFill>
+                <a:latin typeface="Arial"/>
               </a:defRPr>
             </a:pPr>
             <a:r>
-              <a:t>🏗 系统架构总览</a:t>
-            </a:r>
-          </a:p>
-        </p:txBody>
-      </p:sp>
-      <p:sp>
-        <p:nvSpPr>
-          <p:cNvPr id="3" name="TextBox 2"/>
-          <p:cNvSpPr txBox="1"/>
-          <p:nvPr/>
-        </p:nvSpPr>
-        <p:spPr>
-          <a:xfrm>
-            <a:off x="457200" y="1097280"/>
-            <a:ext cx="10972800" cy="457200"/>
-          </a:xfrm>
-          <a:prstGeom prst="rect">
-            <a:avLst/>
-          </a:prstGeom>
-          <a:noFill/>
-        </p:spPr>
-        <p:txBody>
-          <a:bodyPr wrap="square">
-            <a:spAutoFit/>
-          </a:bodyPr>
-          <a:lstStyle/>
-          <a:p>
-            <a:pPr algn="l">
-              <a:defRPr sz="1600" b="0">
-                <a:solidFill>
-                  <a:srgbClr val="7F8C8D"/>
-                </a:solidFill>
-              </a:defRPr>
-            </a:pPr>
-            <a:r>
-              <a:t>四层架构：展示层 → Agent 编排层 → 工具层 → 基础设施层</a:t>
-            </a:r>
-          </a:p>
-        </p:txBody>
-      </p:sp>
-      <p:sp>
-        <p:nvSpPr>
-          <p:cNvPr id="4" name="Rectangle 3"/>
+              <a:t>🏗 系统架构</a:t>
+            </a:r>
+          </a:p>
+        </p:txBody>
+      </p:sp>
+      <p:sp>
+        <p:nvSpPr>
+          <p:cNvPr id="3" name="Rectangle 2"/>
           <p:cNvSpPr/>
           <p:nvPr/>
         </p:nvSpPr>
         <p:spPr>
           <a:xfrm>
-            <a:off x="1828800" y="1828800"/>
-            <a:ext cx="8229600" cy="1005840"/>
+            <a:off x="731520" y="1097280"/>
+            <a:ext cx="3657600" cy="27432"/>
           </a:xfrm>
           <a:prstGeom prst="rect">
             <a:avLst/>
           </a:prstGeom>
           <a:solidFill>
-            <a:srgbClr val="FAFAFA"/>
+            <a:srgbClr val="2A9D8F"/>
           </a:solidFill>
-          <a:ln w="25400">
-            <a:solidFill>
-              <a:srgbClr val="2E86C1"/>
-            </a:solidFill>
+          <a:ln>
+            <a:noFill/>
           </a:ln>
         </p:spPr>
         <p:style>
@@ -4363,40 +5884,199 @@
           <a:bodyPr rtlCol="0" anchor="ctr"/>
           <a:lstStyle/>
           <a:p>
+            <a:pPr algn="ctr"/>
+          </a:p>
+        </p:txBody>
+      </p:sp>
+      <p:sp>
+        <p:nvSpPr>
+          <p:cNvPr id="4" name="TextBox 3"/>
+          <p:cNvSpPr txBox="1"/>
+          <p:nvPr/>
+        </p:nvSpPr>
+        <p:spPr>
+          <a:xfrm>
+            <a:off x="1828800" y="1371600"/>
+            <a:ext cx="8229600" cy="5029200"/>
+          </a:xfrm>
+          <a:prstGeom prst="rect">
+            <a:avLst/>
+          </a:prstGeom>
+          <a:noFill/>
+        </p:spPr>
+        <p:txBody>
+          <a:bodyPr wrap="square">
+            <a:spAutoFit/>
+          </a:bodyPr>
+          <a:lstStyle/>
+          <a:p>
             <a:pPr algn="l">
-              <a:defRPr sz="1600" b="0">
-                <a:solidFill>
-                  <a:srgbClr val="2C3E50"/>
-                </a:solidFill>
+              <a:defRPr sz="1500" b="0">
+                <a:solidFill>
+                  <a:srgbClr val="FFFFFF"/>
+                </a:solidFill>
+                <a:latin typeface="Consolas"/>
               </a:defRPr>
             </a:pPr>
             <a:r>
-              <a:t>🌐 展示层：Gradio Web UI  ·  CLI 命令行  ·  Matplotlib 可视化</a:t>
-            </a:r>
-          </a:p>
-        </p:txBody>
-      </p:sp>
-      <p:sp>
-        <p:nvSpPr>
-          <p:cNvPr id="5" name="Rectangle 4"/>
+              <a:t>用户提问 (Web / CLI)</a:t>
+            </a:r>
+            <a:br/>
+            <a:r>
+              <a:t>       │</a:t>
+            </a:r>
+            <a:br/>
+            <a:r>
+              <a:t>       ▼</a:t>
+            </a:r>
+            <a:br/>
+            <a:r>
+              <a:t>┌─────────────────────────┐</a:t>
+            </a:r>
+            <a:br/>
+            <a:r>
+              <a:t>│   🎯 MedicalAgentRunner │  ◄── 统一调度入口</a:t>
+            </a:r>
+            <a:br/>
+            <a:r>
+              <a:t>└──┬──────────┬────────┬──┘</a:t>
+            </a:r>
+            <a:br/>
+            <a:r>
+              <a:t>   │          │        │</a:t>
+            </a:r>
+            <a:br/>
+            <a:r>
+              <a:t>   ▼          ▼        ▼</a:t>
+            </a:r>
+            <a:br/>
+            <a:r>
+              <a:t>┌──────┐ ┌─────┐ ┌──────┐</a:t>
+            </a:r>
+            <a:br/>
+            <a:r>
+              <a:t>│🔴RAG │ │🔵SFT│ │🟢HBD │</a:t>
+            </a:r>
+            <a:br/>
+            <a:r>
+              <a:t>│1.5B  │ │1.5B │ │1.5B  │</a:t>
+            </a:r>
+            <a:br/>
+            <a:r>
+              <a:t>│+检索 │ │微调 │ │+RAG  │</a:t>
+            </a:r>
+            <a:br/>
+            <a:r>
+              <a:t>└──┬───┘ └──┬──┘ └──┬───┘</a:t>
+            </a:r>
+            <a:br/>
+            <a:r>
+              <a:t>   │        │       │</a:t>
+            </a:r>
+            <a:br/>
+            <a:r>
+              <a:t>   ▼        ▼       ▼</a:t>
+            </a:r>
+            <a:br/>
+            <a:r>
+              <a:t>┌─────────────────────────┐</a:t>
+            </a:r>
+            <a:br/>
+            <a:r>
+              <a:t>│  📊 RAGAS 评测框架       │</a:t>
+            </a:r>
+            <a:br/>
+            <a:r>
+              <a:t>│ Faithfulness + Relevancy │</a:t>
+            </a:r>
+            <a:br/>
+            <a:r>
+              <a:t>└─────────────────────────┘</a:t>
+            </a:r>
+          </a:p>
+        </p:txBody>
+      </p:sp>
+    </p:spTree>
+  </p:cSld>
+  <p:clrMapOvr>
+    <a:masterClrMapping/>
+  </p:clrMapOvr>
+</p:sld>
+</file>
+
+<file path=ppt/slides/slide5.xml><?xml version="1.0" encoding="utf-8"?>
+<p:sld xmlns:a="http://schemas.openxmlformats.org/drawingml/2006/main" xmlns:p="http://schemas.openxmlformats.org/presentationml/2006/main" xmlns:r="http://schemas.openxmlformats.org/officeDocument/2006/relationships">
+  <p:cSld>
+    <p:bg>
+      <p:bgPr>
+        <a:solidFill>
+          <a:srgbClr val="1A5276"/>
+        </a:solidFill>
+        <a:effectLst/>
+      </p:bgPr>
+    </p:bg>
+    <p:spTree>
+      <p:nvGrpSpPr>
+        <p:cNvPr id="1" name=""/>
+        <p:cNvGrpSpPr/>
+        <p:nvPr/>
+      </p:nvGrpSpPr>
+      <p:grpSpPr/>
+      <p:sp>
+        <p:nvSpPr>
+          <p:cNvPr id="2" name="TextBox 1"/>
+          <p:cNvSpPr txBox="1"/>
+          <p:nvPr/>
+        </p:nvSpPr>
+        <p:spPr>
+          <a:xfrm>
+            <a:off x="731520" y="457200"/>
+            <a:ext cx="10698480" cy="914400"/>
+          </a:xfrm>
+          <a:prstGeom prst="rect">
+            <a:avLst/>
+          </a:prstGeom>
+          <a:noFill/>
+        </p:spPr>
+        <p:txBody>
+          <a:bodyPr wrap="square">
+            <a:spAutoFit/>
+          </a:bodyPr>
+          <a:lstStyle/>
+          <a:p>
+            <a:pPr algn="l">
+              <a:defRPr sz="3600" b="1">
+                <a:solidFill>
+                  <a:srgbClr val="FFFFFF"/>
+                </a:solidFill>
+                <a:latin typeface="Arial"/>
+              </a:defRPr>
+            </a:pPr>
+            <a:r>
+              <a:t>🔬 三管道对比设计</a:t>
+            </a:r>
+          </a:p>
+        </p:txBody>
+      </p:sp>
+      <p:sp>
+        <p:nvSpPr>
+          <p:cNvPr id="3" name="Rectangle 2"/>
           <p:cNvSpPr/>
           <p:nvPr/>
         </p:nvSpPr>
         <p:spPr>
           <a:xfrm>
-            <a:off x="1828800" y="3017520"/>
-            <a:ext cx="8229600" cy="1005840"/>
+            <a:off x="731520" y="1097280"/>
+            <a:ext cx="3657600" cy="27432"/>
           </a:xfrm>
           <a:prstGeom prst="rect">
             <a:avLst/>
           </a:prstGeom>
           <a:solidFill>
-            <a:srgbClr val="FAFAFA"/>
+            <a:srgbClr val="2A9D8F"/>
           </a:solidFill>
-          <a:ln w="25400">
-            <a:solidFill>
-              <a:srgbClr val="27AE60"/>
-            </a:solidFill>
+          <a:ln>
+            <a:noFill/>
           </a:ln>
         </p:spPr>
         <p:style>
@@ -4417,40 +6097,802 @@
           <a:bodyPr rtlCol="0" anchor="ctr"/>
           <a:lstStyle/>
           <a:p>
+            <a:pPr algn="ctr"/>
+          </a:p>
+        </p:txBody>
+      </p:sp>
+      <p:graphicFrame>
+        <p:nvGraphicFramePr>
+          <p:cNvPr id="4" name="Table 3"/>
+          <p:cNvGraphicFramePr>
+            <a:graphicFrameLocks noGrp="1"/>
+          </p:cNvGraphicFramePr>
+          <p:nvPr/>
+        </p:nvGraphicFramePr>
+        <p:xfrm>
+          <a:off x="731520" y="1371600"/>
+          <a:ext cx="10698480" cy="3200400"/>
+        </p:xfrm>
+        <a:graphic>
+          <a:graphicData uri="http://schemas.openxmlformats.org/drawingml/2006/table">
+            <a:tbl>
+              <a:tblPr firstRow="1" bandRow="1">
+                <a:tableStyleId>{5C22544A-7EE6-4342-B048-85BDC9FD1C3A}</a:tableStyleId>
+              </a:tblPr>
+              <a:tblGrid>
+                <a:gridCol w="2674620"/>
+                <a:gridCol w="2674620"/>
+                <a:gridCol w="2674620"/>
+                <a:gridCol w="2674620"/>
+              </a:tblGrid>
+              <a:tr h="457200">
+                <a:tc>
+                  <a:txBody>
+                    <a:bodyPr/>
+                    <a:lstStyle/>
+                    <a:p>
+                      <a:pPr>
+                        <a:defRPr sz="1600" b="1">
+                          <a:solidFill>
+                            <a:srgbClr val="FFFFFF"/>
+                          </a:solidFill>
+                          <a:latin typeface="Arial"/>
+                        </a:defRPr>
+                      </a:pPr>
+                    </a:p>
+                  </a:txBody>
+                  <a:tcPr>
+                    <a:solidFill>
+                      <a:srgbClr val="2E86C1"/>
+                    </a:solidFill>
+                  </a:tcPr>
+                </a:tc>
+                <a:tc>
+                  <a:txBody>
+                    <a:bodyPr/>
+                    <a:lstStyle/>
+                    <a:p>
+                      <a:pPr>
+                        <a:defRPr sz="1600" b="1">
+                          <a:solidFill>
+                            <a:srgbClr val="FFFFFF"/>
+                          </a:solidFill>
+                          <a:latin typeface="Arial"/>
+                        </a:defRPr>
+                      </a:pPr>
+                      <a:r>
+                        <a:t>🔴 Pure RAG</a:t>
+                      </a:r>
+                    </a:p>
+                  </a:txBody>
+                  <a:tcPr>
+                    <a:solidFill>
+                      <a:srgbClr val="2E86C1"/>
+                    </a:solidFill>
+                  </a:tcPr>
+                </a:tc>
+                <a:tc>
+                  <a:txBody>
+                    <a:bodyPr/>
+                    <a:lstStyle/>
+                    <a:p>
+                      <a:pPr>
+                        <a:defRPr sz="1600" b="1">
+                          <a:solidFill>
+                            <a:srgbClr val="FFFFFF"/>
+                          </a:solidFill>
+                          <a:latin typeface="Arial"/>
+                        </a:defRPr>
+                      </a:pPr>
+                      <a:r>
+                        <a:t>🔵 Pure SFT</a:t>
+                      </a:r>
+                    </a:p>
+                  </a:txBody>
+                  <a:tcPr>
+                    <a:solidFill>
+                      <a:srgbClr val="2E86C1"/>
+                    </a:solidFill>
+                  </a:tcPr>
+                </a:tc>
+                <a:tc>
+                  <a:txBody>
+                    <a:bodyPr/>
+                    <a:lstStyle/>
+                    <a:p>
+                      <a:pPr>
+                        <a:defRPr sz="1600" b="1">
+                          <a:solidFill>
+                            <a:srgbClr val="FFFFFF"/>
+                          </a:solidFill>
+                          <a:latin typeface="Arial"/>
+                        </a:defRPr>
+                      </a:pPr>
+                      <a:r>
+                        <a:t>🟢 Hybrid Agent</a:t>
+                      </a:r>
+                    </a:p>
+                  </a:txBody>
+                  <a:tcPr>
+                    <a:solidFill>
+                      <a:srgbClr val="2E86C1"/>
+                    </a:solidFill>
+                  </a:tcPr>
+                </a:tc>
+              </a:tr>
+              <a:tr h="457200">
+                <a:tc>
+                  <a:txBody>
+                    <a:bodyPr/>
+                    <a:lstStyle/>
+                    <a:p>
+                      <a:pPr>
+                        <a:defRPr sz="1500">
+                          <a:solidFill>
+                            <a:srgbClr val="2C3E50"/>
+                          </a:solidFill>
+                          <a:latin typeface="Arial"/>
+                        </a:defRPr>
+                      </a:pPr>
+                      <a:r>
+                        <a:t>模型</a:t>
+                      </a:r>
+                    </a:p>
+                  </a:txBody>
+                  <a:tcPr>
+                    <a:solidFill>
+                      <a:srgbClr val="F2F7FA"/>
+                    </a:solidFill>
+                  </a:tcPr>
+                </a:tc>
+                <a:tc>
+                  <a:txBody>
+                    <a:bodyPr/>
+                    <a:lstStyle/>
+                    <a:p>
+                      <a:pPr>
+                        <a:defRPr sz="1500">
+                          <a:solidFill>
+                            <a:srgbClr val="2C3E50"/>
+                          </a:solidFill>
+                          <a:latin typeface="Arial"/>
+                        </a:defRPr>
+                      </a:pPr>
+                      <a:r>
+                        <a:t>1.5B base</a:t>
+                      </a:r>
+                    </a:p>
+                  </a:txBody>
+                  <a:tcPr>
+                    <a:solidFill>
+                      <a:srgbClr val="F2F7FA"/>
+                    </a:solidFill>
+                  </a:tcPr>
+                </a:tc>
+                <a:tc>
+                  <a:txBody>
+                    <a:bodyPr/>
+                    <a:lstStyle/>
+                    <a:p>
+                      <a:pPr>
+                        <a:defRPr sz="1500">
+                          <a:solidFill>
+                            <a:srgbClr val="2C3E50"/>
+                          </a:solidFill>
+                          <a:latin typeface="Arial"/>
+                        </a:defRPr>
+                      </a:pPr>
+                      <a:r>
+                        <a:t>1.5B QLoRA</a:t>
+                      </a:r>
+                    </a:p>
+                  </a:txBody>
+                  <a:tcPr>
+                    <a:solidFill>
+                      <a:srgbClr val="F2F7FA"/>
+                    </a:solidFill>
+                  </a:tcPr>
+                </a:tc>
+                <a:tc>
+                  <a:txBody>
+                    <a:bodyPr/>
+                    <a:lstStyle/>
+                    <a:p>
+                      <a:pPr>
+                        <a:defRPr sz="1500">
+                          <a:solidFill>
+                            <a:srgbClr val="2C3E50"/>
+                          </a:solidFill>
+                          <a:latin typeface="Arial"/>
+                        </a:defRPr>
+                      </a:pPr>
+                      <a:r>
+                        <a:t>1.5B QLoRA</a:t>
+                      </a:r>
+                    </a:p>
+                  </a:txBody>
+                  <a:tcPr>
+                    <a:solidFill>
+                      <a:srgbClr val="F2F7FA"/>
+                    </a:solidFill>
+                  </a:tcPr>
+                </a:tc>
+              </a:tr>
+              <a:tr h="457200">
+                <a:tc>
+                  <a:txBody>
+                    <a:bodyPr/>
+                    <a:lstStyle/>
+                    <a:p>
+                      <a:pPr>
+                        <a:defRPr sz="1500">
+                          <a:solidFill>
+                            <a:srgbClr val="2C3E50"/>
+                          </a:solidFill>
+                          <a:latin typeface="Arial"/>
+                        </a:defRPr>
+                      </a:pPr>
+                      <a:r>
+                        <a:t>知识</a:t>
+                      </a:r>
+                    </a:p>
+                  </a:txBody>
+                  <a:tcPr>
+                    <a:solidFill>
+                      <a:srgbClr val="FFFFFF"/>
+                    </a:solidFill>
+                  </a:tcPr>
+                </a:tc>
+                <a:tc>
+                  <a:txBody>
+                    <a:bodyPr/>
+                    <a:lstStyle/>
+                    <a:p>
+                      <a:pPr>
+                        <a:defRPr sz="1500">
+                          <a:solidFill>
+                            <a:srgbClr val="2C3E50"/>
+                          </a:solidFill>
+                          <a:latin typeface="Arial"/>
+                        </a:defRPr>
+                      </a:pPr>
+                      <a:r>
+                        <a:t>FAISS 检索</a:t>
+                      </a:r>
+                    </a:p>
+                  </a:txBody>
+                  <a:tcPr>
+                    <a:solidFill>
+                      <a:srgbClr val="FFFFFF"/>
+                    </a:solidFill>
+                  </a:tcPr>
+                </a:tc>
+                <a:tc>
+                  <a:txBody>
+                    <a:bodyPr/>
+                    <a:lstStyle/>
+                    <a:p>
+                      <a:pPr>
+                        <a:defRPr sz="1500">
+                          <a:solidFill>
+                            <a:srgbClr val="2C3E50"/>
+                          </a:solidFill>
+                          <a:latin typeface="Arial"/>
+                        </a:defRPr>
+                      </a:pPr>
+                      <a:r>
+                        <a:t>模型权重</a:t>
+                      </a:r>
+                    </a:p>
+                  </a:txBody>
+                  <a:tcPr>
+                    <a:solidFill>
+                      <a:srgbClr val="FFFFFF"/>
+                    </a:solidFill>
+                  </a:tcPr>
+                </a:tc>
+                <a:tc>
+                  <a:txBody>
+                    <a:bodyPr/>
+                    <a:lstStyle/>
+                    <a:p>
+                      <a:pPr>
+                        <a:defRPr sz="1500">
+                          <a:solidFill>
+                            <a:srgbClr val="2C3E50"/>
+                          </a:solidFill>
+                          <a:latin typeface="Arial"/>
+                        </a:defRPr>
+                      </a:pPr>
+                      <a:r>
+                        <a:t>权重 + 检索</a:t>
+                      </a:r>
+                    </a:p>
+                  </a:txBody>
+                  <a:tcPr>
+                    <a:solidFill>
+                      <a:srgbClr val="FFFFFF"/>
+                    </a:solidFill>
+                  </a:tcPr>
+                </a:tc>
+              </a:tr>
+              <a:tr h="457200">
+                <a:tc>
+                  <a:txBody>
+                    <a:bodyPr/>
+                    <a:lstStyle/>
+                    <a:p>
+                      <a:pPr>
+                        <a:defRPr sz="1500">
+                          <a:solidFill>
+                            <a:srgbClr val="2C3E50"/>
+                          </a:solidFill>
+                          <a:latin typeface="Arial"/>
+                        </a:defRPr>
+                      </a:pPr>
+                      <a:r>
+                        <a:t>Agent</a:t>
+                      </a:r>
+                    </a:p>
+                  </a:txBody>
+                  <a:tcPr>
+                    <a:solidFill>
+                      <a:srgbClr val="F2F7FA"/>
+                    </a:solidFill>
+                  </a:tcPr>
+                </a:tc>
+                <a:tc>
+                  <a:txBody>
+                    <a:bodyPr/>
+                    <a:lstStyle/>
+                    <a:p>
+                      <a:pPr>
+                        <a:defRPr sz="1500">
+                          <a:solidFill>
+                            <a:srgbClr val="2C3E50"/>
+                          </a:solidFill>
+                          <a:latin typeface="Arial"/>
+                        </a:defRPr>
+                      </a:pPr>
+                      <a:r>
+                        <a:t>固定工作流</a:t>
+                      </a:r>
+                    </a:p>
+                  </a:txBody>
+                  <a:tcPr>
+                    <a:solidFill>
+                      <a:srgbClr val="F2F7FA"/>
+                    </a:solidFill>
+                  </a:tcPr>
+                </a:tc>
+                <a:tc>
+                  <a:txBody>
+                    <a:bodyPr/>
+                    <a:lstStyle/>
+                    <a:p>
+                      <a:pPr>
+                        <a:defRPr sz="1500">
+                          <a:solidFill>
+                            <a:srgbClr val="2C3E50"/>
+                          </a:solidFill>
+                          <a:latin typeface="Arial"/>
+                        </a:defRPr>
+                      </a:pPr>
+                      <a:r>
+                        <a:t>直接推理</a:t>
+                      </a:r>
+                    </a:p>
+                  </a:txBody>
+                  <a:tcPr>
+                    <a:solidFill>
+                      <a:srgbClr val="F2F7FA"/>
+                    </a:solidFill>
+                  </a:tcPr>
+                </a:tc>
+                <a:tc>
+                  <a:txBody>
+                    <a:bodyPr/>
+                    <a:lstStyle/>
+                    <a:p>
+                      <a:pPr>
+                        <a:defRPr sz="1500">
+                          <a:solidFill>
+                            <a:srgbClr val="2C3E50"/>
+                          </a:solidFill>
+                          <a:latin typeface="Arial"/>
+                        </a:defRPr>
+                      </a:pPr>
+                      <a:r>
+                        <a:t>CodeAgent 编排</a:t>
+                      </a:r>
+                    </a:p>
+                  </a:txBody>
+                  <a:tcPr>
+                    <a:solidFill>
+                      <a:srgbClr val="F2F7FA"/>
+                    </a:solidFill>
+                  </a:tcPr>
+                </a:tc>
+              </a:tr>
+              <a:tr h="457200">
+                <a:tc>
+                  <a:txBody>
+                    <a:bodyPr/>
+                    <a:lstStyle/>
+                    <a:p>
+                      <a:pPr>
+                        <a:defRPr sz="1500">
+                          <a:solidFill>
+                            <a:srgbClr val="2C3E50"/>
+                          </a:solidFill>
+                          <a:latin typeface="Arial"/>
+                        </a:defRPr>
+                      </a:pPr>
+                      <a:r>
+                        <a:t>显存</a:t>
+                      </a:r>
+                    </a:p>
+                  </a:txBody>
+                  <a:tcPr>
+                    <a:solidFill>
+                      <a:srgbClr val="FFFFFF"/>
+                    </a:solidFill>
+                  </a:tcPr>
+                </a:tc>
+                <a:tc>
+                  <a:txBody>
+                    <a:bodyPr/>
+                    <a:lstStyle/>
+                    <a:p>
+                      <a:pPr>
+                        <a:defRPr sz="1500">
+                          <a:solidFill>
+                            <a:srgbClr val="2C3E50"/>
+                          </a:solidFill>
+                          <a:latin typeface="Arial"/>
+                        </a:defRPr>
+                      </a:pPr>
+                      <a:r>
+                        <a:t>~4 GB</a:t>
+                      </a:r>
+                    </a:p>
+                  </a:txBody>
+                  <a:tcPr>
+                    <a:solidFill>
+                      <a:srgbClr val="FFFFFF"/>
+                    </a:solidFill>
+                  </a:tcPr>
+                </a:tc>
+                <a:tc>
+                  <a:txBody>
+                    <a:bodyPr/>
+                    <a:lstStyle/>
+                    <a:p>
+                      <a:pPr>
+                        <a:defRPr sz="1500">
+                          <a:solidFill>
+                            <a:srgbClr val="2C3E50"/>
+                          </a:solidFill>
+                          <a:latin typeface="Arial"/>
+                        </a:defRPr>
+                      </a:pPr>
+                      <a:r>
+                        <a:t>~2 GB</a:t>
+                      </a:r>
+                    </a:p>
+                  </a:txBody>
+                  <a:tcPr>
+                    <a:solidFill>
+                      <a:srgbClr val="FFFFFF"/>
+                    </a:solidFill>
+                  </a:tcPr>
+                </a:tc>
+                <a:tc>
+                  <a:txBody>
+                    <a:bodyPr/>
+                    <a:lstStyle/>
+                    <a:p>
+                      <a:pPr>
+                        <a:defRPr sz="1500">
+                          <a:solidFill>
+                            <a:srgbClr val="2C3E50"/>
+                          </a:solidFill>
+                          <a:latin typeface="Arial"/>
+                        </a:defRPr>
+                      </a:pPr>
+                      <a:r>
+                        <a:t>~4 GB</a:t>
+                      </a:r>
+                    </a:p>
+                  </a:txBody>
+                  <a:tcPr>
+                    <a:solidFill>
+                      <a:srgbClr val="FFFFFF"/>
+                    </a:solidFill>
+                  </a:tcPr>
+                </a:tc>
+              </a:tr>
+              <a:tr h="457200">
+                <a:tc>
+                  <a:txBody>
+                    <a:bodyPr/>
+                    <a:lstStyle/>
+                    <a:p>
+                      <a:pPr>
+                        <a:defRPr sz="1500">
+                          <a:solidFill>
+                            <a:srgbClr val="2C3E50"/>
+                          </a:solidFill>
+                          <a:latin typeface="Arial"/>
+                        </a:defRPr>
+                      </a:pPr>
+                      <a:r>
+                        <a:t>速度</a:t>
+                      </a:r>
+                    </a:p>
+                  </a:txBody>
+                  <a:tcPr>
+                    <a:solidFill>
+                      <a:srgbClr val="F2F7FA"/>
+                    </a:solidFill>
+                  </a:tcPr>
+                </a:tc>
+                <a:tc>
+                  <a:txBody>
+                    <a:bodyPr/>
+                    <a:lstStyle/>
+                    <a:p>
+                      <a:pPr>
+                        <a:defRPr sz="1500">
+                          <a:solidFill>
+                            <a:srgbClr val="2C3E50"/>
+                          </a:solidFill>
+                          <a:latin typeface="Arial"/>
+                        </a:defRPr>
+                      </a:pPr>
+                      <a:r>
+                        <a:t>0.5s</a:t>
+                      </a:r>
+                    </a:p>
+                  </a:txBody>
+                  <a:tcPr>
+                    <a:solidFill>
+                      <a:srgbClr val="F2F7FA"/>
+                    </a:solidFill>
+                  </a:tcPr>
+                </a:tc>
+                <a:tc>
+                  <a:txBody>
+                    <a:bodyPr/>
+                    <a:lstStyle/>
+                    <a:p>
+                      <a:pPr>
+                        <a:defRPr sz="1500">
+                          <a:solidFill>
+                            <a:srgbClr val="2C3E50"/>
+                          </a:solidFill>
+                          <a:latin typeface="Arial"/>
+                        </a:defRPr>
+                      </a:pPr>
+                      <a:r>
+                        <a:t>⚡ 0.15s</a:t>
+                      </a:r>
+                    </a:p>
+                  </a:txBody>
+                  <a:tcPr>
+                    <a:solidFill>
+                      <a:srgbClr val="F2F7FA"/>
+                    </a:solidFill>
+                  </a:tcPr>
+                </a:tc>
+                <a:tc>
+                  <a:txBody>
+                    <a:bodyPr/>
+                    <a:lstStyle/>
+                    <a:p>
+                      <a:pPr>
+                        <a:defRPr sz="1500">
+                          <a:solidFill>
+                            <a:srgbClr val="2C3E50"/>
+                          </a:solidFill>
+                          <a:latin typeface="Arial"/>
+                        </a:defRPr>
+                      </a:pPr>
+                      <a:r>
+                        <a:t>0.8s</a:t>
+                      </a:r>
+                    </a:p>
+                  </a:txBody>
+                  <a:tcPr>
+                    <a:solidFill>
+                      <a:srgbClr val="F2F7FA"/>
+                    </a:solidFill>
+                  </a:tcPr>
+                </a:tc>
+              </a:tr>
+              <a:tr h="457200">
+                <a:tc>
+                  <a:txBody>
+                    <a:bodyPr/>
+                    <a:lstStyle/>
+                    <a:p>
+                      <a:pPr>
+                        <a:defRPr sz="1500">
+                          <a:solidFill>
+                            <a:srgbClr val="2C3E50"/>
+                          </a:solidFill>
+                          <a:latin typeface="Arial"/>
+                        </a:defRPr>
+                      </a:pPr>
+                      <a:r>
+                        <a:t>比喻</a:t>
+                      </a:r>
+                    </a:p>
+                  </a:txBody>
+                  <a:tcPr>
+                    <a:solidFill>
+                      <a:srgbClr val="FFFFFF"/>
+                    </a:solidFill>
+                  </a:tcPr>
+                </a:tc>
+                <a:tc>
+                  <a:txBody>
+                    <a:bodyPr/>
+                    <a:lstStyle/>
+                    <a:p>
+                      <a:pPr>
+                        <a:defRPr sz="1500">
+                          <a:solidFill>
+                            <a:srgbClr val="2C3E50"/>
+                          </a:solidFill>
+                          <a:latin typeface="Arial"/>
+                        </a:defRPr>
+                      </a:pPr>
+                      <a:r>
+                        <a:t>开卷考</a:t>
+                      </a:r>
+                    </a:p>
+                  </a:txBody>
+                  <a:tcPr>
+                    <a:solidFill>
+                      <a:srgbClr val="FFFFFF"/>
+                    </a:solidFill>
+                  </a:tcPr>
+                </a:tc>
+                <a:tc>
+                  <a:txBody>
+                    <a:bodyPr/>
+                    <a:lstStyle/>
+                    <a:p>
+                      <a:pPr>
+                        <a:defRPr sz="1500">
+                          <a:solidFill>
+                            <a:srgbClr val="2C3E50"/>
+                          </a:solidFill>
+                          <a:latin typeface="Arial"/>
+                        </a:defRPr>
+                      </a:pPr>
+                      <a:r>
+                        <a:t>闭卷考</a:t>
+                      </a:r>
+                    </a:p>
+                  </a:txBody>
+                  <a:tcPr>
+                    <a:solidFill>
+                      <a:srgbClr val="FFFFFF"/>
+                    </a:solidFill>
+                  </a:tcPr>
+                </a:tc>
+                <a:tc>
+                  <a:txBody>
+                    <a:bodyPr/>
+                    <a:lstStyle/>
+                    <a:p>
+                      <a:pPr>
+                        <a:defRPr sz="1500">
+                          <a:solidFill>
+                            <a:srgbClr val="2C3E50"/>
+                          </a:solidFill>
+                          <a:latin typeface="Arial"/>
+                        </a:defRPr>
+                      </a:pPr>
+                      <a:r>
+                        <a:t>查小抄</a:t>
+                      </a:r>
+                    </a:p>
+                  </a:txBody>
+                  <a:tcPr>
+                    <a:solidFill>
+                      <a:srgbClr val="FFFFFF"/>
+                    </a:solidFill>
+                  </a:tcPr>
+                </a:tc>
+              </a:tr>
+            </a:tbl>
+          </a:graphicData>
+        </a:graphic>
+      </p:graphicFrame>
+    </p:spTree>
+  </p:cSld>
+  <p:clrMapOvr>
+    <a:masterClrMapping/>
+  </p:clrMapOvr>
+</p:sld>
+</file>
+
+<file path=ppt/slides/slide6.xml><?xml version="1.0" encoding="utf-8"?>
+<p:sld xmlns:a="http://schemas.openxmlformats.org/drawingml/2006/main" xmlns:p="http://schemas.openxmlformats.org/presentationml/2006/main" xmlns:r="http://schemas.openxmlformats.org/officeDocument/2006/relationships">
+  <p:cSld>
+    <p:bg>
+      <p:bgPr>
+        <a:solidFill>
+          <a:srgbClr val="1A5276"/>
+        </a:solidFill>
+        <a:effectLst/>
+      </p:bgPr>
+    </p:bg>
+    <p:spTree>
+      <p:nvGrpSpPr>
+        <p:cNvPr id="1" name=""/>
+        <p:cNvGrpSpPr/>
+        <p:nvPr/>
+      </p:nvGrpSpPr>
+      <p:grpSpPr/>
+      <p:sp>
+        <p:nvSpPr>
+          <p:cNvPr id="2" name="TextBox 1"/>
+          <p:cNvSpPr txBox="1"/>
+          <p:nvPr/>
+        </p:nvSpPr>
+        <p:spPr>
+          <a:xfrm>
+            <a:off x="731520" y="457200"/>
+            <a:ext cx="10698480" cy="914400"/>
+          </a:xfrm>
+          <a:prstGeom prst="rect">
+            <a:avLst/>
+          </a:prstGeom>
+          <a:noFill/>
+        </p:spPr>
+        <p:txBody>
+          <a:bodyPr wrap="square">
+            <a:spAutoFit/>
+          </a:bodyPr>
+          <a:lstStyle/>
+          <a:p>
             <a:pPr algn="l">
-              <a:defRPr sz="1600" b="0">
-                <a:solidFill>
-                  <a:srgbClr val="2C3E50"/>
-                </a:solidFill>
+              <a:defRPr sz="3600" b="1">
+                <a:solidFill>
+                  <a:srgbClr val="FFFFFF"/>
+                </a:solidFill>
+                <a:latin typeface="Arial"/>
               </a:defRPr>
             </a:pPr>
             <a:r>
-              <a:t>⚙️ Agent 编排层：MedicalAgentRunner 调度器  ·  三管道 Pipeline  ·  RAGAS 评测引擎</a:t>
-            </a:r>
-          </a:p>
-        </p:txBody>
-      </p:sp>
-      <p:sp>
-        <p:nvSpPr>
-          <p:cNvPr id="6" name="Rectangle 5"/>
+              <a:t>📦 成员 A — RAG 知识检索库</a:t>
+            </a:r>
+          </a:p>
+        </p:txBody>
+      </p:sp>
+      <p:sp>
+        <p:nvSpPr>
+          <p:cNvPr id="3" name="Rectangle 2"/>
           <p:cNvSpPr/>
           <p:nvPr/>
         </p:nvSpPr>
         <p:spPr>
           <a:xfrm>
-            <a:off x="1828800" y="4206240"/>
-            <a:ext cx="8229600" cy="1005840"/>
+            <a:off x="731520" y="1097280"/>
+            <a:ext cx="3657600" cy="27432"/>
           </a:xfrm>
           <a:prstGeom prst="rect">
             <a:avLst/>
           </a:prstGeom>
           <a:solidFill>
-            <a:srgbClr val="FAFAFA"/>
+            <a:srgbClr val="2A9D8F"/>
           </a:solidFill>
-          <a:ln w="25400">
-            <a:solidFill>
-              <a:srgbClr val="E67E22"/>
-            </a:solidFill>
+          <a:ln>
+            <a:noFill/>
           </a:ln>
         </p:spPr>
         <p:style>
@@ -4471,40 +6913,307 @@
           <a:bodyPr rtlCol="0" anchor="ctr"/>
           <a:lstStyle/>
           <a:p>
+            <a:pPr algn="ctr"/>
+          </a:p>
+        </p:txBody>
+      </p:sp>
+      <p:sp>
+        <p:nvSpPr>
+          <p:cNvPr id="4" name="TextBox 3"/>
+          <p:cNvSpPr txBox="1"/>
+          <p:nvPr/>
+        </p:nvSpPr>
+        <p:spPr>
+          <a:xfrm>
+            <a:off x="1097280" y="1463040"/>
+            <a:ext cx="10058400" cy="548640"/>
+          </a:xfrm>
+          <a:prstGeom prst="rect">
+            <a:avLst/>
+          </a:prstGeom>
+          <a:noFill/>
+        </p:spPr>
+        <p:txBody>
+          <a:bodyPr wrap="square">
+            <a:spAutoFit/>
+          </a:bodyPr>
+          <a:lstStyle/>
+          <a:p>
             <a:pPr algn="l">
-              <a:defRPr sz="1600" b="0">
-                <a:solidFill>
-                  <a:srgbClr val="2C3E50"/>
-                </a:solidFill>
+              <a:defRPr sz="2000" b="0">
+                <a:solidFill>
+                  <a:srgbClr val="FFFFFF"/>
+                </a:solidFill>
+                <a:latin typeface="Arial"/>
               </a:defRPr>
             </a:pPr>
             <a:r>
-              <a:t>🔧 工具层：MedicalRAGTool 检索工具  ·  MedicalModelTool 推理工具</a:t>
-            </a:r>
-          </a:p>
-        </p:txBody>
-      </p:sp>
-      <p:sp>
-        <p:nvSpPr>
-          <p:cNvPr id="7" name="Rectangle 6"/>
+              <a:t>▸ 语料规模: 78,136 条医疗 QA 对（6 大医学领域）</a:t>
+            </a:r>
+          </a:p>
+        </p:txBody>
+      </p:sp>
+      <p:sp>
+        <p:nvSpPr>
+          <p:cNvPr id="5" name="TextBox 4"/>
+          <p:cNvSpPr txBox="1"/>
+          <p:nvPr/>
+        </p:nvSpPr>
+        <p:spPr>
+          <a:xfrm>
+            <a:off x="1097280" y="2103120"/>
+            <a:ext cx="10058400" cy="548640"/>
+          </a:xfrm>
+          <a:prstGeom prst="rect">
+            <a:avLst/>
+          </a:prstGeom>
+          <a:noFill/>
+        </p:spPr>
+        <p:txBody>
+          <a:bodyPr wrap="square">
+            <a:spAutoFit/>
+          </a:bodyPr>
+          <a:lstStyle/>
+          <a:p>
+            <a:pPr algn="l">
+              <a:defRPr sz="2000" b="0">
+                <a:solidFill>
+                  <a:srgbClr val="FFFFFF"/>
+                </a:solidFill>
+                <a:latin typeface="Arial"/>
+              </a:defRPr>
+            </a:pPr>
+            <a:r>
+              <a:t>▸ 嵌入模型: BAAI/bge-m3（1024 维多语言向量）</a:t>
+            </a:r>
+          </a:p>
+        </p:txBody>
+      </p:sp>
+      <p:sp>
+        <p:nvSpPr>
+          <p:cNvPr id="6" name="TextBox 5"/>
+          <p:cNvSpPr txBox="1"/>
+          <p:nvPr/>
+        </p:nvSpPr>
+        <p:spPr>
+          <a:xfrm>
+            <a:off x="1097280" y="2743200"/>
+            <a:ext cx="10058400" cy="548640"/>
+          </a:xfrm>
+          <a:prstGeom prst="rect">
+            <a:avLst/>
+          </a:prstGeom>
+          <a:noFill/>
+        </p:spPr>
+        <p:txBody>
+          <a:bodyPr wrap="square">
+            <a:spAutoFit/>
+          </a:bodyPr>
+          <a:lstStyle/>
+          <a:p>
+            <a:pPr algn="l">
+              <a:defRPr sz="2000" b="0">
+                <a:solidFill>
+                  <a:srgbClr val="FFFFFF"/>
+                </a:solidFill>
+                <a:latin typeface="Arial"/>
+              </a:defRPr>
+            </a:pPr>
+            <a:r>
+              <a:t>▸ 索引算法: FAISS IVF-Flat（近似最近邻搜索，&lt; 1s）</a:t>
+            </a:r>
+          </a:p>
+        </p:txBody>
+      </p:sp>
+      <p:sp>
+        <p:nvSpPr>
+          <p:cNvPr id="7" name="TextBox 6"/>
+          <p:cNvSpPr txBox="1"/>
+          <p:nvPr/>
+        </p:nvSpPr>
+        <p:spPr>
+          <a:xfrm>
+            <a:off x="1097280" y="3383279"/>
+            <a:ext cx="10058400" cy="548640"/>
+          </a:xfrm>
+          <a:prstGeom prst="rect">
+            <a:avLst/>
+          </a:prstGeom>
+          <a:noFill/>
+        </p:spPr>
+        <p:txBody>
+          <a:bodyPr wrap="square">
+            <a:spAutoFit/>
+          </a:bodyPr>
+          <a:lstStyle/>
+          <a:p>
+            <a:pPr algn="l">
+              <a:defRPr sz="2000" b="0">
+                <a:solidFill>
+                  <a:srgbClr val="FFFFFF"/>
+                </a:solidFill>
+                <a:latin typeface="Arial"/>
+              </a:defRPr>
+            </a:pPr>
+            <a:r>
+              <a:t>▸ 最优参数 — chunk_size=512, overlap=50, top_k=3</a:t>
+            </a:r>
+          </a:p>
+        </p:txBody>
+      </p:sp>
+      <p:sp>
+        <p:nvSpPr>
+          <p:cNvPr id="8" name="TextBox 7"/>
+          <p:cNvSpPr txBox="1"/>
+          <p:nvPr/>
+        </p:nvSpPr>
+        <p:spPr>
+          <a:xfrm>
+            <a:off x="1097280" y="4023360"/>
+            <a:ext cx="10058400" cy="548640"/>
+          </a:xfrm>
+          <a:prstGeom prst="rect">
+            <a:avLst/>
+          </a:prstGeom>
+          <a:noFill/>
+        </p:spPr>
+        <p:txBody>
+          <a:bodyPr wrap="square">
+            <a:spAutoFit/>
+          </a:bodyPr>
+          <a:lstStyle/>
+          <a:p>
+            <a:pPr algn="l">
+              <a:defRPr sz="2000" b="0">
+                <a:solidFill>
+                  <a:srgbClr val="FFFFFF"/>
+                </a:solidFill>
+                <a:latin typeface="Arial"/>
+              </a:defRPr>
+            </a:pPr>
+            <a:r>
+              <a:t>▸ 消融实验 F1 = 0.8628 | Hit Rate = 100%</a:t>
+            </a:r>
+          </a:p>
+        </p:txBody>
+      </p:sp>
+      <p:sp>
+        <p:nvSpPr>
+          <p:cNvPr id="9" name="TextBox 8"/>
+          <p:cNvSpPr txBox="1"/>
+          <p:nvPr/>
+        </p:nvSpPr>
+        <p:spPr>
+          <a:xfrm>
+            <a:off x="1097280" y="4663440"/>
+            <a:ext cx="10058400" cy="548640"/>
+          </a:xfrm>
+          <a:prstGeom prst="rect">
+            <a:avLst/>
+          </a:prstGeom>
+          <a:noFill/>
+        </p:spPr>
+        <p:txBody>
+          <a:bodyPr wrap="square">
+            <a:spAutoFit/>
+          </a:bodyPr>
+          <a:lstStyle/>
+          <a:p>
+            <a:pPr algn="l">
+              <a:defRPr sz="2000" b="0">
+                <a:solidFill>
+                  <a:srgbClr val="FFFFFF"/>
+                </a:solidFill>
+                <a:latin typeface="Arial"/>
+              </a:defRPr>
+            </a:pPr>
+            <a:r>
+              <a:t>▸ 涵盖: 基础心脏病学 · 跨模态ECG · 复杂疾病 · 风险评估 · 临床对话</a:t>
+            </a:r>
+          </a:p>
+        </p:txBody>
+      </p:sp>
+    </p:spTree>
+  </p:cSld>
+  <p:clrMapOvr>
+    <a:masterClrMapping/>
+  </p:clrMapOvr>
+</p:sld>
+</file>
+
+<file path=ppt/slides/slide7.xml><?xml version="1.0" encoding="utf-8"?>
+<p:sld xmlns:a="http://schemas.openxmlformats.org/drawingml/2006/main" xmlns:p="http://schemas.openxmlformats.org/presentationml/2006/main" xmlns:r="http://schemas.openxmlformats.org/officeDocument/2006/relationships">
+  <p:cSld>
+    <p:bg>
+      <p:bgPr>
+        <a:solidFill>
+          <a:srgbClr val="1A5276"/>
+        </a:solidFill>
+        <a:effectLst/>
+      </p:bgPr>
+    </p:bg>
+    <p:spTree>
+      <p:nvGrpSpPr>
+        <p:cNvPr id="1" name=""/>
+        <p:cNvGrpSpPr/>
+        <p:nvPr/>
+      </p:nvGrpSpPr>
+      <p:grpSpPr/>
+      <p:sp>
+        <p:nvSpPr>
+          <p:cNvPr id="2" name="TextBox 1"/>
+          <p:cNvSpPr txBox="1"/>
+          <p:nvPr/>
+        </p:nvSpPr>
+        <p:spPr>
+          <a:xfrm>
+            <a:off x="731520" y="457200"/>
+            <a:ext cx="10698480" cy="914400"/>
+          </a:xfrm>
+          <a:prstGeom prst="rect">
+            <a:avLst/>
+          </a:prstGeom>
+          <a:noFill/>
+        </p:spPr>
+        <p:txBody>
+          <a:bodyPr wrap="square">
+            <a:spAutoFit/>
+          </a:bodyPr>
+          <a:lstStyle/>
+          <a:p>
+            <a:pPr algn="l">
+              <a:defRPr sz="3600" b="1">
+                <a:solidFill>
+                  <a:srgbClr val="FFFFFF"/>
+                </a:solidFill>
+                <a:latin typeface="Arial"/>
+              </a:defRPr>
+            </a:pPr>
+            <a:r>
+              <a:t>🧪 成员 B — QLoRA 微调</a:t>
+            </a:r>
+          </a:p>
+        </p:txBody>
+      </p:sp>
+      <p:sp>
+        <p:nvSpPr>
+          <p:cNvPr id="3" name="Rectangle 2"/>
           <p:cNvSpPr/>
           <p:nvPr/>
         </p:nvSpPr>
         <p:spPr>
           <a:xfrm>
-            <a:off x="1828800" y="5394960"/>
-            <a:ext cx="8229600" cy="1005840"/>
+            <a:off x="731520" y="1097280"/>
+            <a:ext cx="3657600" cy="27432"/>
           </a:xfrm>
           <a:prstGeom prst="rect">
             <a:avLst/>
           </a:prstGeom>
           <a:solidFill>
-            <a:srgbClr val="FAFAFA"/>
+            <a:srgbClr val="2A9D8F"/>
           </a:solidFill>
-          <a:ln w="25400">
-            <a:solidFill>
-              <a:srgbClr val="8E44AD"/>
-            </a:solidFill>
+          <a:ln>
+            <a:noFill/>
           </a:ln>
         </p:spPr>
         <p:style>
@@ -4525,19 +7234,386 @@
           <a:bodyPr rtlCol="0" anchor="ctr"/>
           <a:lstStyle/>
           <a:p>
-            <a:pPr algn="l">
-              <a:defRPr sz="1600" b="0">
-                <a:solidFill>
-                  <a:srgbClr val="2C3E50"/>
-                </a:solidFill>
-              </a:defRPr>
-            </a:pPr>
-            <a:r>
-              <a:t>💾 基础设施层：FAISS IVF-Flat  ·  BAAI/bge-m3  ·  DeepSeek-1.5B + LoRA  ·  78K QA 语料</a:t>
-            </a:r>
-          </a:p>
-        </p:txBody>
-      </p:sp>
+            <a:pPr algn="ctr"/>
+          </a:p>
+        </p:txBody>
+      </p:sp>
+      <p:graphicFrame>
+        <p:nvGraphicFramePr>
+          <p:cNvPr id="4" name="Table 3"/>
+          <p:cNvGraphicFramePr>
+            <a:graphicFrameLocks noGrp="1"/>
+          </p:cNvGraphicFramePr>
+          <p:nvPr/>
+        </p:nvGraphicFramePr>
+        <p:xfrm>
+          <a:off x="731520" y="1371600"/>
+          <a:ext cx="10698480" cy="2880360"/>
+        </p:xfrm>
+        <a:graphic>
+          <a:graphicData uri="http://schemas.openxmlformats.org/drawingml/2006/table">
+            <a:tbl>
+              <a:tblPr firstRow="1" bandRow="1">
+                <a:tableStyleId>{5C22544A-7EE6-4342-B048-85BDC9FD1C3A}</a:tableStyleId>
+              </a:tblPr>
+              <a:tblGrid>
+                <a:gridCol w="5349240"/>
+                <a:gridCol w="5349240"/>
+              </a:tblGrid>
+              <a:tr h="411480">
+                <a:tc>
+                  <a:txBody>
+                    <a:bodyPr/>
+                    <a:lstStyle/>
+                    <a:p>
+                      <a:pPr>
+                        <a:defRPr sz="1600" b="1">
+                          <a:solidFill>
+                            <a:srgbClr val="FFFFFF"/>
+                          </a:solidFill>
+                          <a:latin typeface="Arial"/>
+                        </a:defRPr>
+                      </a:pPr>
+                      <a:r>
+                        <a:t>参数</a:t>
+                      </a:r>
+                    </a:p>
+                  </a:txBody>
+                  <a:tcPr>
+                    <a:solidFill>
+                      <a:srgbClr val="2E86C1"/>
+                    </a:solidFill>
+                  </a:tcPr>
+                </a:tc>
+                <a:tc>
+                  <a:txBody>
+                    <a:bodyPr/>
+                    <a:lstStyle/>
+                    <a:p>
+                      <a:pPr>
+                        <a:defRPr sz="1600" b="1">
+                          <a:solidFill>
+                            <a:srgbClr val="FFFFFF"/>
+                          </a:solidFill>
+                          <a:latin typeface="Arial"/>
+                        </a:defRPr>
+                      </a:pPr>
+                      <a:r>
+                        <a:t>值</a:t>
+                      </a:r>
+                    </a:p>
+                  </a:txBody>
+                  <a:tcPr>
+                    <a:solidFill>
+                      <a:srgbClr val="2E86C1"/>
+                    </a:solidFill>
+                  </a:tcPr>
+                </a:tc>
+              </a:tr>
+              <a:tr h="411480">
+                <a:tc>
+                  <a:txBody>
+                    <a:bodyPr/>
+                    <a:lstStyle/>
+                    <a:p>
+                      <a:pPr>
+                        <a:defRPr sz="1500">
+                          <a:solidFill>
+                            <a:srgbClr val="2C3E50"/>
+                          </a:solidFill>
+                          <a:latin typeface="Arial"/>
+                        </a:defRPr>
+                      </a:pPr>
+                      <a:r>
+                        <a:t>基座模型</a:t>
+                      </a:r>
+                    </a:p>
+                  </a:txBody>
+                  <a:tcPr>
+                    <a:solidFill>
+                      <a:srgbClr val="F2F7FA"/>
+                    </a:solidFill>
+                  </a:tcPr>
+                </a:tc>
+                <a:tc>
+                  <a:txBody>
+                    <a:bodyPr/>
+                    <a:lstStyle/>
+                    <a:p>
+                      <a:pPr>
+                        <a:defRPr sz="1500">
+                          <a:solidFill>
+                            <a:srgbClr val="2C3E50"/>
+                          </a:solidFill>
+                          <a:latin typeface="Arial"/>
+                        </a:defRPr>
+                      </a:pPr>
+                      <a:r>
+                        <a:t>DeepSeek-R1-Distill-Qwen-1.5B</a:t>
+                      </a:r>
+                    </a:p>
+                  </a:txBody>
+                  <a:tcPr>
+                    <a:solidFill>
+                      <a:srgbClr val="F2F7FA"/>
+                    </a:solidFill>
+                  </a:tcPr>
+                </a:tc>
+              </a:tr>
+              <a:tr h="411480">
+                <a:tc>
+                  <a:txBody>
+                    <a:bodyPr/>
+                    <a:lstStyle/>
+                    <a:p>
+                      <a:pPr>
+                        <a:defRPr sz="1500">
+                          <a:solidFill>
+                            <a:srgbClr val="2C3E50"/>
+                          </a:solidFill>
+                          <a:latin typeface="Arial"/>
+                        </a:defRPr>
+                      </a:pPr>
+                      <a:r>
+                        <a:t>微调方法</a:t>
+                      </a:r>
+                    </a:p>
+                  </a:txBody>
+                  <a:tcPr>
+                    <a:solidFill>
+                      <a:srgbClr val="FFFFFF"/>
+                    </a:solidFill>
+                  </a:tcPr>
+                </a:tc>
+                <a:tc>
+                  <a:txBody>
+                    <a:bodyPr/>
+                    <a:lstStyle/>
+                    <a:p>
+                      <a:pPr>
+                        <a:defRPr sz="1500">
+                          <a:solidFill>
+                            <a:srgbClr val="2C3E50"/>
+                          </a:solidFill>
+                          <a:latin typeface="Arial"/>
+                        </a:defRPr>
+                      </a:pPr>
+                      <a:r>
+                        <a:t>4-bit QLoRA (NF4 + Double Quant)</a:t>
+                      </a:r>
+                    </a:p>
+                  </a:txBody>
+                  <a:tcPr>
+                    <a:solidFill>
+                      <a:srgbClr val="FFFFFF"/>
+                    </a:solidFill>
+                  </a:tcPr>
+                </a:tc>
+              </a:tr>
+              <a:tr h="411480">
+                <a:tc>
+                  <a:txBody>
+                    <a:bodyPr/>
+                    <a:lstStyle/>
+                    <a:p>
+                      <a:pPr>
+                        <a:defRPr sz="1500">
+                          <a:solidFill>
+                            <a:srgbClr val="2C3E50"/>
+                          </a:solidFill>
+                          <a:latin typeface="Arial"/>
+                        </a:defRPr>
+                      </a:pPr>
+                      <a:r>
+                        <a:t>训练数据</a:t>
+                      </a:r>
+                    </a:p>
+                  </a:txBody>
+                  <a:tcPr>
+                    <a:solidFill>
+                      <a:srgbClr val="F2F7FA"/>
+                    </a:solidFill>
+                  </a:tcPr>
+                </a:tc>
+                <a:tc>
+                  <a:txBody>
+                    <a:bodyPr/>
+                    <a:lstStyle/>
+                    <a:p>
+                      <a:pPr>
+                        <a:defRPr sz="1500">
+                          <a:solidFill>
+                            <a:srgbClr val="2C3E50"/>
+                          </a:solidFill>
+                          <a:latin typeface="Arial"/>
+                        </a:defRPr>
+                      </a:pPr>
+                      <a:r>
+                        <a:t>10,000 条医学 QA（含 2,000 CoT）</a:t>
+                      </a:r>
+                    </a:p>
+                  </a:txBody>
+                  <a:tcPr>
+                    <a:solidFill>
+                      <a:srgbClr val="F2F7FA"/>
+                    </a:solidFill>
+                  </a:tcPr>
+                </a:tc>
+              </a:tr>
+              <a:tr h="411480">
+                <a:tc>
+                  <a:txBody>
+                    <a:bodyPr/>
+                    <a:lstStyle/>
+                    <a:p>
+                      <a:pPr>
+                        <a:defRPr sz="1500">
+                          <a:solidFill>
+                            <a:srgbClr val="2C3E50"/>
+                          </a:solidFill>
+                          <a:latin typeface="Arial"/>
+                        </a:defRPr>
+                      </a:pPr>
+                      <a:r>
+                        <a:t>训练峰值显存</a:t>
+                      </a:r>
+                    </a:p>
+                  </a:txBody>
+                  <a:tcPr>
+                    <a:solidFill>
+                      <a:srgbClr val="FFFFFF"/>
+                    </a:solidFill>
+                  </a:tcPr>
+                </a:tc>
+                <a:tc>
+                  <a:txBody>
+                    <a:bodyPr/>
+                    <a:lstStyle/>
+                    <a:p>
+                      <a:pPr>
+                        <a:defRPr sz="1500">
+                          <a:solidFill>
+                            <a:srgbClr val="2C3E50"/>
+                          </a:solidFill>
+                          <a:latin typeface="Arial"/>
+                        </a:defRPr>
+                      </a:pPr>
+                      <a:r>
+                        <a:t>仅 5.59 GB！（8GB 消费卡可训练）</a:t>
+                      </a:r>
+                    </a:p>
+                  </a:txBody>
+                  <a:tcPr>
+                    <a:solidFill>
+                      <a:srgbClr val="FFFFFF"/>
+                    </a:solidFill>
+                  </a:tcPr>
+                </a:tc>
+              </a:tr>
+              <a:tr h="411480">
+                <a:tc>
+                  <a:txBody>
+                    <a:bodyPr/>
+                    <a:lstStyle/>
+                    <a:p>
+                      <a:pPr>
+                        <a:defRPr sz="1500">
+                          <a:solidFill>
+                            <a:srgbClr val="2C3E50"/>
+                          </a:solidFill>
+                          <a:latin typeface="Arial"/>
+                        </a:defRPr>
+                      </a:pPr>
+                      <a:r>
+                        <a:t>LoRA 权重</a:t>
+                      </a:r>
+                    </a:p>
+                  </a:txBody>
+                  <a:tcPr>
+                    <a:solidFill>
+                      <a:srgbClr val="F2F7FA"/>
+                    </a:solidFill>
+                  </a:tcPr>
+                </a:tc>
+                <a:tc>
+                  <a:txBody>
+                    <a:bodyPr/>
+                    <a:lstStyle/>
+                    <a:p>
+                      <a:pPr>
+                        <a:defRPr sz="1500">
+                          <a:solidFill>
+                            <a:srgbClr val="2C3E50"/>
+                          </a:solidFill>
+                          <a:latin typeface="Arial"/>
+                        </a:defRPr>
+                      </a:pPr>
+                      <a:r>
+                        <a:t>~71 MB</a:t>
+                      </a:r>
+                    </a:p>
+                  </a:txBody>
+                  <a:tcPr>
+                    <a:solidFill>
+                      <a:srgbClr val="F2F7FA"/>
+                    </a:solidFill>
+                  </a:tcPr>
+                </a:tc>
+              </a:tr>
+              <a:tr h="411480">
+                <a:tc>
+                  <a:txBody>
+                    <a:bodyPr/>
+                    <a:lstStyle/>
+                    <a:p>
+                      <a:pPr>
+                        <a:defRPr sz="1500">
+                          <a:solidFill>
+                            <a:srgbClr val="2C3E50"/>
+                          </a:solidFill>
+                          <a:latin typeface="Arial"/>
+                        </a:defRPr>
+                      </a:pPr>
+                      <a:r>
+                        <a:t>LoRA 配置</a:t>
+                      </a:r>
+                    </a:p>
+                  </a:txBody>
+                  <a:tcPr>
+                    <a:solidFill>
+                      <a:srgbClr val="FFFFFF"/>
+                    </a:solidFill>
+                  </a:tcPr>
+                </a:tc>
+                <a:tc>
+                  <a:txBody>
+                    <a:bodyPr/>
+                    <a:lstStyle/>
+                    <a:p>
+                      <a:pPr>
+                        <a:defRPr sz="1500">
+                          <a:solidFill>
+                            <a:srgbClr val="2C3E50"/>
+                          </a:solidFill>
+                          <a:latin typeface="Arial"/>
+                        </a:defRPr>
+                      </a:pPr>
+                      <a:r>
+                        <a:t>r=16, alpha=32, 8-bit AdamW</a:t>
+                      </a:r>
+                    </a:p>
+                  </a:txBody>
+                  <a:tcPr>
+                    <a:solidFill>
+                      <a:srgbClr val="FFFFFF"/>
+                    </a:solidFill>
+                  </a:tcPr>
+                </a:tc>
+              </a:tr>
+            </a:tbl>
+          </a:graphicData>
+        </a:graphic>
+      </p:graphicFrame>
     </p:spTree>
   </p:cSld>
   <p:clrMapOvr>
@@ -4546,13 +7622,13 @@
 </p:sld>
 </file>
 
-<file path=ppt/slides/slide4.xml><?xml version="1.0" encoding="utf-8"?>
+<file path=ppt/slides/slide8.xml><?xml version="1.0" encoding="utf-8"?>
 <p:sld xmlns:a="http://schemas.openxmlformats.org/drawingml/2006/main" xmlns:p="http://schemas.openxmlformats.org/presentationml/2006/main" xmlns:r="http://schemas.openxmlformats.org/officeDocument/2006/relationships">
   <p:cSld>
     <p:bg>
       <p:bgPr>
         <a:solidFill>
-          <a:srgbClr val="FFFFFF"/>
+          <a:srgbClr val="1A5276"/>
         </a:solidFill>
         <a:effectLst/>
       </p:bgPr>
@@ -4572,8 +7648,8 @@
         </p:nvSpPr>
         <p:spPr>
           <a:xfrm>
-            <a:off x="457200" y="274320"/>
-            <a:ext cx="10972800" cy="914400"/>
+            <a:off x="731520" y="457200"/>
+            <a:ext cx="10698480" cy="914400"/>
           </a:xfrm>
           <a:prstGeom prst="rect">
             <a:avLst/>
@@ -4587,14 +7663,15 @@
           <a:lstStyle/>
           <a:p>
             <a:pPr algn="l">
-              <a:defRPr sz="3200" b="1">
-                <a:solidFill>
-                  <a:srgbClr val="1A5276"/>
-                </a:solidFill>
+              <a:defRPr sz="3600" b="1">
+                <a:solidFill>
+                  <a:srgbClr val="FFFFFF"/>
+                </a:solidFill>
+                <a:latin typeface="Arial"/>
               </a:defRPr>
             </a:pPr>
             <a:r>
-              <a:t>🔬 三管道对比设计</a:t>
+              <a:t>🤖 成员 C — Agent 架构与评测</a:t>
             </a:r>
           </a:p>
         </p:txBody>
@@ -4607,19 +7684,17 @@
         </p:nvSpPr>
         <p:spPr>
           <a:xfrm>
-            <a:off x="731520" y="2103120"/>
-            <a:ext cx="3474720" cy="3200400"/>
+            <a:off x="731520" y="1097280"/>
+            <a:ext cx="3657600" cy="27432"/>
           </a:xfrm>
           <a:prstGeom prst="rect">
             <a:avLst/>
           </a:prstGeom>
           <a:solidFill>
-            <a:srgbClr val="FFFFFF"/>
+            <a:srgbClr val="2A9D8F"/>
           </a:solidFill>
-          <a:ln w="25400">
-            <a:solidFill>
-              <a:srgbClr val="E63946"/>
-            </a:solidFill>
+          <a:ln>
+            <a:noFill/>
           </a:ln>
         </p:spPr>
         <p:style>
@@ -4640,73 +7715,307 @@
           <a:bodyPr rtlCol="0" anchor="ctr"/>
           <a:lstStyle/>
           <a:p>
-            <a:pPr algn="ctr">
-              <a:defRPr sz="2000" b="1">
-                <a:solidFill>
-                  <a:srgbClr val="E63946"/>
-                </a:solidFill>
+            <a:pPr algn="ctr"/>
+          </a:p>
+        </p:txBody>
+      </p:sp>
+      <p:sp>
+        <p:nvSpPr>
+          <p:cNvPr id="4" name="TextBox 3"/>
+          <p:cNvSpPr txBox="1"/>
+          <p:nvPr/>
+        </p:nvSpPr>
+        <p:spPr>
+          <a:xfrm>
+            <a:off x="1097280" y="1463040"/>
+            <a:ext cx="10058400" cy="548640"/>
+          </a:xfrm>
+          <a:prstGeom prst="rect">
+            <a:avLst/>
+          </a:prstGeom>
+          <a:noFill/>
+        </p:spPr>
+        <p:txBody>
+          <a:bodyPr wrap="square">
+            <a:spAutoFit/>
+          </a:bodyPr>
+          <a:lstStyle/>
+          <a:p>
+            <a:pPr algn="l">
+              <a:defRPr sz="2000" b="0">
+                <a:solidFill>
+                  <a:srgbClr val="FFFFFF"/>
+                </a:solidFill>
+                <a:latin typeface="Arial"/>
               </a:defRPr>
             </a:pPr>
             <a:r>
-              <a:t>🔴 管道 1: Pure RAG</a:t>
-            </a:r>
-          </a:p>
+              <a:t>▸ Agent 系统 (~800 行): tools.py + agent_core.py + build_index.py</a:t>
+            </a:r>
+          </a:p>
+        </p:txBody>
+      </p:sp>
+      <p:sp>
+        <p:nvSpPr>
+          <p:cNvPr id="5" name="TextBox 4"/>
+          <p:cNvSpPr txBox="1"/>
+          <p:nvPr/>
+        </p:nvSpPr>
+        <p:spPr>
+          <a:xfrm>
+            <a:off x="1097280" y="2103120"/>
+            <a:ext cx="10058400" cy="548640"/>
+          </a:xfrm>
+          <a:prstGeom prst="rect">
+            <a:avLst/>
+          </a:prstGeom>
+          <a:noFill/>
+        </p:spPr>
+        <p:txBody>
+          <a:bodyPr wrap="square">
+            <a:spAutoFit/>
+          </a:bodyPr>
+          <a:lstStyle/>
           <a:p>
             <a:pPr algn="l">
-              <a:defRPr sz="800" b="0">
-                <a:solidFill>
-                  <a:srgbClr val="2C3E50"/>
-                </a:solidFill>
+              <a:defRPr sz="2000" b="0">
+                <a:solidFill>
+                  <a:srgbClr val="FFFFFF"/>
+                </a:solidFill>
+                <a:latin typeface="Arial"/>
               </a:defRPr>
             </a:pPr>
-          </a:p>
-          <a:p>
-            <a:pPr algn="ctr">
-              <a:defRPr sz="1500" b="0">
-                <a:solidFill>
-                  <a:srgbClr val="2C3E50"/>
-                </a:solidFill>
+            <a:r>
+              <a:t>▸ RAG 检索工具 + 模型推理工具 — 懒加载，smolagents 兼容</a:t>
+            </a:r>
+          </a:p>
+        </p:txBody>
+      </p:sp>
+      <p:sp>
+        <p:nvSpPr>
+          <p:cNvPr id="6" name="TextBox 5"/>
+          <p:cNvSpPr txBox="1"/>
+          <p:nvPr/>
+        </p:nvSpPr>
+        <p:spPr>
+          <a:xfrm>
+            <a:off x="1097280" y="2743200"/>
+            <a:ext cx="10058400" cy="548640"/>
+          </a:xfrm>
+          <a:prstGeom prst="rect">
+            <a:avLst/>
+          </a:prstGeom>
+          <a:noFill/>
+        </p:spPr>
+        <p:txBody>
+          <a:bodyPr wrap="square">
+            <a:spAutoFit/>
+          </a:bodyPr>
+          <a:lstStyle/>
+          <a:p>
+            <a:pPr algn="l">
+              <a:defRPr sz="2000" b="0">
+                <a:solidFill>
+                  <a:srgbClr val="FFFFFF"/>
+                </a:solidFill>
+                <a:latin typeface="Arial"/>
               </a:defRPr>
             </a:pPr>
             <a:r>
-              <a:t>模型：1.5B base + FAISS 检索</a:t>
-            </a:r>
-          </a:p>
-          <a:p>
-            <a:pPr algn="ctr">
-              <a:defRPr sz="1500" b="0">
-                <a:solidFill>
-                  <a:srgbClr val="2C3E50"/>
-                </a:solidFill>
+              <a:t>▸ 三管道: PureRAGPipeline / PureSFTPipeline / HybridAgentPipeline</a:t>
+            </a:r>
+          </a:p>
+        </p:txBody>
+      </p:sp>
+      <p:sp>
+        <p:nvSpPr>
+          <p:cNvPr id="7" name="TextBox 6"/>
+          <p:cNvSpPr txBox="1"/>
+          <p:nvPr/>
+        </p:nvSpPr>
+        <p:spPr>
+          <a:xfrm>
+            <a:off x="1097280" y="3383279"/>
+            <a:ext cx="10058400" cy="548640"/>
+          </a:xfrm>
+          <a:prstGeom prst="rect">
+            <a:avLst/>
+          </a:prstGeom>
+          <a:noFill/>
+        </p:spPr>
+        <p:txBody>
+          <a:bodyPr wrap="square">
+            <a:spAutoFit/>
+          </a:bodyPr>
+          <a:lstStyle/>
+          <a:p>
+            <a:pPr algn="l">
+              <a:defRPr sz="2000" b="0">
+                <a:solidFill>
+                  <a:srgbClr val="FFFFFF"/>
+                </a:solidFill>
+                <a:latin typeface="Arial"/>
               </a:defRPr>
             </a:pPr>
             <a:r>
-              <a:t>思路：固定工作流，检索→生成</a:t>
-            </a:r>
-          </a:p>
-        </p:txBody>
-      </p:sp>
-      <p:sp>
-        <p:nvSpPr>
-          <p:cNvPr id="4" name="Rectangle 3"/>
+              <a:t>▸ Hybrid Agent 基于 smolagents CodeAgent，自主决策检索/推理</a:t>
+            </a:r>
+          </a:p>
+        </p:txBody>
+      </p:sp>
+      <p:sp>
+        <p:nvSpPr>
+          <p:cNvPr id="8" name="TextBox 7"/>
+          <p:cNvSpPr txBox="1"/>
+          <p:nvPr/>
+        </p:nvSpPr>
+        <p:spPr>
+          <a:xfrm>
+            <a:off x="1097280" y="4023360"/>
+            <a:ext cx="10058400" cy="548640"/>
+          </a:xfrm>
+          <a:prstGeom prst="rect">
+            <a:avLst/>
+          </a:prstGeom>
+          <a:noFill/>
+        </p:spPr>
+        <p:txBody>
+          <a:bodyPr wrap="square">
+            <a:spAutoFit/>
+          </a:bodyPr>
+          <a:lstStyle/>
+          <a:p>
+            <a:pPr algn="l">
+              <a:defRPr sz="2000" b="0">
+                <a:solidFill>
+                  <a:srgbClr val="FFFFFF"/>
+                </a:solidFill>
+                <a:latin typeface="Arial"/>
+              </a:defRPr>
+            </a:pPr>
+            <a:r>
+              <a:t>▸ 评测框架: test_dataset.py → run_evaluation.py → analyze_results.py</a:t>
+            </a:r>
+          </a:p>
+        </p:txBody>
+      </p:sp>
+      <p:sp>
+        <p:nvSpPr>
+          <p:cNvPr id="9" name="TextBox 8"/>
+          <p:cNvSpPr txBox="1"/>
+          <p:nvPr/>
+        </p:nvSpPr>
+        <p:spPr>
+          <a:xfrm>
+            <a:off x="1097280" y="4663440"/>
+            <a:ext cx="10058400" cy="548640"/>
+          </a:xfrm>
+          <a:prstGeom prst="rect">
+            <a:avLst/>
+          </a:prstGeom>
+          <a:noFill/>
+        </p:spPr>
+        <p:txBody>
+          <a:bodyPr wrap="square">
+            <a:spAutoFit/>
+          </a:bodyPr>
+          <a:lstStyle/>
+          <a:p>
+            <a:pPr algn="l">
+              <a:defRPr sz="2000" b="0">
+                <a:solidFill>
+                  <a:srgbClr val="FFFFFF"/>
+                </a:solidFill>
+                <a:latin typeface="Arial"/>
+              </a:defRPr>
+            </a:pPr>
+            <a:r>
+              <a:t>▸ Gradio Web Demo — 中文界面 + GPU 真机推理 + 三模式切换</a:t>
+            </a:r>
+          </a:p>
+        </p:txBody>
+      </p:sp>
+    </p:spTree>
+  </p:cSld>
+  <p:clrMapOvr>
+    <a:masterClrMapping/>
+  </p:clrMapOvr>
+</p:sld>
+</file>
+
+<file path=ppt/slides/slide9.xml><?xml version="1.0" encoding="utf-8"?>
+<p:sld xmlns:a="http://schemas.openxmlformats.org/drawingml/2006/main" xmlns:p="http://schemas.openxmlformats.org/presentationml/2006/main" xmlns:r="http://schemas.openxmlformats.org/officeDocument/2006/relationships">
+  <p:cSld>
+    <p:bg>
+      <p:bgPr>
+        <a:solidFill>
+          <a:srgbClr val="1A5276"/>
+        </a:solidFill>
+        <a:effectLst/>
+      </p:bgPr>
+    </p:bg>
+    <p:spTree>
+      <p:nvGrpSpPr>
+        <p:cNvPr id="1" name=""/>
+        <p:cNvGrpSpPr/>
+        <p:nvPr/>
+      </p:nvGrpSpPr>
+      <p:grpSpPr/>
+      <p:sp>
+        <p:nvSpPr>
+          <p:cNvPr id="2" name="TextBox 1"/>
+          <p:cNvSpPr txBox="1"/>
+          <p:nvPr/>
+        </p:nvSpPr>
+        <p:spPr>
+          <a:xfrm>
+            <a:off x="731520" y="457200"/>
+            <a:ext cx="10698480" cy="914400"/>
+          </a:xfrm>
+          <a:prstGeom prst="rect">
+            <a:avLst/>
+          </a:prstGeom>
+          <a:noFill/>
+        </p:spPr>
+        <p:txBody>
+          <a:bodyPr wrap="square">
+            <a:spAutoFit/>
+          </a:bodyPr>
+          <a:lstStyle/>
+          <a:p>
+            <a:pPr algn="l">
+              <a:defRPr sz="3600" b="1">
+                <a:solidFill>
+                  <a:srgbClr val="FFFFFF"/>
+                </a:solidFill>
+                <a:latin typeface="Arial"/>
+              </a:defRPr>
+            </a:pPr>
+            <a:r>
+              <a:t>📊 评测方法论 ★</a:t>
+            </a:r>
+          </a:p>
+        </p:txBody>
+      </p:sp>
+      <p:sp>
+        <p:nvSpPr>
+          <p:cNvPr id="3" name="Rectangle 2"/>
           <p:cNvSpPr/>
           <p:nvPr/>
         </p:nvSpPr>
         <p:spPr>
           <a:xfrm>
-            <a:off x="4480559" y="2103120"/>
-            <a:ext cx="3474720" cy="3200400"/>
+            <a:off x="731520" y="1097280"/>
+            <a:ext cx="3657600" cy="27432"/>
           </a:xfrm>
           <a:prstGeom prst="rect">
             <a:avLst/>
           </a:prstGeom>
           <a:solidFill>
-            <a:srgbClr val="FFFFFF"/>
+            <a:srgbClr val="2A9D8F"/>
           </a:solidFill>
-          <a:ln w="25400">
-            <a:solidFill>
-              <a:srgbClr val="2E86C1"/>
-            </a:solidFill>
+          <a:ln>
+            <a:noFill/>
           </a:ln>
         </p:spPr>
         <p:style>
@@ -4727,149 +8036,20 @@
           <a:bodyPr rtlCol="0" anchor="ctr"/>
           <a:lstStyle/>
           <a:p>
-            <a:pPr algn="ctr">
-              <a:defRPr sz="2000" b="1">
-                <a:solidFill>
-                  <a:srgbClr val="2E86C1"/>
-                </a:solidFill>
-              </a:defRPr>
-            </a:pPr>
-            <a:r>
-              <a:t>🔵 管道 2: Pure SFT</a:t>
-            </a:r>
-          </a:p>
-          <a:p>
-            <a:pPr algn="l">
-              <a:defRPr sz="800" b="0">
-                <a:solidFill>
-                  <a:srgbClr val="2C3E50"/>
-                </a:solidFill>
-              </a:defRPr>
-            </a:pPr>
-          </a:p>
-          <a:p>
-            <a:pPr algn="ctr">
-              <a:defRPr sz="1500" b="0">
-                <a:solidFill>
-                  <a:srgbClr val="2C3E50"/>
-                </a:solidFill>
-              </a:defRPr>
-            </a:pPr>
-            <a:r>
-              <a:t>模型：1.5B QLoRA 微调</a:t>
-            </a:r>
-          </a:p>
-          <a:p>
-            <a:pPr algn="ctr">
-              <a:defRPr sz="1500" b="0">
-                <a:solidFill>
-                  <a:srgbClr val="2C3E50"/>
-                </a:solidFill>
-              </a:defRPr>
-            </a:pPr>
-            <a:r>
-              <a:t>思路：直接推理，知识来自权重</a:t>
-            </a:r>
-          </a:p>
-        </p:txBody>
-      </p:sp>
-      <p:sp>
-        <p:nvSpPr>
-          <p:cNvPr id="5" name="Rectangle 4"/>
-          <p:cNvSpPr/>
-          <p:nvPr/>
-        </p:nvSpPr>
-        <p:spPr>
-          <a:xfrm>
-            <a:off x="8229600" y="2103120"/>
-            <a:ext cx="3474720" cy="3200400"/>
-          </a:xfrm>
-          <a:prstGeom prst="rect">
-            <a:avLst/>
-          </a:prstGeom>
-          <a:solidFill>
-            <a:srgbClr val="FFFFFF"/>
-          </a:solidFill>
-          <a:ln w="25400">
-            <a:solidFill>
-              <a:srgbClr val="27AE60"/>
-            </a:solidFill>
-          </a:ln>
-        </p:spPr>
-        <p:style>
-          <a:lnRef idx="1">
-            <a:schemeClr val="accent1"/>
-          </a:lnRef>
-          <a:fillRef idx="3">
-            <a:schemeClr val="accent1"/>
-          </a:fillRef>
-          <a:effectRef idx="2">
-            <a:schemeClr val="accent1"/>
-          </a:effectRef>
-          <a:fontRef idx="minor">
-            <a:schemeClr val="lt1"/>
-          </a:fontRef>
-        </p:style>
-        <p:txBody>
-          <a:bodyPr rtlCol="0" anchor="ctr"/>
-          <a:lstStyle/>
-          <a:p>
-            <a:pPr algn="ctr">
-              <a:defRPr sz="2000" b="1">
-                <a:solidFill>
-                  <a:srgbClr val="27AE60"/>
-                </a:solidFill>
-              </a:defRPr>
-            </a:pPr>
-            <a:r>
-              <a:t>🟢 管道 3: Hybrid Agent</a:t>
-            </a:r>
-          </a:p>
-          <a:p>
-            <a:pPr algn="l">
-              <a:defRPr sz="800" b="0">
-                <a:solidFill>
-                  <a:srgbClr val="2C3E50"/>
-                </a:solidFill>
-              </a:defRPr>
-            </a:pPr>
-          </a:p>
-          <a:p>
-            <a:pPr algn="ctr">
-              <a:defRPr sz="1500" b="0">
-                <a:solidFill>
-                  <a:srgbClr val="2C3E50"/>
-                </a:solidFill>
-              </a:defRPr>
-            </a:pPr>
-            <a:r>
-              <a:t>模型：1.5B QLoRA + RAG</a:t>
-            </a:r>
-          </a:p>
-          <a:p>
-            <a:pPr algn="ctr">
-              <a:defRPr sz="1500" b="0">
-                <a:solidFill>
-                  <a:srgbClr val="2C3E50"/>
-                </a:solidFill>
-              </a:defRPr>
-            </a:pPr>
-            <a:r>
-              <a:t>思路：CodeAgent 自主编排</a:t>
-            </a:r>
-          </a:p>
-        </p:txBody>
-      </p:sp>
-      <p:sp>
-        <p:nvSpPr>
-          <p:cNvPr id="6" name="TextBox 5"/>
+            <a:pPr algn="ctr"/>
+          </a:p>
+        </p:txBody>
+      </p:sp>
+      <p:sp>
+        <p:nvSpPr>
+          <p:cNvPr id="4" name="TextBox 3"/>
           <p:cNvSpPr txBox="1"/>
           <p:nvPr/>
         </p:nvSpPr>
         <p:spPr>
           <a:xfrm>
-            <a:off x="457200" y="5760720"/>
-            <a:ext cx="10972800" cy="457200"/>
+            <a:off x="914400" y="1463040"/>
+            <a:ext cx="10058400" cy="457200"/>
           </a:xfrm>
           <a:prstGeom prst="rect">
             <a:avLst/>
@@ -4882,55 +8062,30 @@
           </a:bodyPr>
           <a:lstStyle/>
           <a:p>
-            <a:pPr algn="ctr">
-              <a:defRPr sz="1400" b="0">
-                <a:solidFill>
-                  <a:srgbClr val="7F8C8D"/>
-                </a:solidFill>
+            <a:pPr algn="l">
+              <a:defRPr sz="2400" b="1">
+                <a:solidFill>
+                  <a:srgbClr val="2A9D8F"/>
+                </a:solidFill>
+                <a:latin typeface="Arial"/>
               </a:defRPr>
             </a:pPr>
             <a:r>
-              <a:t>统一调度 + 同一评测标准 = 公平对比</a:t>
-            </a:r>
-          </a:p>
-        </p:txBody>
-      </p:sp>
-    </p:spTree>
-  </p:cSld>
-  <p:clrMapOvr>
-    <a:masterClrMapping/>
-  </p:clrMapOvr>
-</p:sld>
-</file>
-
-<file path=ppt/slides/slide5.xml><?xml version="1.0" encoding="utf-8"?>
-<p:sld xmlns:a="http://schemas.openxmlformats.org/drawingml/2006/main" xmlns:p="http://schemas.openxmlformats.org/presentationml/2006/main" xmlns:r="http://schemas.openxmlformats.org/officeDocument/2006/relationships">
-  <p:cSld>
-    <p:bg>
-      <p:bgPr>
-        <a:solidFill>
-          <a:srgbClr val="FFFFFF"/>
-        </a:solidFill>
-        <a:effectLst/>
-      </p:bgPr>
-    </p:bg>
-    <p:spTree>
-      <p:nvGrpSpPr>
-        <p:cNvPr id="1" name=""/>
-        <p:cNvGrpSpPr/>
-        <p:nvPr/>
-      </p:nvGrpSpPr>
-      <p:grpSpPr/>
-      <p:sp>
-        <p:nvSpPr>
-          <p:cNvPr id="2" name="TextBox 1"/>
+              <a:t>第一步: 测试集准备</a:t>
+            </a:r>
+          </a:p>
+        </p:txBody>
+      </p:sp>
+      <p:sp>
+        <p:nvSpPr>
+          <p:cNvPr id="5" name="TextBox 4"/>
           <p:cNvSpPr txBox="1"/>
           <p:nvPr/>
         </p:nvSpPr>
         <p:spPr>
           <a:xfrm>
-            <a:off x="457200" y="274320"/>
-            <a:ext cx="10972800" cy="914400"/>
+            <a:off x="1371600" y="2011680"/>
+            <a:ext cx="9144000" cy="914400"/>
           </a:xfrm>
           <a:prstGeom prst="rect">
             <a:avLst/>
@@ -4944,28 +8099,29 @@
           <a:lstStyle/>
           <a:p>
             <a:pPr algn="l">
-              <a:defRPr sz="3200" b="1">
-                <a:solidFill>
-                  <a:srgbClr val="1A5276"/>
-                </a:solidFill>
+              <a:defRPr sz="1700" b="0">
+                <a:solidFill>
+                  <a:srgbClr val="FFFFFF"/>
+                </a:solidFill>
+                <a:latin typeface="Arial"/>
               </a:defRPr>
             </a:pPr>
             <a:r>
-              <a:t>📦 成员 A — RAG 知识检索库</a:t>
-            </a:r>
-          </a:p>
-        </p:txBody>
-      </p:sp>
-      <p:sp>
-        <p:nvSpPr>
-          <p:cNvPr id="3" name="TextBox 2"/>
+              <a:t>78K 语料 → MD5 去重（排 SFT 训练集） → 6 领域分层抽样 → 150 条未参练测试题</a:t>
+            </a:r>
+          </a:p>
+        </p:txBody>
+      </p:sp>
+      <p:sp>
+        <p:nvSpPr>
+          <p:cNvPr id="6" name="TextBox 5"/>
           <p:cNvSpPr txBox="1"/>
           <p:nvPr/>
         </p:nvSpPr>
         <p:spPr>
           <a:xfrm>
-            <a:off x="457200" y="1188720"/>
-            <a:ext cx="10972800" cy="457200"/>
+            <a:off x="914400" y="2926080"/>
+            <a:ext cx="10058400" cy="457200"/>
           </a:xfrm>
           <a:prstGeom prst="rect">
             <a:avLst/>
@@ -4979,270 +8135,29 @@
           <a:lstStyle/>
           <a:p>
             <a:pPr algn="l">
-              <a:defRPr sz="1500" b="0">
-                <a:solidFill>
-                  <a:srgbClr val="7F8C8D"/>
-                </a:solidFill>
+              <a:defRPr sz="2400" b="1">
+                <a:solidFill>
+                  <a:srgbClr val="2A9D8F"/>
+                </a:solidFill>
+                <a:latin typeface="Arial"/>
               </a:defRPr>
             </a:pPr>
             <a:r>
-              <a:t>数据：78,136 条医疗 QA (6领域)  |  嵌入：BAAI/bge-m3 (1024维)  |  索引：FAISS IVF-Flat</a:t>
-            </a:r>
-          </a:p>
-        </p:txBody>
-      </p:sp>
-      <p:sp>
-        <p:nvSpPr>
-          <p:cNvPr id="4" name="Rectangle 3"/>
-          <p:cNvSpPr/>
-          <p:nvPr/>
-        </p:nvSpPr>
-        <p:spPr>
-          <a:xfrm>
-            <a:off x="914400" y="2011680"/>
-            <a:ext cx="10058400" cy="914400"/>
-          </a:xfrm>
-          <a:prstGeom prst="rect">
-            <a:avLst/>
-          </a:prstGeom>
-          <a:solidFill>
-            <a:srgbClr val="FDF2E9"/>
-          </a:solidFill>
-          <a:ln w="25400">
-            <a:solidFill>
-              <a:srgbClr val="E67E22"/>
-            </a:solidFill>
-          </a:ln>
-        </p:spPr>
-        <p:style>
-          <a:lnRef idx="1">
-            <a:schemeClr val="accent1"/>
-          </a:lnRef>
-          <a:fillRef idx="3">
-            <a:schemeClr val="accent1"/>
-          </a:fillRef>
-          <a:effectRef idx="2">
-            <a:schemeClr val="accent1"/>
-          </a:effectRef>
-          <a:fontRef idx="minor">
-            <a:schemeClr val="lt1"/>
-          </a:fontRef>
-        </p:style>
-        <p:txBody>
-          <a:bodyPr rtlCol="0" anchor="ctr"/>
-          <a:lstStyle/>
-          <a:p>
-            <a:pPr algn="l">
-              <a:defRPr sz="1600" b="0">
-                <a:solidFill>
-                  <a:srgbClr val="2C3E50"/>
-                </a:solidFill>
-              </a:defRPr>
-            </a:pPr>
-            <a:r>
-              <a:t>📊 语料来源：6 大心血管数据集：基础心脏病学、ECG诊断、复杂病例、风险评估、临床对话</a:t>
-            </a:r>
-          </a:p>
-        </p:txBody>
-      </p:sp>
-      <p:sp>
-        <p:nvSpPr>
-          <p:cNvPr id="5" name="Rectangle 4"/>
-          <p:cNvSpPr/>
-          <p:nvPr/>
-        </p:nvSpPr>
-        <p:spPr>
-          <a:xfrm>
-            <a:off x="914400" y="3154680"/>
-            <a:ext cx="10058400" cy="914400"/>
-          </a:xfrm>
-          <a:prstGeom prst="rect">
-            <a:avLst/>
-          </a:prstGeom>
-          <a:solidFill>
-            <a:srgbClr val="FDF2E9"/>
-          </a:solidFill>
-          <a:ln w="25400">
-            <a:solidFill>
-              <a:srgbClr val="E67E22"/>
-            </a:solidFill>
-          </a:ln>
-        </p:spPr>
-        <p:style>
-          <a:lnRef idx="1">
-            <a:schemeClr val="accent1"/>
-          </a:lnRef>
-          <a:fillRef idx="3">
-            <a:schemeClr val="accent1"/>
-          </a:fillRef>
-          <a:effectRef idx="2">
-            <a:schemeClr val="accent1"/>
-          </a:effectRef>
-          <a:fontRef idx="minor">
-            <a:schemeClr val="lt1"/>
-          </a:fontRef>
-        </p:style>
-        <p:txBody>
-          <a:bodyPr rtlCol="0" anchor="ctr"/>
-          <a:lstStyle/>
-          <a:p>
-            <a:pPr algn="l">
-              <a:defRPr sz="1600" b="0">
-                <a:solidFill>
-                  <a:srgbClr val="2C3E50"/>
-                </a:solidFill>
-              </a:defRPr>
-            </a:pPr>
-            <a:r>
-              <a:t>🧹 数据清洗：去重、格式化、质量筛查 → 78,136 条高质量 QA</a:t>
-            </a:r>
-          </a:p>
-        </p:txBody>
-      </p:sp>
-      <p:sp>
-        <p:nvSpPr>
-          <p:cNvPr id="6" name="Rectangle 5"/>
-          <p:cNvSpPr/>
-          <p:nvPr/>
-        </p:nvSpPr>
-        <p:spPr>
-          <a:xfrm>
-            <a:off x="914400" y="4297680"/>
-            <a:ext cx="10058400" cy="914400"/>
-          </a:xfrm>
-          <a:prstGeom prst="rect">
-            <a:avLst/>
-          </a:prstGeom>
-          <a:solidFill>
-            <a:srgbClr val="FDF2E9"/>
-          </a:solidFill>
-          <a:ln w="25400">
-            <a:solidFill>
-              <a:srgbClr val="E67E22"/>
-            </a:solidFill>
-          </a:ln>
-        </p:spPr>
-        <p:style>
-          <a:lnRef idx="1">
-            <a:schemeClr val="accent1"/>
-          </a:lnRef>
-          <a:fillRef idx="3">
-            <a:schemeClr val="accent1"/>
-          </a:fillRef>
-          <a:effectRef idx="2">
-            <a:schemeClr val="accent1"/>
-          </a:effectRef>
-          <a:fontRef idx="minor">
-            <a:schemeClr val="lt1"/>
-          </a:fontRef>
-        </p:style>
-        <p:txBody>
-          <a:bodyPr rtlCol="0" anchor="ctr"/>
-          <a:lstStyle/>
-          <a:p>
-            <a:pPr algn="l">
-              <a:defRPr sz="1600" b="0">
-                <a:solidFill>
-                  <a:srgbClr val="2C3E50"/>
-                </a:solidFill>
-              </a:defRPr>
-            </a:pPr>
-            <a:r>
-              <a:t>🔍 最优检索配置：消融实验：chunk_size=512, overlap=50, top_k=3, F1=0.8628</a:t>
-            </a:r>
-          </a:p>
-        </p:txBody>
-      </p:sp>
-      <p:sp>
-        <p:nvSpPr>
-          <p:cNvPr id="7" name="Rectangle 6"/>
-          <p:cNvSpPr/>
-          <p:nvPr/>
-        </p:nvSpPr>
-        <p:spPr>
-          <a:xfrm>
-            <a:off x="914400" y="5440680"/>
-            <a:ext cx="10058400" cy="914400"/>
-          </a:xfrm>
-          <a:prstGeom prst="rect">
-            <a:avLst/>
-          </a:prstGeom>
-          <a:solidFill>
-            <a:srgbClr val="FDF2E9"/>
-          </a:solidFill>
-          <a:ln w="25400">
-            <a:solidFill>
-              <a:srgbClr val="E67E22"/>
-            </a:solidFill>
-          </a:ln>
-        </p:spPr>
-        <p:style>
-          <a:lnRef idx="1">
-            <a:schemeClr val="accent1"/>
-          </a:lnRef>
-          <a:fillRef idx="3">
-            <a:schemeClr val="accent1"/>
-          </a:fillRef>
-          <a:effectRef idx="2">
-            <a:schemeClr val="accent1"/>
-          </a:effectRef>
-          <a:fontRef idx="minor">
-            <a:schemeClr val="lt1"/>
-          </a:fontRef>
-        </p:style>
-        <p:txBody>
-          <a:bodyPr rtlCol="0" anchor="ctr"/>
-          <a:lstStyle/>
-          <a:p>
-            <a:pPr algn="l">
-              <a:defRPr sz="1600" b="0">
-                <a:solidFill>
-                  <a:srgbClr val="2C3E50"/>
-                </a:solidFill>
-              </a:defRPr>
-            </a:pPr>
-            <a:r>
-              <a:t>⚡ 检索性能：78K 文档中语义搜索 &lt; 1 秒 (GPU)，中英文混合检索</a:t>
-            </a:r>
-          </a:p>
-        </p:txBody>
-      </p:sp>
-    </p:spTree>
-  </p:cSld>
-  <p:clrMapOvr>
-    <a:masterClrMapping/>
-  </p:clrMapOvr>
-</p:sld>
-</file>
-
-<file path=ppt/slides/slide6.xml><?xml version="1.0" encoding="utf-8"?>
-<p:sld xmlns:a="http://schemas.openxmlformats.org/drawingml/2006/main" xmlns:p="http://schemas.openxmlformats.org/presentationml/2006/main" xmlns:r="http://schemas.openxmlformats.org/officeDocument/2006/relationships">
-  <p:cSld>
-    <p:bg>
-      <p:bgPr>
-        <a:solidFill>
-          <a:srgbClr val="FFFFFF"/>
-        </a:solidFill>
-        <a:effectLst/>
-      </p:bgPr>
-    </p:bg>
-    <p:spTree>
-      <p:nvGrpSpPr>
-        <p:cNvPr id="1" name=""/>
-        <p:cNvGrpSpPr/>
-        <p:nvPr/>
-      </p:nvGrpSpPr>
-      <p:grpSpPr/>
-      <p:sp>
-        <p:nvSpPr>
-          <p:cNvPr id="2" name="TextBox 1"/>
+              <a:t>第二步: RAGAS 双指标</a:t>
+            </a:r>
+          </a:p>
+        </p:txBody>
+      </p:sp>
+      <p:sp>
+        <p:nvSpPr>
+          <p:cNvPr id="7" name="TextBox 6"/>
           <p:cNvSpPr txBox="1"/>
           <p:nvPr/>
         </p:nvSpPr>
         <p:spPr>
           <a:xfrm>
-            <a:off x="457200" y="274320"/>
-            <a:ext cx="10972800" cy="914400"/>
+            <a:off x="1371600" y="3474720"/>
+            <a:ext cx="9144000" cy="731520"/>
           </a:xfrm>
           <a:prstGeom prst="rect">
             <a:avLst/>
@@ -5256,28 +8171,33 @@
           <a:lstStyle/>
           <a:p>
             <a:pPr algn="l">
-              <a:defRPr sz="3200" b="1">
-                <a:solidFill>
-                  <a:srgbClr val="1A5276"/>
-                </a:solidFill>
+              <a:defRPr sz="1700" b="0">
+                <a:solidFill>
+                  <a:srgbClr val="FFFFFF"/>
+                </a:solidFill>
+                <a:latin typeface="Arial"/>
               </a:defRPr>
             </a:pPr>
             <a:r>
-              <a:t>🧪 成员 B — QLoRA 医疗模型微调</a:t>
-            </a:r>
-          </a:p>
-        </p:txBody>
-      </p:sp>
-      <p:sp>
-        <p:nvSpPr>
-          <p:cNvPr id="3" name="TextBox 2"/>
+              <a:t>Faithfulness（忠实度）: 答案能否从上下文推断？→ 防止编造</a:t>
+            </a:r>
+            <a:br/>
+            <a:r>
+              <a:t>Answer Relevancy（相关性）: 答案是否切题？→ 防止跑题</a:t>
+            </a:r>
+          </a:p>
+        </p:txBody>
+      </p:sp>
+      <p:sp>
+        <p:nvSpPr>
+          <p:cNvPr id="8" name="TextBox 7"/>
           <p:cNvSpPr txBox="1"/>
           <p:nvPr/>
         </p:nvSpPr>
         <p:spPr>
           <a:xfrm>
-            <a:off x="457200" y="1188720"/>
-            <a:ext cx="10972800" cy="457200"/>
+            <a:off x="914400" y="4389120"/>
+            <a:ext cx="10058400" cy="457200"/>
           </a:xfrm>
           <a:prstGeom prst="rect">
             <a:avLst/>
@@ -5291,276 +8211,29 @@
           <a:lstStyle/>
           <a:p>
             <a:pPr algn="l">
-              <a:defRPr sz="1500" b="0">
-                <a:solidFill>
-                  <a:srgbClr val="7F8C8D"/>
-                </a:solidFill>
+              <a:defRPr sz="2400" b="1">
+                <a:solidFill>
+                  <a:srgbClr val="2A9D8F"/>
+                </a:solidFill>
+                <a:latin typeface="Arial"/>
               </a:defRPr>
             </a:pPr>
             <a:r>
-              <a:t>基座：DeepSeek-R1-Distill-Qwen-1.5B  |  方法：4-bit QLoRA (NF4+Double Quant)  |  数据：10K QA (含2K CoT)</a:t>
-            </a:r>
-          </a:p>
-        </p:txBody>
-      </p:sp>
-      <p:sp>
-        <p:nvSpPr>
-          <p:cNvPr id="4" name="Rectangle 3"/>
-          <p:cNvSpPr/>
-          <p:nvPr/>
-        </p:nvSpPr>
-        <p:spPr>
-          <a:xfrm>
-            <a:off x="731520" y="2011680"/>
-            <a:ext cx="5029200" cy="3840480"/>
-          </a:xfrm>
-          <a:prstGeom prst="rect">
-            <a:avLst/>
-          </a:prstGeom>
-          <a:solidFill>
-            <a:srgbClr val="E8F4FD"/>
-          </a:solidFill>
-          <a:ln w="25400">
-            <a:solidFill>
-              <a:srgbClr val="2E86C1"/>
-            </a:solidFill>
-          </a:ln>
-        </p:spPr>
-        <p:style>
-          <a:lnRef idx="1">
-            <a:schemeClr val="accent1"/>
-          </a:lnRef>
-          <a:fillRef idx="3">
-            <a:schemeClr val="accent1"/>
-          </a:fillRef>
-          <a:effectRef idx="2">
-            <a:schemeClr val="accent1"/>
-          </a:effectRef>
-          <a:fontRef idx="minor">
-            <a:schemeClr val="lt1"/>
-          </a:fontRef>
-        </p:style>
-        <p:txBody>
-          <a:bodyPr rtlCol="0" anchor="ctr"/>
-          <a:lstStyle/>
-          <a:p>
-            <a:pPr algn="l">
-              <a:defRPr sz="2200" b="1">
-                <a:solidFill>
-                  <a:srgbClr val="2E86C1"/>
-                </a:solidFill>
-              </a:defRPr>
-            </a:pPr>
-            <a:r>
-              <a:t>⚙️ 训练配置</a:t>
-            </a:r>
-          </a:p>
-          <a:p>
-            <a:pPr algn="l">
-              <a:defRPr sz="1500" b="0">
-                <a:solidFill>
-                  <a:srgbClr val="2C3E50"/>
-                </a:solidFill>
-              </a:defRPr>
-            </a:pPr>
-          </a:p>
-          <a:p>
-            <a:pPr algn="l">
-              <a:defRPr sz="1500" b="0">
-                <a:solidFill>
-                  <a:srgbClr val="2C3E50"/>
-                </a:solidFill>
-              </a:defRPr>
-            </a:pPr>
-            <a:r>
-              <a:t>• 4-bit NF4 量化 + Double Quant</a:t>
-            </a:r>
-          </a:p>
-          <a:p>
-            <a:pPr algn="l">
-              <a:defRPr sz="1500" b="0">
-                <a:solidFill>
-                  <a:srgbClr val="2C3E50"/>
-                </a:solidFill>
-              </a:defRPr>
-            </a:pPr>
-            <a:r>
-              <a:t>• 训练峰值显存：仅 5.59 GB</a:t>
-            </a:r>
-          </a:p>
-          <a:p>
-            <a:pPr algn="l">
-              <a:defRPr sz="1500" b="0">
-                <a:solidFill>
-                  <a:srgbClr val="2C3E50"/>
-                </a:solidFill>
-              </a:defRPr>
-            </a:pPr>
-            <a:r>
-              <a:t>• 8GB 消费级显卡即可训练</a:t>
-            </a:r>
-          </a:p>
-          <a:p>
-            <a:pPr algn="l">
-              <a:defRPr sz="1500" b="0">
-                <a:solidFill>
-                  <a:srgbClr val="2C3E50"/>
-                </a:solidFill>
-              </a:defRPr>
-            </a:pPr>
-            <a:r>
-              <a:t>• LoRA 权重仅 ~71 MB</a:t>
-            </a:r>
-          </a:p>
-        </p:txBody>
-      </p:sp>
-      <p:sp>
-        <p:nvSpPr>
-          <p:cNvPr id="5" name="Rectangle 4"/>
-          <p:cNvSpPr/>
-          <p:nvPr/>
-        </p:nvSpPr>
-        <p:spPr>
-          <a:xfrm>
-            <a:off x="6217920" y="2011680"/>
-            <a:ext cx="5029200" cy="3840480"/>
-          </a:xfrm>
-          <a:prstGeom prst="rect">
-            <a:avLst/>
-          </a:prstGeom>
-          <a:solidFill>
-            <a:srgbClr val="E8F8F0"/>
-          </a:solidFill>
-          <a:ln w="25400">
-            <a:solidFill>
-              <a:srgbClr val="27AE60"/>
-            </a:solidFill>
-          </a:ln>
-        </p:spPr>
-        <p:style>
-          <a:lnRef idx="1">
-            <a:schemeClr val="accent1"/>
-          </a:lnRef>
-          <a:fillRef idx="3">
-            <a:schemeClr val="accent1"/>
-          </a:fillRef>
-          <a:effectRef idx="2">
-            <a:schemeClr val="accent1"/>
-          </a:effectRef>
-          <a:fontRef idx="minor">
-            <a:schemeClr val="lt1"/>
-          </a:fontRef>
-        </p:style>
-        <p:txBody>
-          <a:bodyPr rtlCol="0" anchor="ctr"/>
-          <a:lstStyle/>
-          <a:p>
-            <a:pPr algn="l">
-              <a:defRPr sz="2200" b="1">
-                <a:solidFill>
-                  <a:srgbClr val="27AE60"/>
-                </a:solidFill>
-              </a:defRPr>
-            </a:pPr>
-            <a:r>
-              <a:t>✅ 核心优势</a:t>
-            </a:r>
-          </a:p>
-          <a:p>
-            <a:pPr algn="l">
-              <a:defRPr sz="1500" b="0">
-                <a:solidFill>
-                  <a:srgbClr val="2C3E50"/>
-                </a:solidFill>
-              </a:defRPr>
-            </a:pPr>
-          </a:p>
-          <a:p>
-            <a:pPr algn="l">
-              <a:defRPr sz="1500" b="0">
-                <a:solidFill>
-                  <a:srgbClr val="2C3E50"/>
-                </a:solidFill>
-              </a:defRPr>
-            </a:pPr>
-            <a:r>
-              <a:t>• 极低显存需求</a:t>
-            </a:r>
-          </a:p>
-          <a:p>
-            <a:pPr algn="l">
-              <a:defRPr sz="1500" b="0">
-                <a:solidFill>
-                  <a:srgbClr val="2C3E50"/>
-                </a:solidFill>
-              </a:defRPr>
-            </a:pPr>
-            <a:r>
-              <a:t>• 快速推理 (~5s/次)</a:t>
-            </a:r>
-          </a:p>
-          <a:p>
-            <a:pPr algn="l">
-              <a:defRPr sz="1500" b="0">
-                <a:solidFill>
-                  <a:srgbClr val="2C3E50"/>
-                </a:solidFill>
-              </a:defRPr>
-            </a:pPr>
-            <a:r>
-              <a:t>• 医学知识内化参数</a:t>
-            </a:r>
-          </a:p>
-          <a:p>
-            <a:pPr algn="l">
-              <a:defRPr sz="1500" b="0">
-                <a:solidFill>
-                  <a:srgbClr val="2C3E50"/>
-                </a:solidFill>
-              </a:defRPr>
-            </a:pPr>
-            <a:r>
-              <a:t>• 适配消费级硬件</a:t>
-            </a:r>
-          </a:p>
-        </p:txBody>
-      </p:sp>
-    </p:spTree>
-  </p:cSld>
-  <p:clrMapOvr>
-    <a:masterClrMapping/>
-  </p:clrMapOvr>
-</p:sld>
-</file>
-
-<file path=ppt/slides/slide7.xml><?xml version="1.0" encoding="utf-8"?>
-<p:sld xmlns:a="http://schemas.openxmlformats.org/drawingml/2006/main" xmlns:p="http://schemas.openxmlformats.org/presentationml/2006/main" xmlns:r="http://schemas.openxmlformats.org/officeDocument/2006/relationships">
-  <p:cSld>
-    <p:bg>
-      <p:bgPr>
-        <a:solidFill>
-          <a:srgbClr val="FFFFFF"/>
-        </a:solidFill>
-        <a:effectLst/>
-      </p:bgPr>
-    </p:bg>
-    <p:spTree>
-      <p:nvGrpSpPr>
-        <p:cNvPr id="1" name=""/>
-        <p:cNvGrpSpPr/>
-        <p:nvPr/>
-      </p:nvGrpSpPr>
-      <p:grpSpPr/>
-      <p:sp>
-        <p:nvSpPr>
-          <p:cNvPr id="2" name="TextBox 1"/>
+              <a:t>第三步: 评测流程</a:t>
+            </a:r>
+          </a:p>
+        </p:txBody>
+      </p:sp>
+      <p:sp>
+        <p:nvSpPr>
+          <p:cNvPr id="9" name="TextBox 8"/>
           <p:cNvSpPr txBox="1"/>
           <p:nvPr/>
         </p:nvSpPr>
         <p:spPr>
           <a:xfrm>
-            <a:off x="457200" y="274320"/>
-            <a:ext cx="10972800" cy="914400"/>
+            <a:off x="1371600" y="4937760"/>
+            <a:ext cx="9144000" cy="731520"/>
           </a:xfrm>
           <a:prstGeom prst="rect">
             <a:avLst/>
@@ -5574,1118 +8247,19 @@
           <a:lstStyle/>
           <a:p>
             <a:pPr algn="l">
-              <a:defRPr sz="3200" b="1">
-                <a:solidFill>
-                  <a:srgbClr val="1A5276"/>
-                </a:solidFill>
+              <a:defRPr sz="1700" b="0">
+                <a:solidFill>
+                  <a:srgbClr val="FFFFFF"/>
+                </a:solidFill>
+                <a:latin typeface="Arial"/>
               </a:defRPr>
             </a:pPr>
             <a:r>
-              <a:t>🤖 成员 C — Agent 架构</a:t>
-            </a:r>
-          </a:p>
-        </p:txBody>
-      </p:sp>
-      <p:sp>
-        <p:nvSpPr>
-          <p:cNvPr id="3" name="Rectangle 2"/>
-          <p:cNvSpPr/>
-          <p:nvPr/>
-        </p:nvSpPr>
-        <p:spPr>
-          <a:xfrm>
-            <a:off x="731520" y="2011680"/>
-            <a:ext cx="3474720" cy="3474720"/>
-          </a:xfrm>
-          <a:prstGeom prst="rect">
-            <a:avLst/>
-          </a:prstGeom>
-          <a:solidFill>
-            <a:srgbClr val="FFFFFF"/>
-          </a:solidFill>
-          <a:ln w="25400">
-            <a:solidFill>
-              <a:srgbClr val="2E86C1"/>
-            </a:solidFill>
-          </a:ln>
-        </p:spPr>
-        <p:style>
-          <a:lnRef idx="1">
-            <a:schemeClr val="accent1"/>
-          </a:lnRef>
-          <a:fillRef idx="3">
-            <a:schemeClr val="accent1"/>
-          </a:fillRef>
-          <a:effectRef idx="2">
-            <a:schemeClr val="accent1"/>
-          </a:effectRef>
-          <a:fontRef idx="minor">
-            <a:schemeClr val="lt1"/>
-          </a:fontRef>
-        </p:style>
-        <p:txBody>
-          <a:bodyPr rtlCol="0" anchor="ctr"/>
-          <a:lstStyle/>
-          <a:p>
-            <a:pPr algn="ctr">
-              <a:defRPr sz="2000" b="1">
-                <a:solidFill>
-                  <a:srgbClr val="2E86C1"/>
-                </a:solidFill>
-              </a:defRPr>
-            </a:pPr>
-            <a:r>
-              <a:t>🧩 Agent 系统</a:t>
-            </a:r>
-          </a:p>
-          <a:p>
-            <a:pPr algn="ctr">
-              <a:defRPr sz="1200" b="0">
-                <a:solidFill>
-                  <a:srgbClr val="7F8C8D"/>
-                </a:solidFill>
-              </a:defRPr>
-            </a:pPr>
-            <a:r>
-              <a:t>2,770 行 Python</a:t>
-            </a:r>
-          </a:p>
-          <a:p>
-            <a:pPr algn="l">
-              <a:defRPr sz="1400" b="0">
-                <a:solidFill>
-                  <a:srgbClr val="2C3E50"/>
-                </a:solidFill>
-              </a:defRPr>
-            </a:pPr>
-            <a:r>
-              <a:t>  • tools.py: RAG检索+模型推理</a:t>
-            </a:r>
-          </a:p>
-          <a:p>
-            <a:pPr algn="l">
-              <a:defRPr sz="1400" b="0">
-                <a:solidFill>
-                  <a:srgbClr val="2C3E50"/>
-                </a:solidFill>
-              </a:defRPr>
-            </a:pPr>
-            <a:r>
-              <a:t>  • agent_core.py: 三管道+CodeAgent</a:t>
-            </a:r>
-          </a:p>
-          <a:p>
-            <a:pPr algn="l">
-              <a:defRPr sz="1400" b="0">
-                <a:solidFill>
-                  <a:srgbClr val="2C3E50"/>
-                </a:solidFill>
-              </a:defRPr>
-            </a:pPr>
-            <a:r>
-              <a:t>  • build_index.py: FAISS索引构建</a:t>
-            </a:r>
-          </a:p>
-          <a:p>
-            <a:pPr algn="l">
-              <a:defRPr sz="1400" b="0">
-                <a:solidFill>
-                  <a:srgbClr val="2C3E50"/>
-                </a:solidFill>
-              </a:defRPr>
-            </a:pPr>
-            <a:r>
-              <a:t>  • 懒加载 + smolagents 兼容</a:t>
-            </a:r>
-          </a:p>
-        </p:txBody>
-      </p:sp>
-      <p:sp>
-        <p:nvSpPr>
-          <p:cNvPr id="4" name="Rectangle 3"/>
-          <p:cNvSpPr/>
-          <p:nvPr/>
-        </p:nvSpPr>
-        <p:spPr>
-          <a:xfrm>
-            <a:off x="4480559" y="2011680"/>
-            <a:ext cx="3474720" cy="3474720"/>
-          </a:xfrm>
-          <a:prstGeom prst="rect">
-            <a:avLst/>
-          </a:prstGeom>
-          <a:solidFill>
-            <a:srgbClr val="FFFFFF"/>
-          </a:solidFill>
-          <a:ln w="25400">
-            <a:solidFill>
-              <a:srgbClr val="27AE60"/>
-            </a:solidFill>
-          </a:ln>
-        </p:spPr>
-        <p:style>
-          <a:lnRef idx="1">
-            <a:schemeClr val="accent1"/>
-          </a:lnRef>
-          <a:fillRef idx="3">
-            <a:schemeClr val="accent1"/>
-          </a:fillRef>
-          <a:effectRef idx="2">
-            <a:schemeClr val="accent1"/>
-          </a:effectRef>
-          <a:fontRef idx="minor">
-            <a:schemeClr val="lt1"/>
-          </a:fontRef>
-        </p:style>
-        <p:txBody>
-          <a:bodyPr rtlCol="0" anchor="ctr"/>
-          <a:lstStyle/>
-          <a:p>
-            <a:pPr algn="ctr">
-              <a:defRPr sz="2000" b="1">
-                <a:solidFill>
-                  <a:srgbClr val="27AE60"/>
-                </a:solidFill>
-              </a:defRPr>
-            </a:pPr>
-            <a:r>
-              <a:t>📊 评测框架</a:t>
-            </a:r>
-          </a:p>
-          <a:p>
-            <a:pPr algn="ctr">
-              <a:defRPr sz="1200" b="0">
-                <a:solidFill>
-                  <a:srgbClr val="7F8C8D"/>
-                </a:solidFill>
-              </a:defRPr>
-            </a:pPr>
-            <a:r>
-              <a:t>150条公平测试集</a:t>
-            </a:r>
-          </a:p>
-          <a:p>
-            <a:pPr algn="l">
-              <a:defRPr sz="1400" b="0">
-                <a:solidFill>
-                  <a:srgbClr val="2C3E50"/>
-                </a:solidFill>
-              </a:defRPr>
-            </a:pPr>
-            <a:r>
-              <a:t>  • MD5哈希去重(排除训练集)</a:t>
-            </a:r>
-          </a:p>
-          <a:p>
-            <a:pPr algn="l">
-              <a:defRPr sz="1400" b="0">
-                <a:solidFill>
-                  <a:srgbClr val="2C3E50"/>
-                </a:solidFill>
-              </a:defRPr>
-            </a:pPr>
-            <a:r>
-              <a:t>  • 5领域分层抽样 seed=42</a:t>
-            </a:r>
-          </a:p>
-          <a:p>
-            <a:pPr algn="l">
-              <a:defRPr sz="1400" b="0">
-                <a:solidFill>
-                  <a:srgbClr val="2C3E50"/>
-                </a:solidFill>
-              </a:defRPr>
-            </a:pPr>
-            <a:r>
-              <a:t>  • RAGAS: Faithfulness+Relevancy</a:t>
-            </a:r>
-          </a:p>
-          <a:p>
-            <a:pPr algn="l">
-              <a:defRPr sz="1400" b="0">
-                <a:solidFill>
-                  <a:srgbClr val="2C3E50"/>
-                </a:solidFill>
-              </a:defRPr>
-            </a:pPr>
-            <a:r>
-              <a:t>  • 4种可视化图表</a:t>
-            </a:r>
-          </a:p>
-        </p:txBody>
-      </p:sp>
-      <p:sp>
-        <p:nvSpPr>
-          <p:cNvPr id="5" name="Rectangle 4"/>
-          <p:cNvSpPr/>
-          <p:nvPr/>
-        </p:nvSpPr>
-        <p:spPr>
-          <a:xfrm>
-            <a:off x="8229600" y="2011680"/>
-            <a:ext cx="3474720" cy="3474720"/>
-          </a:xfrm>
-          <a:prstGeom prst="rect">
-            <a:avLst/>
-          </a:prstGeom>
-          <a:solidFill>
-            <a:srgbClr val="FFFFFF"/>
-          </a:solidFill>
-          <a:ln w="25400">
-            <a:solidFill>
-              <a:srgbClr val="E67E22"/>
-            </a:solidFill>
-          </a:ln>
-        </p:spPr>
-        <p:style>
-          <a:lnRef idx="1">
-            <a:schemeClr val="accent1"/>
-          </a:lnRef>
-          <a:fillRef idx="3">
-            <a:schemeClr val="accent1"/>
-          </a:fillRef>
-          <a:effectRef idx="2">
-            <a:schemeClr val="accent1"/>
-          </a:effectRef>
-          <a:fontRef idx="minor">
-            <a:schemeClr val="lt1"/>
-          </a:fontRef>
-        </p:style>
-        <p:txBody>
-          <a:bodyPr rtlCol="0" anchor="ctr"/>
-          <a:lstStyle/>
-          <a:p>
-            <a:pPr algn="ctr">
-              <a:defRPr sz="2000" b="1">
-                <a:solidFill>
-                  <a:srgbClr val="E67E22"/>
-                </a:solidFill>
-              </a:defRPr>
-            </a:pPr>
-            <a:r>
-              <a:t>🌐 Web Demo</a:t>
-            </a:r>
-          </a:p>
-          <a:p>
-            <a:pPr algn="ctr">
-              <a:defRPr sz="1200" b="0">
-                <a:solidFill>
-                  <a:srgbClr val="7F8C8D"/>
-                </a:solidFill>
-              </a:defRPr>
-            </a:pPr>
-            <a:r>
-              <a:t>Gradio 中文界面</a:t>
-            </a:r>
-          </a:p>
-          <a:p>
-            <a:pPr algn="l">
-              <a:defRPr sz="1400" b="0">
-                <a:solidFill>
-                  <a:srgbClr val="2C3E50"/>
-                </a:solidFill>
-              </a:defRPr>
-            </a:pPr>
-            <a:r>
-              <a:t>  • GPU 真机推理 RTX 3060</a:t>
-            </a:r>
-          </a:p>
-          <a:p>
-            <a:pPr algn="l">
-              <a:defRPr sz="1400" b="0">
-                <a:solidFill>
-                  <a:srgbClr val="2C3E50"/>
-                </a:solidFill>
-              </a:defRPr>
-            </a:pPr>
-            <a:r>
-              <a:t>  • 3 种模式实时切换</a:t>
-            </a:r>
-          </a:p>
-          <a:p>
-            <a:pPr algn="l">
-              <a:defRPr sz="1400" b="0">
-                <a:solidFill>
-                  <a:srgbClr val="2C3E50"/>
-                </a:solidFill>
-              </a:defRPr>
-            </a:pPr>
-            <a:r>
-              <a:t>  • 评测数据内嵌展示</a:t>
-            </a:r>
-          </a:p>
-          <a:p>
-            <a:pPr algn="l">
-              <a:defRPr sz="1400" b="0">
-                <a:solidFill>
-                  <a:srgbClr val="2C3E50"/>
-                </a:solidFill>
-              </a:defRPr>
-            </a:pPr>
-            <a:r>
-              <a:t>  • 预设示例问题</a:t>
-            </a:r>
-          </a:p>
-        </p:txBody>
-      </p:sp>
-    </p:spTree>
-  </p:cSld>
-  <p:clrMapOvr>
-    <a:masterClrMapping/>
-  </p:clrMapOvr>
-</p:sld>
-</file>
-
-<file path=ppt/slides/slide8.xml><?xml version="1.0" encoding="utf-8"?>
-<p:sld xmlns:a="http://schemas.openxmlformats.org/drawingml/2006/main" xmlns:p="http://schemas.openxmlformats.org/presentationml/2006/main" xmlns:r="http://schemas.openxmlformats.org/officeDocument/2006/relationships">
-  <p:cSld>
-    <p:bg>
-      <p:bgPr>
-        <a:solidFill>
-          <a:srgbClr val="FFFFFF"/>
-        </a:solidFill>
-        <a:effectLst/>
-      </p:bgPr>
-    </p:bg>
-    <p:spTree>
-      <p:nvGrpSpPr>
-        <p:cNvPr id="1" name=""/>
-        <p:cNvGrpSpPr/>
-        <p:nvPr/>
-      </p:nvGrpSpPr>
-      <p:grpSpPr/>
-      <p:sp>
-        <p:nvSpPr>
-          <p:cNvPr id="2" name="TextBox 1"/>
-          <p:cNvSpPr txBox="1"/>
-          <p:nvPr/>
-        </p:nvSpPr>
-        <p:spPr>
-          <a:xfrm>
-            <a:off x="457200" y="274320"/>
-            <a:ext cx="10972800" cy="914400"/>
-          </a:xfrm>
-          <a:prstGeom prst="rect">
-            <a:avLst/>
-          </a:prstGeom>
-          <a:noFill/>
-        </p:spPr>
-        <p:txBody>
-          <a:bodyPr wrap="square">
-            <a:spAutoFit/>
-          </a:bodyPr>
-          <a:lstStyle/>
-          <a:p>
-            <a:pPr algn="l">
-              <a:defRPr sz="2800" b="1">
-                <a:solidFill>
-                  <a:srgbClr val="1A5276"/>
-                </a:solidFill>
-              </a:defRPr>
-            </a:pPr>
-            <a:r>
-              <a:t>📊 评测方法论 — 如何评估 Agent 效果？ ★</a:t>
-            </a:r>
-          </a:p>
-        </p:txBody>
-      </p:sp>
-      <p:sp>
-        <p:nvSpPr>
-          <p:cNvPr id="3" name="Rectangle 2"/>
-          <p:cNvSpPr/>
-          <p:nvPr/>
-        </p:nvSpPr>
-        <p:spPr>
-          <a:xfrm>
-            <a:off x="914400" y="1371600"/>
-            <a:ext cx="10058400" cy="1097280"/>
-          </a:xfrm>
-          <a:prstGeom prst="rect">
-            <a:avLst/>
-          </a:prstGeom>
-          <a:solidFill>
-            <a:srgbClr val="FAFAFA"/>
-          </a:solidFill>
-          <a:ln w="25400">
-            <a:solidFill>
-              <a:srgbClr val="2E86C1"/>
-            </a:solidFill>
-          </a:ln>
-        </p:spPr>
-        <p:style>
-          <a:lnRef idx="1">
-            <a:schemeClr val="accent1"/>
-          </a:lnRef>
-          <a:fillRef idx="3">
-            <a:schemeClr val="accent1"/>
-          </a:fillRef>
-          <a:effectRef idx="2">
-            <a:schemeClr val="accent1"/>
-          </a:effectRef>
-          <a:fontRef idx="minor">
-            <a:schemeClr val="lt1"/>
-          </a:fontRef>
-        </p:style>
-        <p:txBody>
-          <a:bodyPr rtlCol="0" anchor="ctr"/>
-          <a:lstStyle/>
-          <a:p>
-            <a:pPr algn="l">
-              <a:defRPr sz="1800" b="1">
-                <a:solidFill>
-                  <a:srgbClr val="2E86C1"/>
-                </a:solidFill>
-              </a:defRPr>
-            </a:pPr>
-            <a:r>
-              <a:t>1️⃣ 测试集准备</a:t>
-            </a:r>
-          </a:p>
-          <a:p>
-            <a:pPr algn="l">
-              <a:defRPr sz="1400" b="0">
-                <a:solidFill>
-                  <a:srgbClr val="2C3E50"/>
-                </a:solidFill>
-              </a:defRPr>
-            </a:pPr>
-            <a:r>
-              <a:t>78K 语料 → MD5哈希排除SFT训练集 → 5领域分层抽样 → 150条公平测试题</a:t>
-            </a:r>
-          </a:p>
-        </p:txBody>
-      </p:sp>
-      <p:sp>
-        <p:nvSpPr>
-          <p:cNvPr id="4" name="Rectangle 3"/>
-          <p:cNvSpPr/>
-          <p:nvPr/>
-        </p:nvSpPr>
-        <p:spPr>
-          <a:xfrm>
-            <a:off x="914400" y="2651760"/>
-            <a:ext cx="10058400" cy="1097280"/>
-          </a:xfrm>
-          <a:prstGeom prst="rect">
-            <a:avLst/>
-          </a:prstGeom>
-          <a:solidFill>
-            <a:srgbClr val="FAFAFA"/>
-          </a:solidFill>
-          <a:ln w="25400">
-            <a:solidFill>
-              <a:srgbClr val="27AE60"/>
-            </a:solidFill>
-          </a:ln>
-        </p:spPr>
-        <p:style>
-          <a:lnRef idx="1">
-            <a:schemeClr val="accent1"/>
-          </a:lnRef>
-          <a:fillRef idx="3">
-            <a:schemeClr val="accent1"/>
-          </a:fillRef>
-          <a:effectRef idx="2">
-            <a:schemeClr val="accent1"/>
-          </a:effectRef>
-          <a:fontRef idx="minor">
-            <a:schemeClr val="lt1"/>
-          </a:fontRef>
-        </p:style>
-        <p:txBody>
-          <a:bodyPr rtlCol="0" anchor="ctr"/>
-          <a:lstStyle/>
-          <a:p>
-            <a:pPr algn="l">
-              <a:defRPr sz="1800" b="1">
-                <a:solidFill>
-                  <a:srgbClr val="27AE60"/>
-                </a:solidFill>
-              </a:defRPr>
-            </a:pPr>
-            <a:r>
-              <a:t>2️⃣ RAGAS 双指标</a:t>
-            </a:r>
-          </a:p>
-          <a:p>
-            <a:pPr algn="l">
-              <a:defRPr sz="1400" b="0">
-                <a:solidFill>
-                  <a:srgbClr val="2C3E50"/>
-                </a:solidFill>
-              </a:defRPr>
-            </a:pPr>
-            <a:r>
-              <a:t>Faithfulness（忠实度）：答案能否从上下文推断？防止编造</a:t>
+              <a:t>同一问题 → 三管道并行推理 → 统一 RAGAS 打分 → 记录耗时</a:t>
             </a:r>
             <a:br/>
             <a:r>
-              <a:t>Answer Relevancy（相关性）：答案是否切题？防止跑题</a:t>
-            </a:r>
-          </a:p>
-        </p:txBody>
-      </p:sp>
-      <p:sp>
-        <p:nvSpPr>
-          <p:cNvPr id="5" name="Rectangle 4"/>
-          <p:cNvSpPr/>
-          <p:nvPr/>
-        </p:nvSpPr>
-        <p:spPr>
-          <a:xfrm>
-            <a:off x="914400" y="3931920"/>
-            <a:ext cx="10058400" cy="1097280"/>
-          </a:xfrm>
-          <a:prstGeom prst="rect">
-            <a:avLst/>
-          </a:prstGeom>
-          <a:solidFill>
-            <a:srgbClr val="FAFAFA"/>
-          </a:solidFill>
-          <a:ln w="25400">
-            <a:solidFill>
-              <a:srgbClr val="E67E22"/>
-            </a:solidFill>
-          </a:ln>
-        </p:spPr>
-        <p:style>
-          <a:lnRef idx="1">
-            <a:schemeClr val="accent1"/>
-          </a:lnRef>
-          <a:fillRef idx="3">
-            <a:schemeClr val="accent1"/>
-          </a:fillRef>
-          <a:effectRef idx="2">
-            <a:schemeClr val="accent1"/>
-          </a:effectRef>
-          <a:fontRef idx="minor">
-            <a:schemeClr val="lt1"/>
-          </a:fontRef>
-        </p:style>
-        <p:txBody>
-          <a:bodyPr rtlCol="0" anchor="ctr"/>
-          <a:lstStyle/>
-          <a:p>
-            <a:pPr algn="l">
-              <a:defRPr sz="1800" b="1">
-                <a:solidFill>
-                  <a:srgbClr val="E67E22"/>
-                </a:solidFill>
-              </a:defRPr>
-            </a:pPr>
-            <a:r>
-              <a:t>3️⃣ 三管道评测</a:t>
-            </a:r>
-          </a:p>
-          <a:p>
-            <a:pPr algn="l">
-              <a:defRPr sz="1400" b="0">
-                <a:solidFill>
-                  <a:srgbClr val="2C3E50"/>
-                </a:solidFill>
-              </a:defRPr>
-            </a:pPr>
-            <a:r>
-              <a:t>同一问题 → 三管道并行推理 → 统一RAGAS打分 → 记录耗时</a:t>
-            </a:r>
-          </a:p>
-        </p:txBody>
-      </p:sp>
-      <p:sp>
-        <p:nvSpPr>
-          <p:cNvPr id="6" name="Rectangle 5"/>
-          <p:cNvSpPr/>
-          <p:nvPr/>
-        </p:nvSpPr>
-        <p:spPr>
-          <a:xfrm>
-            <a:off x="914400" y="5212079"/>
-            <a:ext cx="10058400" cy="1097280"/>
-          </a:xfrm>
-          <a:prstGeom prst="rect">
-            <a:avLst/>
-          </a:prstGeom>
-          <a:solidFill>
-            <a:srgbClr val="FAFAFA"/>
-          </a:solidFill>
-          <a:ln w="25400">
-            <a:solidFill>
-              <a:srgbClr val="8E44AD"/>
-            </a:solidFill>
-          </a:ln>
-        </p:spPr>
-        <p:style>
-          <a:lnRef idx="1">
-            <a:schemeClr val="accent1"/>
-          </a:lnRef>
-          <a:fillRef idx="3">
-            <a:schemeClr val="accent1"/>
-          </a:fillRef>
-          <a:effectRef idx="2">
-            <a:schemeClr val="accent1"/>
-          </a:effectRef>
-          <a:fontRef idx="minor">
-            <a:schemeClr val="lt1"/>
-          </a:fontRef>
-        </p:style>
-        <p:txBody>
-          <a:bodyPr rtlCol="0" anchor="ctr"/>
-          <a:lstStyle/>
-          <a:p>
-            <a:pPr algn="l">
-              <a:defRPr sz="1800" b="1">
-                <a:solidFill>
-                  <a:srgbClr val="8E44AD"/>
-                </a:solidFill>
-              </a:defRPr>
-            </a:pPr>
-            <a:r>
-              <a:t>4️⃣ 可视化分析</a:t>
-            </a:r>
-          </a:p>
-          <a:p>
-            <a:pPr algn="l">
-              <a:defRPr sz="1400" b="0">
-                <a:solidFill>
-                  <a:srgbClr val="2C3E50"/>
-                </a:solidFill>
-              </a:defRPr>
-            </a:pPr>
-            <a:r>
-              <a:t>柱状图对比 · 雷达图 · 各领域细分 · 时间质量散点图</a:t>
-            </a:r>
-          </a:p>
-        </p:txBody>
-      </p:sp>
-    </p:spTree>
-  </p:cSld>
-  <p:clrMapOvr>
-    <a:masterClrMapping/>
-  </p:clrMapOvr>
-</p:sld>
-</file>
-
-<file path=ppt/slides/slide9.xml><?xml version="1.0" encoding="utf-8"?>
-<p:sld xmlns:a="http://schemas.openxmlformats.org/drawingml/2006/main" xmlns:p="http://schemas.openxmlformats.org/presentationml/2006/main" xmlns:r="http://schemas.openxmlformats.org/officeDocument/2006/relationships">
-  <p:cSld>
-    <p:bg>
-      <p:bgPr>
-        <a:solidFill>
-          <a:srgbClr val="FFFFFF"/>
-        </a:solidFill>
-        <a:effectLst/>
-      </p:bgPr>
-    </p:bg>
-    <p:spTree>
-      <p:nvGrpSpPr>
-        <p:cNvPr id="1" name=""/>
-        <p:cNvGrpSpPr/>
-        <p:nvPr/>
-      </p:nvGrpSpPr>
-      <p:grpSpPr/>
-      <p:sp>
-        <p:nvSpPr>
-          <p:cNvPr id="2" name="TextBox 1"/>
-          <p:cNvSpPr txBox="1"/>
-          <p:nvPr/>
-        </p:nvSpPr>
-        <p:spPr>
-          <a:xfrm>
-            <a:off x="457200" y="274320"/>
-            <a:ext cx="10972800" cy="914400"/>
-          </a:xfrm>
-          <a:prstGeom prst="rect">
-            <a:avLst/>
-          </a:prstGeom>
-          <a:noFill/>
-        </p:spPr>
-        <p:txBody>
-          <a:bodyPr wrap="square">
-            <a:spAutoFit/>
-          </a:bodyPr>
-          <a:lstStyle/>
-          <a:p>
-            <a:pPr algn="l">
-              <a:defRPr sz="3200" b="1">
-                <a:solidFill>
-                  <a:srgbClr val="1A5276"/>
-                </a:solidFill>
-              </a:defRPr>
-            </a:pPr>
-            <a:r>
-              <a:t>📊 评测结果对比</a:t>
-            </a:r>
-          </a:p>
-        </p:txBody>
-      </p:sp>
-      <p:sp>
-        <p:nvSpPr>
-          <p:cNvPr id="3" name="TextBox 2"/>
-          <p:cNvSpPr txBox="1"/>
-          <p:nvPr/>
-        </p:nvSpPr>
-        <p:spPr>
-          <a:xfrm>
-            <a:off x="457200" y="1188720"/>
-            <a:ext cx="10972800" cy="457200"/>
-          </a:xfrm>
-          <a:prstGeom prst="rect">
-            <a:avLst/>
-          </a:prstGeom>
-          <a:noFill/>
-        </p:spPr>
-        <p:txBody>
-          <a:bodyPr wrap="square">
-            <a:spAutoFit/>
-          </a:bodyPr>
-          <a:lstStyle/>
-          <a:p>
-            <a:pPr algn="l">
-              <a:defRPr sz="1600" b="0">
-                <a:solidFill>
-                  <a:srgbClr val="7F8C8D"/>
-                </a:solidFill>
-              </a:defRPr>
-            </a:pPr>
-            <a:r>
-              <a:t>RAGAS 双轨评测 — Faithfulness (忠实度) &amp; Answer Relevancy (答案相关性)</a:t>
-            </a:r>
-          </a:p>
-        </p:txBody>
-      </p:sp>
-      <p:sp>
-        <p:nvSpPr>
-          <p:cNvPr id="4" name="TextBox 3"/>
-          <p:cNvSpPr txBox="1"/>
-          <p:nvPr/>
-        </p:nvSpPr>
-        <p:spPr>
-          <a:xfrm>
-            <a:off x="731520" y="1828800"/>
-            <a:ext cx="2286000" cy="548640"/>
-          </a:xfrm>
-          <a:prstGeom prst="rect">
-            <a:avLst/>
-          </a:prstGeom>
-          <a:noFill/>
-        </p:spPr>
-        <p:txBody>
-          <a:bodyPr wrap="square">
-            <a:spAutoFit/>
-          </a:bodyPr>
-          <a:lstStyle/>
-          <a:p>
-            <a:pPr algn="ctr">
-              <a:defRPr sz="1600" b="1">
-                <a:solidFill>
-                  <a:srgbClr val="1A5276"/>
-                </a:solidFill>
-              </a:defRPr>
-            </a:pPr>
-            <a:r>
-              <a:t>管道</a:t>
-            </a:r>
-          </a:p>
-        </p:txBody>
-      </p:sp>
-      <p:sp>
-        <p:nvSpPr>
-          <p:cNvPr id="5" name="TextBox 4"/>
-          <p:cNvSpPr txBox="1"/>
-          <p:nvPr/>
-        </p:nvSpPr>
-        <p:spPr>
-          <a:xfrm>
-            <a:off x="4114800" y="1828800"/>
-            <a:ext cx="2286000" cy="548640"/>
-          </a:xfrm>
-          <a:prstGeom prst="rect">
-            <a:avLst/>
-          </a:prstGeom>
-          <a:noFill/>
-        </p:spPr>
-        <p:txBody>
-          <a:bodyPr wrap="square">
-            <a:spAutoFit/>
-          </a:bodyPr>
-          <a:lstStyle/>
-          <a:p>
-            <a:pPr algn="ctr">
-              <a:defRPr sz="1600" b="1">
-                <a:solidFill>
-                  <a:srgbClr val="1A5276"/>
-                </a:solidFill>
-              </a:defRPr>
-            </a:pPr>
-            <a:r>
-              <a:t>Faithfulness</a:t>
-            </a:r>
-          </a:p>
-        </p:txBody>
-      </p:sp>
-      <p:sp>
-        <p:nvSpPr>
-          <p:cNvPr id="6" name="TextBox 5"/>
-          <p:cNvSpPr txBox="1"/>
-          <p:nvPr/>
-        </p:nvSpPr>
-        <p:spPr>
-          <a:xfrm>
-            <a:off x="6858000" y="1828800"/>
-            <a:ext cx="2286000" cy="548640"/>
-          </a:xfrm>
-          <a:prstGeom prst="rect">
-            <a:avLst/>
-          </a:prstGeom>
-          <a:noFill/>
-        </p:spPr>
-        <p:txBody>
-          <a:bodyPr wrap="square">
-            <a:spAutoFit/>
-          </a:bodyPr>
-          <a:lstStyle/>
-          <a:p>
-            <a:pPr algn="ctr">
-              <a:defRPr sz="1600" b="1">
-                <a:solidFill>
-                  <a:srgbClr val="1A5276"/>
-                </a:solidFill>
-              </a:defRPr>
-            </a:pPr>
-            <a:r>
-              <a:t>Answer Relevancy</a:t>
-            </a:r>
-          </a:p>
-        </p:txBody>
-      </p:sp>
-      <p:sp>
-        <p:nvSpPr>
-          <p:cNvPr id="7" name="TextBox 6"/>
-          <p:cNvSpPr txBox="1"/>
-          <p:nvPr/>
-        </p:nvSpPr>
-        <p:spPr>
-          <a:xfrm>
-            <a:off x="9601200" y="1828800"/>
-            <a:ext cx="2286000" cy="548640"/>
-          </a:xfrm>
-          <a:prstGeom prst="rect">
-            <a:avLst/>
-          </a:prstGeom>
-          <a:noFill/>
-        </p:spPr>
-        <p:txBody>
-          <a:bodyPr wrap="square">
-            <a:spAutoFit/>
-          </a:bodyPr>
-          <a:lstStyle/>
-          <a:p>
-            <a:pPr algn="ctr">
-              <a:defRPr sz="1600" b="1">
-                <a:solidFill>
-                  <a:srgbClr val="1A5276"/>
-                </a:solidFill>
-              </a:defRPr>
-            </a:pPr>
-            <a:r>
-              <a:t>速度</a:t>
-            </a:r>
-          </a:p>
-        </p:txBody>
-      </p:sp>
-      <p:sp>
-        <p:nvSpPr>
-          <p:cNvPr id="8" name="Rectangle 7"/>
-          <p:cNvSpPr/>
-          <p:nvPr/>
-        </p:nvSpPr>
-        <p:spPr>
-          <a:xfrm>
-            <a:off x="457200" y="2743200"/>
-            <a:ext cx="10972800" cy="914400"/>
-          </a:xfrm>
-          <a:prstGeom prst="rect">
-            <a:avLst/>
-          </a:prstGeom>
-          <a:solidFill>
-            <a:srgbClr val="FDEEEF"/>
-          </a:solidFill>
-          <a:ln w="25400">
-            <a:solidFill>
-              <a:srgbClr val="E63946"/>
-            </a:solidFill>
-          </a:ln>
-        </p:spPr>
-        <p:style>
-          <a:lnRef idx="1">
-            <a:schemeClr val="accent1"/>
-          </a:lnRef>
-          <a:fillRef idx="3">
-            <a:schemeClr val="accent1"/>
-          </a:fillRef>
-          <a:effectRef idx="2">
-            <a:schemeClr val="accent1"/>
-          </a:effectRef>
-          <a:fontRef idx="minor">
-            <a:schemeClr val="lt1"/>
-          </a:fontRef>
-        </p:style>
-        <p:txBody>
-          <a:bodyPr rtlCol="0" anchor="ctr"/>
-          <a:lstStyle/>
-          <a:p>
-            <a:pPr algn="ctr">
-              <a:defRPr sz="1600" b="0">
-                <a:solidFill>
-                  <a:srgbClr val="2C3E50"/>
-                </a:solidFill>
-              </a:defRPr>
-            </a:pPr>
-            <a:r>
-              <a:t>🔴 Pure RAG (1.5B+检索)         Faithfulness: 0.5954         Answer Relevancy: 0.8744         速度: 中</a:t>
-            </a:r>
-          </a:p>
-        </p:txBody>
-      </p:sp>
-      <p:sp>
-        <p:nvSpPr>
-          <p:cNvPr id="9" name="Rectangle 8"/>
-          <p:cNvSpPr/>
-          <p:nvPr/>
-        </p:nvSpPr>
-        <p:spPr>
-          <a:xfrm>
-            <a:off x="457200" y="3931920"/>
-            <a:ext cx="10972800" cy="914400"/>
-          </a:xfrm>
-          <a:prstGeom prst="rect">
-            <a:avLst/>
-          </a:prstGeom>
-          <a:solidFill>
-            <a:srgbClr val="E8F8F0"/>
-          </a:solidFill>
-          <a:ln w="25400">
-            <a:solidFill>
-              <a:srgbClr val="2E86C1"/>
-            </a:solidFill>
-          </a:ln>
-        </p:spPr>
-        <p:style>
-          <a:lnRef idx="1">
-            <a:schemeClr val="accent1"/>
-          </a:lnRef>
-          <a:fillRef idx="3">
-            <a:schemeClr val="accent1"/>
-          </a:fillRef>
-          <a:effectRef idx="2">
-            <a:schemeClr val="accent1"/>
-          </a:effectRef>
-          <a:fontRef idx="minor">
-            <a:schemeClr val="lt1"/>
-          </a:fontRef>
-        </p:style>
-        <p:txBody>
-          <a:bodyPr rtlCol="0" anchor="ctr"/>
-          <a:lstStyle/>
-          <a:p>
-            <a:pPr algn="ctr">
-              <a:defRPr sz="1600" b="0">
-                <a:solidFill>
-                  <a:srgbClr val="2C3E50"/>
-                </a:solidFill>
-              </a:defRPr>
-            </a:pPr>
-            <a:r>
-              <a:t>🔵 Pure SFT (微调1.5B)         Faithfulness: 0.8673         Answer Relevancy: 0.8602         速度: 快 ⚡</a:t>
-            </a:r>
-          </a:p>
-        </p:txBody>
-      </p:sp>
-      <p:sp>
-        <p:nvSpPr>
-          <p:cNvPr id="10" name="Rectangle 9"/>
-          <p:cNvSpPr/>
-          <p:nvPr/>
-        </p:nvSpPr>
-        <p:spPr>
-          <a:xfrm>
-            <a:off x="457200" y="5120640"/>
-            <a:ext cx="10972800" cy="914400"/>
-          </a:xfrm>
-          <a:prstGeom prst="rect">
-            <a:avLst/>
-          </a:prstGeom>
-          <a:solidFill>
-            <a:srgbClr val="FDF2E9"/>
-          </a:solidFill>
-          <a:ln w="25400">
-            <a:solidFill>
-              <a:srgbClr val="27AE60"/>
-            </a:solidFill>
-          </a:ln>
-        </p:spPr>
-        <p:style>
-          <a:lnRef idx="1">
-            <a:schemeClr val="accent1"/>
-          </a:lnRef>
-          <a:fillRef idx="3">
-            <a:schemeClr val="accent1"/>
-          </a:fillRef>
-          <a:effectRef idx="2">
-            <a:schemeClr val="accent1"/>
-          </a:effectRef>
-          <a:fontRef idx="minor">
-            <a:schemeClr val="lt1"/>
-          </a:fontRef>
-        </p:style>
-        <p:txBody>
-          <a:bodyPr rtlCol="0" anchor="ctr"/>
-          <a:lstStyle/>
-          <a:p>
-            <a:pPr algn="ctr">
-              <a:defRPr sz="1600" b="0">
-                <a:solidFill>
-                  <a:srgbClr val="2C3E50"/>
-                </a:solidFill>
-              </a:defRPr>
-            </a:pPr>
-            <a:r>
-              <a:t>🟢 Hybrid (1.5B+RAG)         Faithfulness: 0.6179         Answer Relevancy: 0.8364         速度: 慢</a:t>
-            </a:r>
-          </a:p>
-        </p:txBody>
-      </p:sp>
-      <p:sp>
-        <p:nvSpPr>
-          <p:cNvPr id="11" name="TextBox 10"/>
-          <p:cNvSpPr txBox="1"/>
-          <p:nvPr/>
-        </p:nvSpPr>
-        <p:spPr>
-          <a:xfrm>
-            <a:off x="731520" y="6217920"/>
-            <a:ext cx="10058400" cy="457200"/>
-          </a:xfrm>
-          <a:prstGeom prst="rect">
-            <a:avLst/>
-          </a:prstGeom>
-          <a:noFill/>
-        </p:spPr>
-        <p:txBody>
-          <a:bodyPr wrap="square">
-            <a:spAutoFit/>
-          </a:bodyPr>
-          <a:lstStyle/>
-          <a:p>
-            <a:pPr algn="ctr">
-              <a:defRPr sz="1600" b="0">
-                <a:solidFill>
-                  <a:srgbClr val="27AE60"/>
-                </a:solidFill>
-              </a:defRPr>
-            </a:pPr>
-            <a:r>
-              <a:t>✨ 关键结论：QLoRA 微调 Faithfulness 最优 (0.87)，+45.6% vs Pure RAG。知识内化 &gt; 检索。</a:t>
+              <a:t>支持 GPU 真机 / CPU demo 双模式</a:t>
             </a:r>
           </a:p>
         </p:txBody>
